--- a/Coverity_Final_Slide_Updated.pptx
+++ b/Coverity_Final_Slide_Updated.pptx
@@ -3081,14 +3081,6 @@
 <file path=ppt/slides/slide1.xml><?xml version="1.0" encoding="utf-8"?>
 <p:sld xmlns:a="http://schemas.openxmlformats.org/drawingml/2006/main" xmlns:p="http://schemas.openxmlformats.org/presentationml/2006/main" xmlns:r="http://schemas.openxmlformats.org/officeDocument/2006/relationships">
   <p:cSld>
-    <p:bg>
-      <p:bgPr>
-        <a:solidFill>
-          <a:srgbClr val="0A0E1A"/>
-        </a:solidFill>
-        <a:effectLst/>
-      </p:bgPr>
-    </p:bg>
     <p:spTree>
       <p:nvGrpSpPr>
         <p:cNvPr id="1" name=""/>
@@ -3096,16 +3088,40 @@
         <p:nvPr/>
       </p:nvGrpSpPr>
       <p:grpSpPr/>
-      <p:sp>
-        <p:nvSpPr>
-          <p:cNvPr id="2" name="TextBox 1"/>
+      <p:pic>
+        <p:nvPicPr>
+          <p:cNvPr id="2" name="Picture 1" descr="slide_bg.png"/>
+          <p:cNvPicPr>
+            <a:picLocks noChangeAspect="1"/>
+          </p:cNvPicPr>
+          <p:nvPr/>
+        </p:nvPicPr>
+        <p:blipFill>
+          <a:blip r:embed="rId2"/>
+          <a:stretch>
+            <a:fillRect/>
+          </a:stretch>
+        </p:blipFill>
+        <p:spPr>
+          <a:xfrm>
+            <a:off x="0" y="0"/>
+            <a:ext cx="12191695" cy="6858000"/>
+          </a:xfrm>
+          <a:prstGeom prst="rect">
+            <a:avLst/>
+          </a:prstGeom>
+        </p:spPr>
+      </p:pic>
+      <p:sp>
+        <p:nvSpPr>
+          <p:cNvPr id="3" name="TextBox 2"/>
           <p:cNvSpPr txBox="1"/>
           <p:nvPr/>
         </p:nvSpPr>
         <p:spPr>
           <a:xfrm>
-            <a:off x="365760" y="137160"/>
-            <a:ext cx="2286000" cy="365760"/>
+            <a:off x="400050" y="151804"/>
+            <a:ext cx="3867149" cy="550068"/>
           </a:xfrm>
           <a:prstGeom prst="rect">
             <a:avLst/>
@@ -3113,35 +3129,50 @@
           <a:noFill/>
         </p:spPr>
         <p:txBody>
-          <a:bodyPr wrap="square" anchor="t">
+          <a:bodyPr wrap="none" anchor="t" lIns="0" rIns="0" tIns="0" bIns="0">
             <a:spAutoFit/>
           </a:bodyPr>
           <a:lstStyle/>
           <a:p>
             <a:pPr algn="l">
-              <a:defRPr sz="1800" b="1">
-                <a:solidFill>
-                  <a:srgbClr val="FFFFFF"/>
-                </a:solidFill>
-                <a:latin typeface="Calibri"/>
-              </a:defRPr>
+              <a:spcBef>
+                <a:spcPts val="0"/>
+              </a:spcBef>
+              <a:spcAft>
+                <a:spcPts val="0"/>
+              </a:spcAft>
             </a:pPr>
             <a:r>
-              <a:t>Honeywell</a:t>
-            </a:r>
-          </a:p>
-        </p:txBody>
-      </p:sp>
-      <p:sp>
-        <p:nvSpPr>
-          <p:cNvPr id="3" name="TextBox 2"/>
+              <a:rPr sz="1968" b="1">
+                <a:solidFill>
+                  <a:srgbClr val="F9FBFC"/>
+                </a:solidFill>
+                <a:latin typeface="DejaVu Sans"/>
+              </a:rPr>
+              <a:t>Honeywell </a:t>
+            </a:r>
+            <a:r>
+              <a:rPr sz="1968" b="0">
+                <a:solidFill>
+                  <a:srgbClr val="F9FBFC"/>
+                </a:solidFill>
+                <a:latin typeface="DejaVu Sans"/>
+              </a:rPr>
+              <a:t>Aerospace</a:t>
+            </a:r>
+          </a:p>
+        </p:txBody>
+      </p:sp>
+      <p:sp>
+        <p:nvSpPr>
+          <p:cNvPr id="4" name="TextBox 3"/>
           <p:cNvSpPr txBox="1"/>
           <p:nvPr/>
         </p:nvSpPr>
         <p:spPr>
           <a:xfrm>
-            <a:off x="365760" y="457200"/>
-            <a:ext cx="2286000" cy="274320"/>
+            <a:off x="10715625" y="205382"/>
+            <a:ext cx="2352675" cy="392906"/>
           </a:xfrm>
           <a:prstGeom prst="rect">
             <a:avLst/>
@@ -3149,65 +3180,28 @@
           <a:noFill/>
         </p:spPr>
         <p:txBody>
-          <a:bodyPr wrap="square" anchor="t">
+          <a:bodyPr wrap="none" anchor="t" lIns="0" rIns="0" tIns="0" bIns="0">
             <a:spAutoFit/>
           </a:bodyPr>
           <a:lstStyle/>
           <a:p>
             <a:pPr algn="l">
-              <a:defRPr sz="1400" b="0">
-                <a:solidFill>
-                  <a:srgbClr val="CCCCDD"/>
-                </a:solidFill>
-                <a:latin typeface="Calibri"/>
-              </a:defRPr>
+              <a:spcBef>
+                <a:spcPts val="0"/>
+              </a:spcBef>
+              <a:spcAft>
+                <a:spcPts val="0"/>
+              </a:spcAft>
             </a:pPr>
             <a:r>
-              <a:t>Aerospace</a:t>
-            </a:r>
-          </a:p>
-        </p:txBody>
-      </p:sp>
-      <p:sp>
-        <p:nvSpPr>
-          <p:cNvPr id="4" name="Oval 3"/>
-          <p:cNvSpPr/>
-          <p:nvPr/>
-        </p:nvSpPr>
-        <p:spPr>
-          <a:xfrm>
-            <a:off x="2743200" y="91440"/>
-            <a:ext cx="411480" cy="411480"/>
-          </a:xfrm>
-          <a:prstGeom prst="ellipse">
-            <a:avLst/>
-          </a:prstGeom>
-          <a:solidFill>
-            <a:srgbClr val="FF6B00"/>
-          </a:solidFill>
-          <a:ln>
-            <a:noFill/>
-          </a:ln>
-        </p:spPr>
-        <p:style>
-          <a:lnRef idx="1">
-            <a:schemeClr val="accent1"/>
-          </a:lnRef>
-          <a:fillRef idx="3">
-            <a:schemeClr val="accent1"/>
-          </a:fillRef>
-          <a:effectRef idx="2">
-            <a:schemeClr val="accent1"/>
-          </a:effectRef>
-          <a:fontRef idx="minor">
-            <a:schemeClr val="lt1"/>
-          </a:fontRef>
-        </p:style>
-        <p:txBody>
-          <a:bodyPr rtlCol="0" anchor="ctr"/>
-          <a:lstStyle/>
-          <a:p>
-            <a:pPr algn="ctr"/>
+              <a:rPr sz="1406" b="1">
+                <a:solidFill>
+                  <a:srgbClr val="EE6E1E"/>
+                </a:solidFill>
+                <a:latin typeface="DejaVu Sans"/>
+              </a:rPr>
+              <a:t>CNS AI Day 2026</a:t>
+            </a:r>
           </a:p>
         </p:txBody>
       </p:sp>
@@ -3219,8 +3213,8 @@
         </p:nvSpPr>
         <p:spPr>
           <a:xfrm>
-            <a:off x="3200400" y="45720"/>
-            <a:ext cx="6400800" cy="457200"/>
+            <a:off x="1229439" y="705445"/>
+            <a:ext cx="11457146" cy="982265"/>
           </a:xfrm>
           <a:prstGeom prst="rect">
             <a:avLst/>
@@ -3228,20 +3222,26 @@
           <a:noFill/>
         </p:spPr>
         <p:txBody>
-          <a:bodyPr wrap="square" anchor="t">
+          <a:bodyPr wrap="none" anchor="t" lIns="0" rIns="0" tIns="0" bIns="0">
             <a:spAutoFit/>
           </a:bodyPr>
           <a:lstStyle/>
           <a:p>
-            <a:pPr algn="l">
-              <a:defRPr sz="2600" b="1">
-                <a:solidFill>
-                  <a:srgbClr val="FF6B00"/>
-                </a:solidFill>
-                <a:latin typeface="Calibri"/>
-              </a:defRPr>
+            <a:pPr algn="ctr">
+              <a:spcBef>
+                <a:spcPts val="0"/>
+              </a:spcBef>
+              <a:spcAft>
+                <a:spcPts val="0"/>
+              </a:spcAft>
             </a:pPr>
             <a:r>
+              <a:rPr sz="3515" b="1">
+                <a:solidFill>
+                  <a:srgbClr val="F9FBFC"/>
+                </a:solidFill>
+                <a:latin typeface="DejaVu Sans"/>
+              </a:rPr>
               <a:t>COVERITY FINDINGS ANALYZER</a:t>
             </a:r>
           </a:p>
@@ -3255,8 +3255,8 @@
         </p:nvSpPr>
         <p:spPr>
           <a:xfrm>
-            <a:off x="2011680" y="502920"/>
-            <a:ext cx="8229600" cy="365760"/>
+            <a:off x="1470898" y="1321593"/>
+            <a:ext cx="10145553" cy="550068"/>
           </a:xfrm>
           <a:prstGeom prst="rect">
             <a:avLst/>
@@ -3264,20 +3264,26 @@
           <a:noFill/>
         </p:spPr>
         <p:txBody>
-          <a:bodyPr wrap="square" anchor="t">
+          <a:bodyPr wrap="none" anchor="t" lIns="0" rIns="0" tIns="0" bIns="0">
             <a:spAutoFit/>
           </a:bodyPr>
           <a:lstStyle/>
           <a:p>
             <a:pPr algn="ctr">
-              <a:defRPr sz="1400" b="0">
-                <a:solidFill>
-                  <a:srgbClr val="CCCCDD"/>
-                </a:solidFill>
-                <a:latin typeface="Calibri"/>
-              </a:defRPr>
+              <a:spcBef>
+                <a:spcPts val="0"/>
+              </a:spcBef>
+              <a:spcAft>
+                <a:spcPts val="0"/>
+              </a:spcAft>
             </a:pPr>
             <a:r>
+              <a:rPr sz="1968" b="0">
+                <a:solidFill>
+                  <a:srgbClr val="F9FBFC"/>
+                </a:solidFill>
+                <a:latin typeface="DejaVu Sans"/>
+              </a:rPr>
               <a:t>AI-Developed, Rule-Based Static Analysis for Aerospace</a:t>
             </a:r>
           </a:p>
@@ -3285,111 +3291,14 @@
       </p:sp>
       <p:sp>
         <p:nvSpPr>
-          <p:cNvPr id="7" name="Rounded Rectangle 6"/>
-          <p:cNvSpPr/>
-          <p:nvPr/>
-        </p:nvSpPr>
-        <p:spPr>
-          <a:xfrm>
-            <a:off x="9326880" y="73152"/>
-            <a:ext cx="2560320" cy="411480"/>
-          </a:xfrm>
-          <a:prstGeom prst="roundRect">
-            <a:avLst/>
-          </a:prstGeom>
-          <a:solidFill>
-            <a:srgbClr val="11182E"/>
-          </a:solidFill>
-          <a:ln w="19050">
-            <a:solidFill>
-              <a:srgbClr val="FF6B00"/>
-            </a:solidFill>
-          </a:ln>
-        </p:spPr>
-        <p:style>
-          <a:lnRef idx="1">
-            <a:schemeClr val="accent1"/>
-          </a:lnRef>
-          <a:fillRef idx="3">
-            <a:schemeClr val="accent1"/>
-          </a:fillRef>
-          <a:effectRef idx="2">
-            <a:schemeClr val="accent1"/>
-          </a:effectRef>
-          <a:fontRef idx="minor">
-            <a:schemeClr val="lt1"/>
-          </a:fontRef>
-        </p:style>
-        <p:txBody>
-          <a:bodyPr rtlCol="0" anchor="ctr"/>
-          <a:lstStyle/>
-          <a:p>
-            <a:pPr algn="ctr">
-              <a:defRPr sz="1300" b="1">
-                <a:solidFill>
-                  <a:srgbClr val="FF6B00"/>
-                </a:solidFill>
-              </a:defRPr>
-            </a:pPr>
-            <a:r>
-              <a:t>CNS AI Day 2026</a:t>
-            </a:r>
-          </a:p>
-        </p:txBody>
-      </p:sp>
-      <p:sp>
-        <p:nvSpPr>
-          <p:cNvPr id="8" name="Rectangle 7"/>
-          <p:cNvSpPr/>
-          <p:nvPr/>
-        </p:nvSpPr>
-        <p:spPr>
-          <a:xfrm>
-            <a:off x="274320" y="868680"/>
-            <a:ext cx="11612880" cy="18288"/>
-          </a:xfrm>
-          <a:prstGeom prst="rect">
-            <a:avLst/>
-          </a:prstGeom>
-          <a:solidFill>
-            <a:srgbClr val="FF6B00"/>
-          </a:solidFill>
-          <a:ln>
-            <a:noFill/>
-          </a:ln>
-        </p:spPr>
-        <p:style>
-          <a:lnRef idx="1">
-            <a:schemeClr val="accent1"/>
-          </a:lnRef>
-          <a:fillRef idx="3">
-            <a:schemeClr val="accent1"/>
-          </a:fillRef>
-          <a:effectRef idx="2">
-            <a:schemeClr val="accent1"/>
-          </a:effectRef>
-          <a:fontRef idx="minor">
-            <a:schemeClr val="lt1"/>
-          </a:fontRef>
-        </p:style>
-        <p:txBody>
-          <a:bodyPr rtlCol="0" anchor="ctr"/>
-          <a:lstStyle/>
-          <a:p>
-            <a:pPr algn="ctr"/>
-          </a:p>
-        </p:txBody>
-      </p:sp>
-      <p:sp>
-        <p:nvSpPr>
-          <p:cNvPr id="9" name="TextBox 8"/>
+          <p:cNvPr id="7" name="TextBox 6"/>
           <p:cNvSpPr txBox="1"/>
           <p:nvPr/>
         </p:nvSpPr>
         <p:spPr>
           <a:xfrm>
-            <a:off x="365760" y="1051560"/>
-            <a:ext cx="3657600" cy="320040"/>
+            <a:off x="838200" y="1973460"/>
+            <a:ext cx="3067050" cy="510778"/>
           </a:xfrm>
           <a:prstGeom prst="rect">
             <a:avLst/>
@@ -3397,35 +3306,41 @@
           <a:noFill/>
         </p:spPr>
         <p:txBody>
-          <a:bodyPr wrap="square" anchor="t">
+          <a:bodyPr wrap="none" anchor="t" lIns="0" rIns="0" tIns="0" bIns="0">
             <a:spAutoFit/>
           </a:bodyPr>
           <a:lstStyle/>
           <a:p>
             <a:pPr algn="l">
-              <a:defRPr sz="1600" b="1">
-                <a:solidFill>
-                  <a:srgbClr val="FF6B00"/>
-                </a:solidFill>
-                <a:latin typeface="Calibri"/>
-              </a:defRPr>
+              <a:spcBef>
+                <a:spcPts val="0"/>
+              </a:spcBef>
+              <a:spcAft>
+                <a:spcPts val="0"/>
+              </a:spcAft>
             </a:pPr>
             <a:r>
-              <a:t>  CORE FEATURES</a:t>
-            </a:r>
-          </a:p>
-        </p:txBody>
-      </p:sp>
-      <p:sp>
-        <p:nvSpPr>
-          <p:cNvPr id="10" name="TextBox 9"/>
+              <a:rPr sz="1828" b="1">
+                <a:solidFill>
+                  <a:srgbClr val="EE6E1E"/>
+                </a:solidFill>
+                <a:latin typeface="DejaVu Sans"/>
+              </a:rPr>
+              <a:t>CORE FEATURES</a:t>
+            </a:r>
+          </a:p>
+        </p:txBody>
+      </p:sp>
+      <p:sp>
+        <p:nvSpPr>
+          <p:cNvPr id="8" name="TextBox 7"/>
           <p:cNvSpPr txBox="1"/>
           <p:nvPr/>
         </p:nvSpPr>
         <p:spPr>
           <a:xfrm>
-            <a:off x="457200" y="1417320"/>
-            <a:ext cx="3474720" cy="201168"/>
+            <a:off x="742950" y="2375296"/>
+            <a:ext cx="3200400" cy="392906"/>
           </a:xfrm>
           <a:prstGeom prst="rect">
             <a:avLst/>
@@ -3433,20 +3348,26 @@
           <a:noFill/>
         </p:spPr>
         <p:txBody>
-          <a:bodyPr wrap="square" anchor="t">
+          <a:bodyPr wrap="none" anchor="t" lIns="0" rIns="0" tIns="0" bIns="0">
             <a:spAutoFit/>
           </a:bodyPr>
           <a:lstStyle/>
           <a:p>
             <a:pPr algn="l">
-              <a:defRPr sz="1100" b="1">
-                <a:solidFill>
-                  <a:srgbClr val="FFFFFF"/>
-                </a:solidFill>
-                <a:latin typeface="Calibri"/>
-              </a:defRPr>
+              <a:spcBef>
+                <a:spcPts val="0"/>
+              </a:spcBef>
+              <a:spcAft>
+                <a:spcPts val="0"/>
+              </a:spcAft>
             </a:pPr>
             <a:r>
+              <a:rPr sz="1406" b="1">
+                <a:solidFill>
+                  <a:srgbClr val="F9FBFC"/>
+                </a:solidFill>
+                <a:latin typeface="DejaVu Sans"/>
+              </a:rPr>
               <a:t>Aerospace Compliance</a:t>
             </a:r>
           </a:p>
@@ -3454,14 +3375,14 @@
       </p:sp>
       <p:sp>
         <p:nvSpPr>
-          <p:cNvPr id="11" name="TextBox 10"/>
+          <p:cNvPr id="9" name="TextBox 8"/>
           <p:cNvSpPr txBox="1"/>
           <p:nvPr/>
         </p:nvSpPr>
         <p:spPr>
           <a:xfrm>
-            <a:off x="457200" y="1600200"/>
-            <a:ext cx="3474720" cy="201168"/>
+            <a:off x="752475" y="2598539"/>
+            <a:ext cx="3181350" cy="412551"/>
           </a:xfrm>
           <a:prstGeom prst="rect">
             <a:avLst/>
@@ -3469,35 +3390,41 @@
           <a:noFill/>
         </p:spPr>
         <p:txBody>
-          <a:bodyPr wrap="square" anchor="t">
+          <a:bodyPr wrap="none" anchor="t" lIns="0" rIns="0" tIns="0" bIns="0">
             <a:spAutoFit/>
           </a:bodyPr>
           <a:lstStyle/>
           <a:p>
             <a:pPr algn="l">
-              <a:defRPr sz="1000" b="0">
-                <a:solidFill>
-                  <a:srgbClr val="CCCCDD"/>
-                </a:solidFill>
-                <a:latin typeface="Calibri"/>
-              </a:defRPr>
+              <a:spcBef>
+                <a:spcPts val="0"/>
+              </a:spcBef>
+              <a:spcAft>
+                <a:spcPts val="0"/>
+              </a:spcAft>
             </a:pPr>
             <a:r>
-              <a:t>  DO-178C, MISRA, CERT</a:t>
-            </a:r>
-          </a:p>
-        </p:txBody>
-      </p:sp>
-      <p:sp>
-        <p:nvSpPr>
-          <p:cNvPr id="12" name="TextBox 11"/>
+              <a:rPr sz="1476" b="0">
+                <a:solidFill>
+                  <a:srgbClr val="F9FBFC"/>
+                </a:solidFill>
+                <a:latin typeface="DejaVu Sans"/>
+              </a:rPr>
+              <a:t>- DO-178C, MISRA, CERT</a:t>
+            </a:r>
+          </a:p>
+        </p:txBody>
+      </p:sp>
+      <p:sp>
+        <p:nvSpPr>
+          <p:cNvPr id="10" name="TextBox 9"/>
           <p:cNvSpPr txBox="1"/>
           <p:nvPr/>
         </p:nvSpPr>
         <p:spPr>
           <a:xfrm>
-            <a:off x="457200" y="1965960"/>
-            <a:ext cx="3474720" cy="201168"/>
+            <a:off x="761999" y="2991445"/>
+            <a:ext cx="3086100" cy="373260"/>
           </a:xfrm>
           <a:prstGeom prst="rect">
             <a:avLst/>
@@ -3505,20 +3432,26 @@
           <a:noFill/>
         </p:spPr>
         <p:txBody>
-          <a:bodyPr wrap="square" anchor="t">
+          <a:bodyPr wrap="none" anchor="t" lIns="0" rIns="0" tIns="0" bIns="0">
             <a:spAutoFit/>
           </a:bodyPr>
           <a:lstStyle/>
           <a:p>
             <a:pPr algn="l">
-              <a:defRPr sz="1100" b="1">
-                <a:solidFill>
-                  <a:srgbClr val="FFFFFF"/>
-                </a:solidFill>
-                <a:latin typeface="Calibri"/>
-              </a:defRPr>
+              <a:spcBef>
+                <a:spcPts val="0"/>
+              </a:spcBef>
+              <a:spcAft>
+                <a:spcPts val="0"/>
+              </a:spcAft>
             </a:pPr>
             <a:r>
+              <a:rPr sz="1335" b="1">
+                <a:solidFill>
+                  <a:srgbClr val="F9FBFC"/>
+                </a:solidFill>
+                <a:latin typeface="DejaVu Sans"/>
+              </a:rPr>
               <a:t>100% Secure &amp; Offline</a:t>
             </a:r>
           </a:p>
@@ -3526,14 +3459,14 @@
       </p:sp>
       <p:sp>
         <p:nvSpPr>
-          <p:cNvPr id="13" name="TextBox 12"/>
+          <p:cNvPr id="11" name="TextBox 10"/>
           <p:cNvSpPr txBox="1"/>
           <p:nvPr/>
         </p:nvSpPr>
         <p:spPr>
           <a:xfrm>
-            <a:off x="457200" y="2148840"/>
-            <a:ext cx="3474720" cy="201168"/>
+            <a:off x="752475" y="3250406"/>
+            <a:ext cx="3581400" cy="373260"/>
           </a:xfrm>
           <a:prstGeom prst="rect">
             <a:avLst/>
@@ -3541,35 +3474,41 @@
           <a:noFill/>
         </p:spPr>
         <p:txBody>
-          <a:bodyPr wrap="square" anchor="t">
+          <a:bodyPr wrap="none" anchor="t" lIns="0" rIns="0" tIns="0" bIns="0">
             <a:spAutoFit/>
           </a:bodyPr>
           <a:lstStyle/>
           <a:p>
             <a:pPr algn="l">
-              <a:defRPr sz="1000" b="0">
-                <a:solidFill>
-                  <a:srgbClr val="CCCCDD"/>
-                </a:solidFill>
-                <a:latin typeface="Calibri"/>
-              </a:defRPr>
+              <a:spcBef>
+                <a:spcPts val="0"/>
+              </a:spcBef>
+              <a:spcAft>
+                <a:spcPts val="0"/>
+              </a:spcAft>
             </a:pPr>
             <a:r>
-              <a:t>  Source never leaves machine</a:t>
-            </a:r>
-          </a:p>
-        </p:txBody>
-      </p:sp>
-      <p:sp>
-        <p:nvSpPr>
-          <p:cNvPr id="14" name="TextBox 13"/>
+              <a:rPr sz="1335" b="0">
+                <a:solidFill>
+                  <a:srgbClr val="F9FBFC"/>
+                </a:solidFill>
+                <a:latin typeface="DejaVu Sans"/>
+              </a:rPr>
+              <a:t>- Source never leaves machine</a:t>
+            </a:r>
+          </a:p>
+        </p:txBody>
+      </p:sp>
+      <p:sp>
+        <p:nvSpPr>
+          <p:cNvPr id="12" name="TextBox 11"/>
           <p:cNvSpPr txBox="1"/>
           <p:nvPr/>
         </p:nvSpPr>
         <p:spPr>
           <a:xfrm>
-            <a:off x="457200" y="2514600"/>
-            <a:ext cx="3474720" cy="201168"/>
+            <a:off x="761999" y="3580804"/>
+            <a:ext cx="3133724" cy="373260"/>
           </a:xfrm>
           <a:prstGeom prst="rect">
             <a:avLst/>
@@ -3577,20 +3516,26 @@
           <a:noFill/>
         </p:spPr>
         <p:txBody>
-          <a:bodyPr wrap="square" anchor="t">
+          <a:bodyPr wrap="none" anchor="t" lIns="0" rIns="0" tIns="0" bIns="0">
             <a:spAutoFit/>
           </a:bodyPr>
           <a:lstStyle/>
           <a:p>
             <a:pPr algn="l">
-              <a:defRPr sz="1100" b="1">
-                <a:solidFill>
-                  <a:srgbClr val="FFFFFF"/>
-                </a:solidFill>
-                <a:latin typeface="Calibri"/>
-              </a:defRPr>
+              <a:spcBef>
+                <a:spcPts val="0"/>
+              </a:spcBef>
+              <a:spcAft>
+                <a:spcPts val="0"/>
+              </a:spcAft>
             </a:pPr>
             <a:r>
+              <a:rPr sz="1335" b="1">
+                <a:solidFill>
+                  <a:srgbClr val="F9FBFC"/>
+                </a:solidFill>
+                <a:latin typeface="DejaVu Sans"/>
+              </a:rPr>
               <a:t>No AI Tokens Required</a:t>
             </a:r>
           </a:p>
@@ -3598,14 +3543,14 @@
       </p:sp>
       <p:sp>
         <p:nvSpPr>
-          <p:cNvPr id="15" name="TextBox 14"/>
+          <p:cNvPr id="13" name="TextBox 12"/>
           <p:cNvSpPr txBox="1"/>
           <p:nvPr/>
         </p:nvSpPr>
         <p:spPr>
           <a:xfrm>
-            <a:off x="457200" y="2697480"/>
-            <a:ext cx="3474720" cy="201168"/>
+            <a:off x="752475" y="3848695"/>
+            <a:ext cx="2581275" cy="373260"/>
           </a:xfrm>
           <a:prstGeom prst="rect">
             <a:avLst/>
@@ -3613,35 +3558,41 @@
           <a:noFill/>
         </p:spPr>
         <p:txBody>
-          <a:bodyPr wrap="square" anchor="t">
+          <a:bodyPr wrap="none" anchor="t" lIns="0" rIns="0" tIns="0" bIns="0">
             <a:spAutoFit/>
           </a:bodyPr>
           <a:lstStyle/>
           <a:p>
             <a:pPr algn="l">
-              <a:defRPr sz="1000" b="0">
-                <a:solidFill>
-                  <a:srgbClr val="CCCCDD"/>
-                </a:solidFill>
-                <a:latin typeface="Calibri"/>
-              </a:defRPr>
+              <a:spcBef>
+                <a:spcPts val="0"/>
+              </a:spcBef>
+              <a:spcAft>
+                <a:spcPts val="0"/>
+              </a:spcAft>
             </a:pPr>
             <a:r>
-              <a:t>  Runs 100% offline</a:t>
-            </a:r>
-          </a:p>
-        </p:txBody>
-      </p:sp>
-      <p:sp>
-        <p:nvSpPr>
-          <p:cNvPr id="16" name="TextBox 15"/>
+              <a:rPr sz="1335" b="0">
+                <a:solidFill>
+                  <a:srgbClr val="F9FBFC"/>
+                </a:solidFill>
+                <a:latin typeface="DejaVu Sans"/>
+              </a:rPr>
+              <a:t>- Runs 100% offline</a:t>
+            </a:r>
+          </a:p>
+        </p:txBody>
+      </p:sp>
+      <p:sp>
+        <p:nvSpPr>
+          <p:cNvPr id="14" name="TextBox 13"/>
           <p:cNvSpPr txBox="1"/>
           <p:nvPr/>
         </p:nvSpPr>
         <p:spPr>
           <a:xfrm>
-            <a:off x="457200" y="3063240"/>
-            <a:ext cx="3474720" cy="201168"/>
+            <a:off x="761999" y="4179093"/>
+            <a:ext cx="3571875" cy="392906"/>
           </a:xfrm>
           <a:prstGeom prst="rect">
             <a:avLst/>
@@ -3649,20 +3600,26 @@
           <a:noFill/>
         </p:spPr>
         <p:txBody>
-          <a:bodyPr wrap="square" anchor="t">
+          <a:bodyPr wrap="none" anchor="t" lIns="0" rIns="0" tIns="0" bIns="0">
             <a:spAutoFit/>
           </a:bodyPr>
           <a:lstStyle/>
           <a:p>
             <a:pPr algn="l">
-              <a:defRPr sz="1100" b="1">
-                <a:solidFill>
-                  <a:srgbClr val="FFFFFF"/>
-                </a:solidFill>
-                <a:latin typeface="Calibri"/>
-              </a:defRPr>
+              <a:spcBef>
+                <a:spcPts val="0"/>
+              </a:spcBef>
+              <a:spcAft>
+                <a:spcPts val="0"/>
+              </a:spcAft>
             </a:pPr>
             <a:r>
+              <a:rPr sz="1406" b="1">
+                <a:solidFill>
+                  <a:srgbClr val="F9FBFC"/>
+                </a:solidFill>
+                <a:latin typeface="DejaVu Sans"/>
+              </a:rPr>
               <a:t>Reduces SME Dependency</a:t>
             </a:r>
           </a:p>
@@ -3670,14 +3627,14 @@
       </p:sp>
       <p:sp>
         <p:nvSpPr>
-          <p:cNvPr id="17" name="TextBox 16"/>
+          <p:cNvPr id="15" name="TextBox 14"/>
           <p:cNvSpPr txBox="1"/>
           <p:nvPr/>
         </p:nvSpPr>
         <p:spPr>
           <a:xfrm>
-            <a:off x="457200" y="3246120"/>
-            <a:ext cx="3474720" cy="201168"/>
+            <a:off x="752475" y="4402335"/>
+            <a:ext cx="2600325" cy="471487"/>
           </a:xfrm>
           <a:prstGeom prst="rect">
             <a:avLst/>
@@ -3685,35 +3642,41 @@
           <a:noFill/>
         </p:spPr>
         <p:txBody>
-          <a:bodyPr wrap="square" anchor="t">
+          <a:bodyPr wrap="none" anchor="t" lIns="0" rIns="0" tIns="0" bIns="0">
             <a:spAutoFit/>
           </a:bodyPr>
           <a:lstStyle/>
           <a:p>
             <a:pPr algn="l">
-              <a:defRPr sz="1000" b="0">
-                <a:solidFill>
-                  <a:srgbClr val="CCCCDD"/>
-                </a:solidFill>
-                <a:latin typeface="Calibri"/>
-              </a:defRPr>
+              <a:spcBef>
+                <a:spcPts val="0"/>
+              </a:spcBef>
+              <a:spcAft>
+                <a:spcPts val="0"/>
+              </a:spcAft>
             </a:pPr>
             <a:r>
-              <a:t>  80% reduction</a:t>
-            </a:r>
-          </a:p>
-        </p:txBody>
-      </p:sp>
-      <p:sp>
-        <p:nvSpPr>
-          <p:cNvPr id="18" name="TextBox 17"/>
+              <a:rPr sz="1687" b="0">
+                <a:solidFill>
+                  <a:srgbClr val="F9FBFC"/>
+                </a:solidFill>
+                <a:latin typeface="DejaVu Sans"/>
+              </a:rPr>
+              <a:t>- 80% reduction</a:t>
+            </a:r>
+          </a:p>
+        </p:txBody>
+      </p:sp>
+      <p:sp>
+        <p:nvSpPr>
+          <p:cNvPr id="16" name="TextBox 15"/>
           <p:cNvSpPr txBox="1"/>
           <p:nvPr/>
         </p:nvSpPr>
         <p:spPr>
           <a:xfrm>
-            <a:off x="4206240" y="1051560"/>
-            <a:ext cx="3200400" cy="320040"/>
+            <a:off x="4333875" y="1955601"/>
+            <a:ext cx="4248150" cy="510778"/>
           </a:xfrm>
           <a:prstGeom prst="rect">
             <a:avLst/>
@@ -3721,559 +3684,41 @@
           <a:noFill/>
         </p:spPr>
         <p:txBody>
-          <a:bodyPr wrap="square" anchor="t">
+          <a:bodyPr wrap="none" anchor="t" lIns="0" rIns="0" tIns="0" bIns="0">
             <a:spAutoFit/>
           </a:bodyPr>
           <a:lstStyle/>
           <a:p>
             <a:pPr algn="l">
-              <a:defRPr sz="1600" b="1">
-                <a:solidFill>
-                  <a:srgbClr val="FF6B00"/>
-                </a:solidFill>
-                <a:latin typeface="Calibri"/>
-              </a:defRPr>
+              <a:spcBef>
+                <a:spcPts val="0"/>
+              </a:spcBef>
+              <a:spcAft>
+                <a:spcPts val="0"/>
+              </a:spcAft>
             </a:pPr>
             <a:r>
-              <a:t>⚖  WORK DETAILS</a:t>
-            </a:r>
-          </a:p>
-        </p:txBody>
-      </p:sp>
-      <p:sp>
-        <p:nvSpPr>
-          <p:cNvPr id="19" name="Rounded Rectangle 18"/>
-          <p:cNvSpPr/>
-          <p:nvPr/>
-        </p:nvSpPr>
-        <p:spPr>
-          <a:xfrm>
-            <a:off x="4206240" y="1417320"/>
-            <a:ext cx="2103120" cy="384048"/>
-          </a:xfrm>
-          <a:prstGeom prst="roundRect">
-            <a:avLst/>
-          </a:prstGeom>
-          <a:solidFill>
-            <a:srgbClr val="3A1515"/>
-          </a:solidFill>
-          <a:ln w="12700">
-            <a:solidFill>
-              <a:srgbClr val="FF6B00"/>
-            </a:solidFill>
-          </a:ln>
-        </p:spPr>
-        <p:style>
-          <a:lnRef idx="1">
-            <a:schemeClr val="accent1"/>
-          </a:lnRef>
-          <a:fillRef idx="3">
-            <a:schemeClr val="accent1"/>
-          </a:fillRef>
-          <a:effectRef idx="2">
-            <a:schemeClr val="accent1"/>
-          </a:effectRef>
-          <a:fontRef idx="minor">
-            <a:schemeClr val="lt1"/>
-          </a:fontRef>
-        </p:style>
-        <p:txBody>
-          <a:bodyPr rtlCol="0" anchor="ctr"/>
-          <a:lstStyle/>
-          <a:p>
-            <a:pPr algn="ctr">
-              <a:defRPr sz="1100" b="1">
-                <a:solidFill>
-                  <a:srgbClr val="FF4444"/>
-                </a:solidFill>
-              </a:defRPr>
-            </a:pPr>
-            <a:r>
-              <a:t>MANUAL</a:t>
-            </a:r>
-          </a:p>
-        </p:txBody>
-      </p:sp>
-      <p:sp>
-        <p:nvSpPr>
-          <p:cNvPr id="20" name="Rounded Rectangle 19"/>
-          <p:cNvSpPr/>
-          <p:nvPr/>
-        </p:nvSpPr>
-        <p:spPr>
-          <a:xfrm>
-            <a:off x="6355079" y="1417320"/>
-            <a:ext cx="2103120" cy="384048"/>
-          </a:xfrm>
-          <a:prstGeom prst="roundRect">
-            <a:avLst/>
-          </a:prstGeom>
-          <a:solidFill>
-            <a:srgbClr val="0F2E1A"/>
-          </a:solidFill>
-          <a:ln w="12700">
-            <a:solidFill>
-              <a:srgbClr val="FF6B00"/>
-            </a:solidFill>
-          </a:ln>
-        </p:spPr>
-        <p:style>
-          <a:lnRef idx="1">
-            <a:schemeClr val="accent1"/>
-          </a:lnRef>
-          <a:fillRef idx="3">
-            <a:schemeClr val="accent1"/>
-          </a:fillRef>
-          <a:effectRef idx="2">
-            <a:schemeClr val="accent1"/>
-          </a:effectRef>
-          <a:fontRef idx="minor">
-            <a:schemeClr val="lt1"/>
-          </a:fontRef>
-        </p:style>
-        <p:txBody>
-          <a:bodyPr rtlCol="0" anchor="ctr"/>
-          <a:lstStyle/>
-          <a:p>
-            <a:pPr algn="ctr">
-              <a:defRPr sz="1100" b="1">
-                <a:solidFill>
-                  <a:srgbClr val="00CC66"/>
-                </a:solidFill>
-              </a:defRPr>
-            </a:pPr>
-            <a:r>
-              <a:t>WITH TOOL</a:t>
-            </a:r>
-          </a:p>
-        </p:txBody>
-      </p:sp>
-      <p:sp>
-        <p:nvSpPr>
-          <p:cNvPr id="21" name="Rounded Rectangle 20"/>
-          <p:cNvSpPr/>
-          <p:nvPr/>
-        </p:nvSpPr>
-        <p:spPr>
-          <a:xfrm>
-            <a:off x="4206240" y="1837943"/>
-            <a:ext cx="2103120" cy="384048"/>
-          </a:xfrm>
-          <a:prstGeom prst="roundRect">
-            <a:avLst/>
-          </a:prstGeom>
-          <a:solidFill>
-            <a:srgbClr val="3A1515"/>
-          </a:solidFill>
-          <a:ln>
-            <a:noFill/>
-          </a:ln>
-        </p:spPr>
-        <p:style>
-          <a:lnRef idx="1">
-            <a:schemeClr val="accent1"/>
-          </a:lnRef>
-          <a:fillRef idx="3">
-            <a:schemeClr val="accent1"/>
-          </a:fillRef>
-          <a:effectRef idx="2">
-            <a:schemeClr val="accent1"/>
-          </a:effectRef>
-          <a:fontRef idx="minor">
-            <a:schemeClr val="lt1"/>
-          </a:fontRef>
-        </p:style>
-        <p:txBody>
-          <a:bodyPr rtlCol="0" anchor="ctr" wrap="square"/>
-          <a:lstStyle/>
-          <a:p>
-            <a:pPr>
-              <a:defRPr sz="900">
-                <a:solidFill>
-                  <a:srgbClr val="CCCCDD"/>
-                </a:solidFill>
-              </a:defRPr>
-            </a:pPr>
-            <a:r>
-              <a:t>⏱ 10-15 min / defect</a:t>
-            </a:r>
-          </a:p>
-        </p:txBody>
-      </p:sp>
-      <p:sp>
-        <p:nvSpPr>
-          <p:cNvPr id="22" name="Rounded Rectangle 21"/>
-          <p:cNvSpPr/>
-          <p:nvPr/>
-        </p:nvSpPr>
-        <p:spPr>
-          <a:xfrm>
-            <a:off x="6355079" y="1837943"/>
-            <a:ext cx="2103120" cy="384048"/>
-          </a:xfrm>
-          <a:prstGeom prst="roundRect">
-            <a:avLst/>
-          </a:prstGeom>
-          <a:solidFill>
-            <a:srgbClr val="0F2E1A"/>
-          </a:solidFill>
-          <a:ln>
-            <a:noFill/>
-          </a:ln>
-        </p:spPr>
-        <p:style>
-          <a:lnRef idx="1">
-            <a:schemeClr val="accent1"/>
-          </a:lnRef>
-          <a:fillRef idx="3">
-            <a:schemeClr val="accent1"/>
-          </a:fillRef>
-          <a:effectRef idx="2">
-            <a:schemeClr val="accent1"/>
-          </a:effectRef>
-          <a:fontRef idx="minor">
-            <a:schemeClr val="lt1"/>
-          </a:fontRef>
-        </p:style>
-        <p:txBody>
-          <a:bodyPr rtlCol="0" anchor="ctr" wrap="square"/>
-          <a:lstStyle/>
-          <a:p>
-            <a:pPr>
-              <a:defRPr sz="900">
-                <a:solidFill>
-                  <a:srgbClr val="FFFFFF"/>
-                </a:solidFill>
-              </a:defRPr>
-            </a:pPr>
-            <a:r>
-              <a:t>⚡ 1-2 min / defect</a:t>
-            </a:r>
-          </a:p>
-        </p:txBody>
-      </p:sp>
-      <p:sp>
-        <p:nvSpPr>
-          <p:cNvPr id="23" name="Rounded Rectangle 22"/>
-          <p:cNvSpPr/>
-          <p:nvPr/>
-        </p:nvSpPr>
-        <p:spPr>
-          <a:xfrm>
-            <a:off x="4206240" y="2258568"/>
-            <a:ext cx="2103120" cy="384048"/>
-          </a:xfrm>
-          <a:prstGeom prst="roundRect">
-            <a:avLst/>
-          </a:prstGeom>
-          <a:solidFill>
-            <a:srgbClr val="3A1515"/>
-          </a:solidFill>
-          <a:ln>
-            <a:noFill/>
-          </a:ln>
-        </p:spPr>
-        <p:style>
-          <a:lnRef idx="1">
-            <a:schemeClr val="accent1"/>
-          </a:lnRef>
-          <a:fillRef idx="3">
-            <a:schemeClr val="accent1"/>
-          </a:fillRef>
-          <a:effectRef idx="2">
-            <a:schemeClr val="accent1"/>
-          </a:effectRef>
-          <a:fontRef idx="minor">
-            <a:schemeClr val="lt1"/>
-          </a:fontRef>
-        </p:style>
-        <p:txBody>
-          <a:bodyPr rtlCol="0" anchor="ctr" wrap="square"/>
-          <a:lstStyle/>
-          <a:p>
-            <a:pPr>
-              <a:defRPr sz="900">
-                <a:solidFill>
-                  <a:srgbClr val="CCCCDD"/>
-                </a:solidFill>
-              </a:defRPr>
-            </a:pPr>
-            <a:r>
-              <a:t>🔍 Source Code Investigation Required</a:t>
-            </a:r>
-          </a:p>
-        </p:txBody>
-      </p:sp>
-      <p:sp>
-        <p:nvSpPr>
-          <p:cNvPr id="24" name="Rounded Rectangle 23"/>
-          <p:cNvSpPr/>
-          <p:nvPr/>
-        </p:nvSpPr>
-        <p:spPr>
-          <a:xfrm>
-            <a:off x="6355079" y="2258568"/>
-            <a:ext cx="2103120" cy="384048"/>
-          </a:xfrm>
-          <a:prstGeom prst="roundRect">
-            <a:avLst/>
-          </a:prstGeom>
-          <a:solidFill>
-            <a:srgbClr val="0F2E1A"/>
-          </a:solidFill>
-          <a:ln>
-            <a:noFill/>
-          </a:ln>
-        </p:spPr>
-        <p:style>
-          <a:lnRef idx="1">
-            <a:schemeClr val="accent1"/>
-          </a:lnRef>
-          <a:fillRef idx="3">
-            <a:schemeClr val="accent1"/>
-          </a:fillRef>
-          <a:effectRef idx="2">
-            <a:schemeClr val="accent1"/>
-          </a:effectRef>
-          <a:fontRef idx="minor">
-            <a:schemeClr val="lt1"/>
-          </a:fontRef>
-        </p:style>
-        <p:txBody>
-          <a:bodyPr rtlCol="0" anchor="ctr" wrap="square"/>
-          <a:lstStyle/>
-          <a:p>
-            <a:pPr>
-              <a:defRPr sz="900">
-                <a:solidFill>
-                  <a:srgbClr val="FFFFFF"/>
-                </a:solidFill>
-              </a:defRPr>
-            </a:pPr>
-            <a:r>
-              <a:t>🤖 Automated Analysis</a:t>
-            </a:r>
-          </a:p>
-        </p:txBody>
-      </p:sp>
-      <p:sp>
-        <p:nvSpPr>
-          <p:cNvPr id="25" name="Rounded Rectangle 24"/>
-          <p:cNvSpPr/>
-          <p:nvPr/>
-        </p:nvSpPr>
-        <p:spPr>
-          <a:xfrm>
-            <a:off x="4206240" y="2679191"/>
-            <a:ext cx="2103120" cy="384048"/>
-          </a:xfrm>
-          <a:prstGeom prst="roundRect">
-            <a:avLst/>
-          </a:prstGeom>
-          <a:solidFill>
-            <a:srgbClr val="3A1515"/>
-          </a:solidFill>
-          <a:ln>
-            <a:noFill/>
-          </a:ln>
-        </p:spPr>
-        <p:style>
-          <a:lnRef idx="1">
-            <a:schemeClr val="accent1"/>
-          </a:lnRef>
-          <a:fillRef idx="3">
-            <a:schemeClr val="accent1"/>
-          </a:fillRef>
-          <a:effectRef idx="2">
-            <a:schemeClr val="accent1"/>
-          </a:effectRef>
-          <a:fontRef idx="minor">
-            <a:schemeClr val="lt1"/>
-          </a:fontRef>
-        </p:style>
-        <p:txBody>
-          <a:bodyPr rtlCol="0" anchor="ctr" wrap="square"/>
-          <a:lstStyle/>
-          <a:p>
-            <a:pPr>
-              <a:defRPr sz="900">
-                <a:solidFill>
-                  <a:srgbClr val="CCCCDD"/>
-                </a:solidFill>
-              </a:defRPr>
-            </a:pPr>
-            <a:r>
-              <a:t>🧠 Context Analysis Required</a:t>
-            </a:r>
-          </a:p>
-        </p:txBody>
-      </p:sp>
-      <p:sp>
-        <p:nvSpPr>
-          <p:cNvPr id="26" name="Rounded Rectangle 25"/>
-          <p:cNvSpPr/>
-          <p:nvPr/>
-        </p:nvSpPr>
-        <p:spPr>
-          <a:xfrm>
-            <a:off x="6355079" y="2679191"/>
-            <a:ext cx="2103120" cy="384048"/>
-          </a:xfrm>
-          <a:prstGeom prst="roundRect">
-            <a:avLst/>
-          </a:prstGeom>
-          <a:solidFill>
-            <a:srgbClr val="0F2E1A"/>
-          </a:solidFill>
-          <a:ln>
-            <a:noFill/>
-          </a:ln>
-        </p:spPr>
-        <p:style>
-          <a:lnRef idx="1">
-            <a:schemeClr val="accent1"/>
-          </a:lnRef>
-          <a:fillRef idx="3">
-            <a:schemeClr val="accent1"/>
-          </a:fillRef>
-          <a:effectRef idx="2">
-            <a:schemeClr val="accent1"/>
-          </a:effectRef>
-          <a:fontRef idx="minor">
-            <a:schemeClr val="lt1"/>
-          </a:fontRef>
-        </p:style>
-        <p:txBody>
-          <a:bodyPr rtlCol="0" anchor="ctr" wrap="square"/>
-          <a:lstStyle/>
-          <a:p>
-            <a:pPr>
-              <a:defRPr sz="900">
-                <a:solidFill>
-                  <a:srgbClr val="FFFFFF"/>
-                </a:solidFill>
-              </a:defRPr>
-            </a:pPr>
-            <a:r>
-              <a:t>✅ One Controlled Flow</a:t>
-            </a:r>
-          </a:p>
-        </p:txBody>
-      </p:sp>
-      <p:sp>
-        <p:nvSpPr>
-          <p:cNvPr id="27" name="Rounded Rectangle 26"/>
-          <p:cNvSpPr/>
-          <p:nvPr/>
-        </p:nvSpPr>
-        <p:spPr>
-          <a:xfrm>
-            <a:off x="4206240" y="3099815"/>
-            <a:ext cx="2103120" cy="384048"/>
-          </a:xfrm>
-          <a:prstGeom prst="roundRect">
-            <a:avLst/>
-          </a:prstGeom>
-          <a:solidFill>
-            <a:srgbClr val="3A1515"/>
-          </a:solidFill>
-          <a:ln>
-            <a:noFill/>
-          </a:ln>
-        </p:spPr>
-        <p:style>
-          <a:lnRef idx="1">
-            <a:schemeClr val="accent1"/>
-          </a:lnRef>
-          <a:fillRef idx="3">
-            <a:schemeClr val="accent1"/>
-          </a:fillRef>
-          <a:effectRef idx="2">
-            <a:schemeClr val="accent1"/>
-          </a:effectRef>
-          <a:fontRef idx="minor">
-            <a:schemeClr val="lt1"/>
-          </a:fontRef>
-        </p:style>
-        <p:txBody>
-          <a:bodyPr rtlCol="0" anchor="ctr" wrap="square"/>
-          <a:lstStyle/>
-          <a:p>
-            <a:pPr>
-              <a:defRPr sz="900">
-                <a:solidFill>
-                  <a:srgbClr val="CCCCDD"/>
-                </a:solidFill>
-              </a:defRPr>
-            </a:pPr>
-            <a:r>
-              <a:t>📝 Disposition &amp; Documentation Required</a:t>
-            </a:r>
-          </a:p>
-        </p:txBody>
-      </p:sp>
-      <p:sp>
-        <p:nvSpPr>
-          <p:cNvPr id="28" name="Rounded Rectangle 27"/>
-          <p:cNvSpPr/>
-          <p:nvPr/>
-        </p:nvSpPr>
-        <p:spPr>
-          <a:xfrm>
-            <a:off x="6355079" y="3099815"/>
-            <a:ext cx="2103120" cy="384048"/>
-          </a:xfrm>
-          <a:prstGeom prst="roundRect">
-            <a:avLst/>
-          </a:prstGeom>
-          <a:solidFill>
-            <a:srgbClr val="0F2E1A"/>
-          </a:solidFill>
-          <a:ln>
-            <a:noFill/>
-          </a:ln>
-        </p:spPr>
-        <p:style>
-          <a:lnRef idx="1">
-            <a:schemeClr val="accent1"/>
-          </a:lnRef>
-          <a:fillRef idx="3">
-            <a:schemeClr val="accent1"/>
-          </a:fillRef>
-          <a:effectRef idx="2">
-            <a:schemeClr val="accent1"/>
-          </a:effectRef>
-          <a:fontRef idx="minor">
-            <a:schemeClr val="lt1"/>
-          </a:fontRef>
-        </p:style>
-        <p:txBody>
-          <a:bodyPr rtlCol="0" anchor="ctr" wrap="square"/>
-          <a:lstStyle/>
-          <a:p>
-            <a:pPr>
-              <a:defRPr sz="900">
-                <a:solidFill>
-                  <a:srgbClr val="FFFFFF"/>
-                </a:solidFill>
-              </a:defRPr>
-            </a:pPr>
-            <a:r>
-              <a:t>📊 Higher Quality</a:t>
-            </a:r>
-          </a:p>
-        </p:txBody>
-      </p:sp>
-      <p:sp>
-        <p:nvSpPr>
-          <p:cNvPr id="29" name="TextBox 28"/>
+              <a:rPr sz="1828" b="1">
+                <a:solidFill>
+                  <a:srgbClr val="EE6E1E"/>
+                </a:solidFill>
+                <a:latin typeface="DejaVu Sans"/>
+              </a:rPr>
+              <a:t>MANUAL vs AUTOMATED</a:t>
+            </a:r>
+          </a:p>
+        </p:txBody>
+      </p:sp>
+      <p:sp>
+        <p:nvSpPr>
+          <p:cNvPr id="17" name="TextBox 16"/>
           <p:cNvSpPr txBox="1"/>
           <p:nvPr/>
         </p:nvSpPr>
         <p:spPr>
           <a:xfrm>
-            <a:off x="4480559" y="3593591"/>
-            <a:ext cx="2286000" cy="457200"/>
+            <a:off x="4124324" y="2419945"/>
+            <a:ext cx="2286000" cy="353615"/>
           </a:xfrm>
           <a:prstGeom prst="rect">
             <a:avLst/>
@@ -4281,35 +3726,41 @@
           <a:noFill/>
         </p:spPr>
         <p:txBody>
-          <a:bodyPr wrap="square" anchor="t">
+          <a:bodyPr wrap="none" anchor="t" lIns="0" rIns="0" tIns="0" bIns="0">
             <a:spAutoFit/>
           </a:bodyPr>
           <a:lstStyle/>
           <a:p>
             <a:pPr algn="l">
-              <a:defRPr sz="2800" b="1">
-                <a:solidFill>
-                  <a:srgbClr val="FF6B00"/>
-                </a:solidFill>
-                <a:latin typeface="Calibri"/>
-              </a:defRPr>
+              <a:spcBef>
+                <a:spcPts val="0"/>
+              </a:spcBef>
+              <a:spcAft>
+                <a:spcPts val="0"/>
+              </a:spcAft>
             </a:pPr>
             <a:r>
-              <a:t>~90%</a:t>
-            </a:r>
-          </a:p>
-        </p:txBody>
-      </p:sp>
-      <p:sp>
-        <p:nvSpPr>
-          <p:cNvPr id="30" name="TextBox 29"/>
+              <a:rPr sz="1265" b="1">
+                <a:solidFill>
+                  <a:srgbClr val="F9FBFC"/>
+                </a:solidFill>
+                <a:latin typeface="DejaVu Sans"/>
+              </a:rPr>
+              <a:t>MANUAL PROCESS</a:t>
+            </a:r>
+          </a:p>
+        </p:txBody>
+      </p:sp>
+      <p:sp>
+        <p:nvSpPr>
+          <p:cNvPr id="18" name="TextBox 17"/>
           <p:cNvSpPr txBox="1"/>
           <p:nvPr/>
         </p:nvSpPr>
         <p:spPr>
           <a:xfrm>
-            <a:off x="4480559" y="3941063"/>
-            <a:ext cx="2286000" cy="274320"/>
+            <a:off x="6448425" y="2509242"/>
+            <a:ext cx="2609850" cy="353615"/>
           </a:xfrm>
           <a:prstGeom prst="rect">
             <a:avLst/>
@@ -4317,35 +3768,41 @@
           <a:noFill/>
         </p:spPr>
         <p:txBody>
-          <a:bodyPr wrap="square" anchor="t">
+          <a:bodyPr wrap="none" anchor="t" lIns="0" rIns="0" tIns="0" bIns="0">
             <a:spAutoFit/>
           </a:bodyPr>
           <a:lstStyle/>
           <a:p>
             <a:pPr algn="l">
-              <a:defRPr sz="1100" b="0">
-                <a:solidFill>
-                  <a:srgbClr val="CCCCDD"/>
-                </a:solidFill>
-                <a:latin typeface="Calibri"/>
-              </a:defRPr>
+              <a:spcBef>
+                <a:spcPts val="0"/>
+              </a:spcBef>
+              <a:spcAft>
+                <a:spcPts val="0"/>
+              </a:spcAft>
             </a:pPr>
             <a:r>
-              <a:t>Time Reduction</a:t>
-            </a:r>
-          </a:p>
-        </p:txBody>
-      </p:sp>
-      <p:sp>
-        <p:nvSpPr>
-          <p:cNvPr id="31" name="TextBox 30"/>
+              <a:rPr sz="1265" b="1">
+                <a:solidFill>
+                  <a:srgbClr val="F9FBFC"/>
+                </a:solidFill>
+                <a:latin typeface="DejaVu Sans"/>
+              </a:rPr>
+              <a:t>AUTOMATED PROCESS</a:t>
+            </a:r>
+          </a:p>
+        </p:txBody>
+      </p:sp>
+      <p:sp>
+        <p:nvSpPr>
+          <p:cNvPr id="19" name="TextBox 18"/>
           <p:cNvSpPr txBox="1"/>
           <p:nvPr/>
         </p:nvSpPr>
         <p:spPr>
           <a:xfrm>
-            <a:off x="365760" y="4434840"/>
-            <a:ext cx="4114800" cy="320040"/>
+            <a:off x="4086225" y="2759273"/>
+            <a:ext cx="2581275" cy="314325"/>
           </a:xfrm>
           <a:prstGeom prst="rect">
             <a:avLst/>
@@ -4353,35 +3810,41 @@
           <a:noFill/>
         </p:spPr>
         <p:txBody>
-          <a:bodyPr wrap="square" anchor="t">
+          <a:bodyPr wrap="none" anchor="t" lIns="0" rIns="0" tIns="0" bIns="0">
             <a:spAutoFit/>
           </a:bodyPr>
           <a:lstStyle/>
           <a:p>
             <a:pPr algn="l">
-              <a:defRPr sz="1400" b="1">
-                <a:solidFill>
-                  <a:srgbClr val="FF6B00"/>
-                </a:solidFill>
-                <a:latin typeface="Calibri"/>
-              </a:defRPr>
+              <a:spcBef>
+                <a:spcPts val="0"/>
+              </a:spcBef>
+              <a:spcAft>
+                <a:spcPts val="0"/>
+              </a:spcAft>
             </a:pPr>
             <a:r>
-              <a:t>💰  COST SAVINGS PER PROGRAM</a:t>
-            </a:r>
-          </a:p>
-        </p:txBody>
-      </p:sp>
-      <p:sp>
-        <p:nvSpPr>
-          <p:cNvPr id="32" name="TextBox 31"/>
+              <a:rPr sz="1125" b="0">
+                <a:solidFill>
+                  <a:srgbClr val="F9FBFC"/>
+                </a:solidFill>
+                <a:latin typeface="DejaVu Sans"/>
+              </a:rPr>
+              <a:t>10-15 minutes per defect</a:t>
+            </a:r>
+          </a:p>
+        </p:txBody>
+      </p:sp>
+      <p:sp>
+        <p:nvSpPr>
+          <p:cNvPr id="20" name="TextBox 19"/>
           <p:cNvSpPr txBox="1"/>
           <p:nvPr/>
         </p:nvSpPr>
         <p:spPr>
           <a:xfrm>
-            <a:off x="457200" y="4754879"/>
-            <a:ext cx="5943600" cy="256032"/>
+            <a:off x="4076699" y="3053953"/>
+            <a:ext cx="1714500" cy="314325"/>
           </a:xfrm>
           <a:prstGeom prst="rect">
             <a:avLst/>
@@ -4389,35 +3852,41 @@
           <a:noFill/>
         </p:spPr>
         <p:txBody>
-          <a:bodyPr wrap="square" anchor="t">
+          <a:bodyPr wrap="none" anchor="t" lIns="0" rIns="0" tIns="0" bIns="0">
             <a:spAutoFit/>
           </a:bodyPr>
           <a:lstStyle/>
           <a:p>
             <a:pPr algn="l">
-              <a:defRPr sz="1200" b="0">
-                <a:solidFill>
-                  <a:srgbClr val="FFFFFF"/>
-                </a:solidFill>
-                <a:latin typeface="Calibri"/>
-              </a:defRPr>
+              <a:spcBef>
+                <a:spcPts val="0"/>
+              </a:spcBef>
+              <a:spcAft>
+                <a:spcPts val="0"/>
+              </a:spcAft>
             </a:pPr>
             <a:r>
-              <a:t>RL1 (1,000 defects): 250 hrs → 33 hrs = </a:t>
-            </a:r>
-          </a:p>
-        </p:txBody>
-      </p:sp>
-      <p:sp>
-        <p:nvSpPr>
-          <p:cNvPr id="33" name="TextBox 32"/>
+              <a:rPr sz="1125" b="0">
+                <a:solidFill>
+                  <a:srgbClr val="F9FBFC"/>
+                </a:solidFill>
+                <a:latin typeface="DejaVu Sans"/>
+              </a:rPr>
+              <a:t>Source Code</a:t>
+            </a:r>
+          </a:p>
+        </p:txBody>
+      </p:sp>
+      <p:sp>
+        <p:nvSpPr>
+          <p:cNvPr id="21" name="TextBox 20"/>
           <p:cNvSpPr txBox="1"/>
           <p:nvPr/>
         </p:nvSpPr>
         <p:spPr>
           <a:xfrm>
-            <a:off x="4572000" y="4754879"/>
-            <a:ext cx="2743200" cy="256032"/>
+            <a:off x="4086225" y="3250406"/>
+            <a:ext cx="2381250" cy="314325"/>
           </a:xfrm>
           <a:prstGeom prst="rect">
             <a:avLst/>
@@ -4425,35 +3894,41 @@
           <a:noFill/>
         </p:spPr>
         <p:txBody>
-          <a:bodyPr wrap="square" anchor="t">
+          <a:bodyPr wrap="none" anchor="t" lIns="0" rIns="0" tIns="0" bIns="0">
             <a:spAutoFit/>
           </a:bodyPr>
           <a:lstStyle/>
           <a:p>
             <a:pPr algn="l">
-              <a:defRPr sz="1200" b="1">
-                <a:solidFill>
-                  <a:srgbClr val="FF6B00"/>
-                </a:solidFill>
-                <a:latin typeface="Calibri"/>
-              </a:defRPr>
+              <a:spcBef>
+                <a:spcPts val="0"/>
+              </a:spcBef>
+              <a:spcAft>
+                <a:spcPts val="0"/>
+              </a:spcAft>
             </a:pPr>
             <a:r>
-              <a:t>217 hrs SAVED</a:t>
-            </a:r>
-          </a:p>
-        </p:txBody>
-      </p:sp>
-      <p:sp>
-        <p:nvSpPr>
-          <p:cNvPr id="34" name="TextBox 33"/>
+              <a:rPr sz="1125" b="0">
+                <a:solidFill>
+                  <a:srgbClr val="F9FBFC"/>
+                </a:solidFill>
+                <a:latin typeface="DejaVu Sans"/>
+              </a:rPr>
+              <a:t>Investigation Required</a:t>
+            </a:r>
+          </a:p>
+        </p:txBody>
+      </p:sp>
+      <p:sp>
+        <p:nvSpPr>
+          <p:cNvPr id="22" name="TextBox 21"/>
           <p:cNvSpPr txBox="1"/>
           <p:nvPr/>
         </p:nvSpPr>
         <p:spPr>
           <a:xfrm>
-            <a:off x="457200" y="5029199"/>
-            <a:ext cx="5943600" cy="256032"/>
+            <a:off x="4086225" y="3607593"/>
+            <a:ext cx="2628900" cy="314325"/>
           </a:xfrm>
           <a:prstGeom prst="rect">
             <a:avLst/>
@@ -4461,35 +3936,41 @@
           <a:noFill/>
         </p:spPr>
         <p:txBody>
-          <a:bodyPr wrap="square" anchor="t">
+          <a:bodyPr wrap="none" anchor="t" lIns="0" rIns="0" tIns="0" bIns="0">
             <a:spAutoFit/>
           </a:bodyPr>
           <a:lstStyle/>
           <a:p>
             <a:pPr algn="l">
-              <a:defRPr sz="1200" b="0">
-                <a:solidFill>
-                  <a:srgbClr val="FFFFFF"/>
-                </a:solidFill>
-                <a:latin typeface="Calibri"/>
-              </a:defRPr>
+              <a:spcBef>
+                <a:spcPts val="0"/>
+              </a:spcBef>
+              <a:spcAft>
+                <a:spcPts val="0"/>
+              </a:spcAft>
             </a:pPr>
             <a:r>
-              <a:t>Program (4,000 defects): 1,000 hrs → 133 hrs = </a:t>
-            </a:r>
-          </a:p>
-        </p:txBody>
-      </p:sp>
-      <p:sp>
-        <p:nvSpPr>
-          <p:cNvPr id="35" name="TextBox 34"/>
+              <a:rPr sz="1125" b="0">
+                <a:solidFill>
+                  <a:srgbClr val="F9FBFC"/>
+                </a:solidFill>
+                <a:latin typeface="DejaVu Sans"/>
+              </a:rPr>
+              <a:t>Context Analysis Required</a:t>
+            </a:r>
+          </a:p>
+        </p:txBody>
+      </p:sp>
+      <p:sp>
+        <p:nvSpPr>
+          <p:cNvPr id="23" name="TextBox 22"/>
           <p:cNvSpPr txBox="1"/>
           <p:nvPr/>
         </p:nvSpPr>
         <p:spPr>
           <a:xfrm>
-            <a:off x="4572000" y="5029199"/>
-            <a:ext cx="2743200" cy="256032"/>
+            <a:off x="4076699" y="3857625"/>
+            <a:ext cx="1876424" cy="314325"/>
           </a:xfrm>
           <a:prstGeom prst="rect">
             <a:avLst/>
@@ -4497,35 +3978,41 @@
           <a:noFill/>
         </p:spPr>
         <p:txBody>
-          <a:bodyPr wrap="square" anchor="t">
+          <a:bodyPr wrap="none" anchor="t" lIns="0" rIns="0" tIns="0" bIns="0">
             <a:spAutoFit/>
           </a:bodyPr>
           <a:lstStyle/>
           <a:p>
             <a:pPr algn="l">
-              <a:defRPr sz="1200" b="1">
-                <a:solidFill>
-                  <a:srgbClr val="FF6B00"/>
-                </a:solidFill>
-                <a:latin typeface="Calibri"/>
-              </a:defRPr>
+              <a:spcBef>
+                <a:spcPts val="0"/>
+              </a:spcBef>
+              <a:spcAft>
+                <a:spcPts val="0"/>
+              </a:spcAft>
             </a:pPr>
             <a:r>
-              <a:t>867 hrs SAVED</a:t>
-            </a:r>
-          </a:p>
-        </p:txBody>
-      </p:sp>
-      <p:sp>
-        <p:nvSpPr>
-          <p:cNvPr id="36" name="TextBox 35"/>
+              <a:rPr sz="1125" b="0">
+                <a:solidFill>
+                  <a:srgbClr val="F9FBFC"/>
+                </a:solidFill>
+                <a:latin typeface="DejaVu Sans"/>
+              </a:rPr>
+              <a:t>Disposition &amp;</a:t>
+            </a:r>
+          </a:p>
+        </p:txBody>
+      </p:sp>
+      <p:sp>
+        <p:nvSpPr>
+          <p:cNvPr id="24" name="TextBox 23"/>
           <p:cNvSpPr txBox="1"/>
           <p:nvPr/>
         </p:nvSpPr>
         <p:spPr>
           <a:xfrm>
-            <a:off x="457200" y="5321807"/>
-            <a:ext cx="5943600" cy="256032"/>
+            <a:off x="4076699" y="4071937"/>
+            <a:ext cx="2571750" cy="314325"/>
           </a:xfrm>
           <a:prstGeom prst="rect">
             <a:avLst/>
@@ -4533,109 +4020,41 @@
           <a:noFill/>
         </p:spPr>
         <p:txBody>
-          <a:bodyPr wrap="square" anchor="t">
+          <a:bodyPr wrap="none" anchor="t" lIns="0" rIns="0" tIns="0" bIns="0">
             <a:spAutoFit/>
           </a:bodyPr>
           <a:lstStyle/>
           <a:p>
             <a:pPr algn="l">
-              <a:defRPr sz="1200" b="1">
-                <a:solidFill>
-                  <a:srgbClr val="FFCC00"/>
-                </a:solidFill>
-                <a:latin typeface="Calibri"/>
-              </a:defRPr>
+              <a:spcBef>
+                <a:spcPts val="0"/>
+              </a:spcBef>
+              <a:spcAft>
+                <a:spcPts val="0"/>
+              </a:spcAft>
             </a:pPr>
             <a:r>
-              <a:t>RL1: $7,595  |  Program: $30,345  per release (at $35/hr)</a:t>
-            </a:r>
-          </a:p>
-        </p:txBody>
-      </p:sp>
-      <p:sp>
-        <p:nvSpPr>
-          <p:cNvPr id="37" name="Rounded Rectangle 36"/>
-          <p:cNvSpPr/>
-          <p:nvPr/>
-        </p:nvSpPr>
-        <p:spPr>
-          <a:xfrm>
-            <a:off x="7498079" y="1280160"/>
-            <a:ext cx="1463040" cy="1097280"/>
-          </a:xfrm>
-          <a:prstGeom prst="roundRect">
-            <a:avLst/>
-          </a:prstGeom>
-          <a:solidFill>
-            <a:srgbClr val="11182E"/>
-          </a:solidFill>
-          <a:ln w="19050">
-            <a:solidFill>
-              <a:srgbClr val="00CCFF"/>
-            </a:solidFill>
-          </a:ln>
-        </p:spPr>
-        <p:style>
-          <a:lnRef idx="1">
-            <a:schemeClr val="accent1"/>
-          </a:lnRef>
-          <a:fillRef idx="3">
-            <a:schemeClr val="accent1"/>
-          </a:fillRef>
-          <a:effectRef idx="2">
-            <a:schemeClr val="accent1"/>
-          </a:effectRef>
-          <a:fontRef idx="minor">
-            <a:schemeClr val="lt1"/>
-          </a:fontRef>
-        </p:style>
-        <p:txBody>
-          <a:bodyPr rtlCol="0" anchor="ctr"/>
-          <a:lstStyle/>
-          <a:p>
-            <a:pPr algn="ctr">
-              <a:defRPr sz="2200"/>
-            </a:pPr>
-            <a:r>
-              <a:t>📄</a:t>
-            </a:r>
-          </a:p>
-          <a:p>
-            <a:pPr algn="ctr">
-              <a:defRPr sz="1000">
-                <a:solidFill>
-                  <a:srgbClr val="FFFFFF"/>
-                </a:solidFill>
-              </a:defRPr>
-            </a:pPr>
-            <a:r>
-              <a:t>Coverity</a:t>
-            </a:r>
-          </a:p>
-          <a:p>
-            <a:pPr algn="ctr">
-              <a:defRPr sz="1000">
-                <a:solidFill>
-                  <a:srgbClr val="FFFFFF"/>
-                </a:solidFill>
-              </a:defRPr>
-            </a:pPr>
-            <a:r>
-              <a:t>report</a:t>
-            </a:r>
-          </a:p>
-        </p:txBody>
-      </p:sp>
-      <p:sp>
-        <p:nvSpPr>
-          <p:cNvPr id="38" name="TextBox 37"/>
+              <a:rPr sz="1125" b="0">
+                <a:solidFill>
+                  <a:srgbClr val="F9FBFC"/>
+                </a:solidFill>
+                <a:latin typeface="DejaVu Sans"/>
+              </a:rPr>
+              <a:t>Documentation Required</a:t>
+            </a:r>
+          </a:p>
+        </p:txBody>
+      </p:sp>
+      <p:sp>
+        <p:nvSpPr>
+          <p:cNvPr id="25" name="TextBox 24"/>
           <p:cNvSpPr txBox="1"/>
           <p:nvPr/>
         </p:nvSpPr>
         <p:spPr>
           <a:xfrm>
-            <a:off x="7498079" y="1051560"/>
-            <a:ext cx="1463040" cy="228600"/>
+            <a:off x="6505575" y="2857500"/>
+            <a:ext cx="2419349" cy="314325"/>
           </a:xfrm>
           <a:prstGeom prst="rect">
             <a:avLst/>
@@ -4643,140 +4062,41 @@
           <a:noFill/>
         </p:spPr>
         <p:txBody>
-          <a:bodyPr wrap="square" anchor="t">
+          <a:bodyPr wrap="none" anchor="t" lIns="0" rIns="0" tIns="0" bIns="0">
             <a:spAutoFit/>
           </a:bodyPr>
           <a:lstStyle/>
           <a:p>
-            <a:pPr algn="ctr">
-              <a:defRPr sz="900" b="0">
-                <a:solidFill>
-                  <a:srgbClr val="CCCCDD"/>
-                </a:solidFill>
-                <a:latin typeface="Calibri"/>
-              </a:defRPr>
+            <a:pPr algn="l">
+              <a:spcBef>
+                <a:spcPts val="0"/>
+              </a:spcBef>
+              <a:spcAft>
+                <a:spcPts val="0"/>
+              </a:spcAft>
             </a:pPr>
             <a:r>
-              <a:t>Input</a:t>
-            </a:r>
-          </a:p>
-        </p:txBody>
-      </p:sp>
-      <p:sp>
-        <p:nvSpPr>
-          <p:cNvPr id="39" name="Right Arrow 38"/>
-          <p:cNvSpPr/>
-          <p:nvPr/>
-        </p:nvSpPr>
-        <p:spPr>
-          <a:xfrm>
-            <a:off x="8869680" y="1691640"/>
-            <a:ext cx="640080" cy="274320"/>
-          </a:xfrm>
-          <a:prstGeom prst="rightArrow">
-            <a:avLst/>
-          </a:prstGeom>
-          <a:solidFill>
-            <a:srgbClr val="FF6B00"/>
-          </a:solidFill>
-          <a:ln>
-            <a:noFill/>
-          </a:ln>
-        </p:spPr>
-        <p:style>
-          <a:lnRef idx="1">
-            <a:schemeClr val="accent1"/>
-          </a:lnRef>
-          <a:fillRef idx="3">
-            <a:schemeClr val="accent1"/>
-          </a:fillRef>
-          <a:effectRef idx="2">
-            <a:schemeClr val="accent1"/>
-          </a:effectRef>
-          <a:fontRef idx="minor">
-            <a:schemeClr val="lt1"/>
-          </a:fontRef>
-        </p:style>
-        <p:txBody>
-          <a:bodyPr rtlCol="0" anchor="ctr"/>
-          <a:lstStyle/>
-          <a:p>
-            <a:pPr algn="ctr"/>
-          </a:p>
-        </p:txBody>
-      </p:sp>
-      <p:sp>
-        <p:nvSpPr>
-          <p:cNvPr id="40" name="Rounded Rectangle 39"/>
-          <p:cNvSpPr/>
-          <p:nvPr/>
-        </p:nvSpPr>
-        <p:spPr>
-          <a:xfrm>
-            <a:off x="9418319" y="1280160"/>
-            <a:ext cx="1828800" cy="1097280"/>
-          </a:xfrm>
-          <a:prstGeom prst="roundRect">
-            <a:avLst/>
-          </a:prstGeom>
-          <a:solidFill>
-            <a:srgbClr val="11182E"/>
-          </a:solidFill>
-          <a:ln w="19050">
-            <a:solidFill>
-              <a:srgbClr val="00CCFF"/>
-            </a:solidFill>
-          </a:ln>
-        </p:spPr>
-        <p:style>
-          <a:lnRef idx="1">
-            <a:schemeClr val="accent1"/>
-          </a:lnRef>
-          <a:fillRef idx="3">
-            <a:schemeClr val="accent1"/>
-          </a:fillRef>
-          <a:effectRef idx="2">
-            <a:schemeClr val="accent1"/>
-          </a:effectRef>
-          <a:fontRef idx="minor">
-            <a:schemeClr val="lt1"/>
-          </a:fontRef>
-        </p:style>
-        <p:txBody>
-          <a:bodyPr rtlCol="0" anchor="ctr"/>
-          <a:lstStyle/>
-          <a:p>
-            <a:pPr algn="ctr">
-              <a:defRPr sz="2000"/>
-            </a:pPr>
-            <a:r>
-              <a:t>🌳</a:t>
-            </a:r>
-          </a:p>
-          <a:p>
-            <a:pPr algn="ctr">
-              <a:defRPr sz="1000">
-                <a:solidFill>
-                  <a:srgbClr val="00CCFF"/>
-                </a:solidFill>
-              </a:defRPr>
-            </a:pPr>
-            <a:r>
-              <a:t>Tree-sitter</a:t>
-            </a:r>
-          </a:p>
-        </p:txBody>
-      </p:sp>
-      <p:sp>
-        <p:nvSpPr>
-          <p:cNvPr id="41" name="TextBox 40"/>
+              <a:rPr sz="1125" b="0">
+                <a:solidFill>
+                  <a:srgbClr val="F9FBFC"/>
+                </a:solidFill>
+                <a:latin typeface="DejaVu Sans"/>
+              </a:rPr>
+              <a:t>1-2 minutes per defect</a:t>
+            </a:r>
+          </a:p>
+        </p:txBody>
+      </p:sp>
+      <p:sp>
+        <p:nvSpPr>
+          <p:cNvPr id="26" name="TextBox 25"/>
           <p:cNvSpPr txBox="1"/>
           <p:nvPr/>
         </p:nvSpPr>
         <p:spPr>
           <a:xfrm>
-            <a:off x="9143999" y="914400"/>
-            <a:ext cx="2377440" cy="182880"/>
+            <a:off x="6486525" y="3152179"/>
+            <a:ext cx="2228850" cy="314325"/>
           </a:xfrm>
           <a:prstGeom prst="rect">
             <a:avLst/>
@@ -4784,35 +4104,41 @@
           <a:noFill/>
         </p:spPr>
         <p:txBody>
-          <a:bodyPr wrap="square" anchor="t">
+          <a:bodyPr wrap="none" anchor="t" lIns="0" rIns="0" tIns="0" bIns="0">
             <a:spAutoFit/>
           </a:bodyPr>
           <a:lstStyle/>
           <a:p>
-            <a:pPr algn="ctr">
-              <a:defRPr sz="900" b="0">
-                <a:solidFill>
-                  <a:srgbClr val="CCCCDD"/>
-                </a:solidFill>
-                <a:latin typeface="Calibri"/>
-              </a:defRPr>
+            <a:pPr algn="l">
+              <a:spcBef>
+                <a:spcPts val="0"/>
+              </a:spcBef>
+              <a:spcAft>
+                <a:spcPts val="0"/>
+              </a:spcAft>
             </a:pPr>
             <a:r>
-              <a:t>Processing Stage 1</a:t>
-            </a:r>
-          </a:p>
-        </p:txBody>
-      </p:sp>
-      <p:sp>
-        <p:nvSpPr>
-          <p:cNvPr id="42" name="TextBox 41"/>
+              <a:rPr sz="1125" b="0">
+                <a:solidFill>
+                  <a:srgbClr val="F9FBFC"/>
+                </a:solidFill>
+                <a:latin typeface="DejaVu Sans"/>
+              </a:rPr>
+              <a:t>Automated Analysis</a:t>
+            </a:r>
+          </a:p>
+        </p:txBody>
+      </p:sp>
+      <p:sp>
+        <p:nvSpPr>
+          <p:cNvPr id="27" name="TextBox 26"/>
           <p:cNvSpPr txBox="1"/>
           <p:nvPr/>
         </p:nvSpPr>
         <p:spPr>
           <a:xfrm>
-            <a:off x="9143999" y="1051560"/>
-            <a:ext cx="2377440" cy="274320"/>
+            <a:off x="6496049" y="3509367"/>
+            <a:ext cx="2276474" cy="314325"/>
           </a:xfrm>
           <a:prstGeom prst="rect">
             <a:avLst/>
@@ -4820,152 +4146,41 @@
           <a:noFill/>
         </p:spPr>
         <p:txBody>
-          <a:bodyPr wrap="square" anchor="t">
+          <a:bodyPr wrap="none" anchor="t" lIns="0" rIns="0" tIns="0" bIns="0">
             <a:spAutoFit/>
           </a:bodyPr>
           <a:lstStyle/>
           <a:p>
-            <a:pPr algn="ctr">
-              <a:defRPr sz="1200" b="1">
-                <a:solidFill>
-                  <a:srgbClr val="FFFFFF"/>
-                </a:solidFill>
-                <a:latin typeface="Calibri"/>
-              </a:defRPr>
+            <a:pPr algn="l">
+              <a:spcBef>
+                <a:spcPts val="0"/>
+              </a:spcBef>
+              <a:spcAft>
+                <a:spcPts val="0"/>
+              </a:spcAft>
             </a:pPr>
             <a:r>
-              <a:t>Source Parser</a:t>
-            </a:r>
-          </a:p>
-        </p:txBody>
-      </p:sp>
-      <p:sp>
-        <p:nvSpPr>
-          <p:cNvPr id="43" name="Down Arrow 42"/>
-          <p:cNvSpPr/>
-          <p:nvPr/>
-        </p:nvSpPr>
-        <p:spPr>
-          <a:xfrm>
-            <a:off x="10241280" y="2331720"/>
-            <a:ext cx="274320" cy="457200"/>
-          </a:xfrm>
-          <a:prstGeom prst="downArrow">
-            <a:avLst/>
-          </a:prstGeom>
-          <a:solidFill>
-            <a:srgbClr val="FF6B00"/>
-          </a:solidFill>
-          <a:ln>
-            <a:noFill/>
-          </a:ln>
-        </p:spPr>
-        <p:style>
-          <a:lnRef idx="1">
-            <a:schemeClr val="accent1"/>
-          </a:lnRef>
-          <a:fillRef idx="3">
-            <a:schemeClr val="accent1"/>
-          </a:fillRef>
-          <a:effectRef idx="2">
-            <a:schemeClr val="accent1"/>
-          </a:effectRef>
-          <a:fontRef idx="minor">
-            <a:schemeClr val="lt1"/>
-          </a:fontRef>
-        </p:style>
-        <p:txBody>
-          <a:bodyPr rtlCol="0" anchor="ctr"/>
-          <a:lstStyle/>
-          <a:p>
-            <a:pPr algn="ctr"/>
-          </a:p>
-        </p:txBody>
-      </p:sp>
-      <p:sp>
-        <p:nvSpPr>
-          <p:cNvPr id="44" name="Rounded Rectangle 43"/>
-          <p:cNvSpPr/>
-          <p:nvPr/>
-        </p:nvSpPr>
-        <p:spPr>
-          <a:xfrm>
-            <a:off x="9601200" y="2743200"/>
-            <a:ext cx="2194560" cy="1097280"/>
-          </a:xfrm>
-          <a:prstGeom prst="roundRect">
-            <a:avLst/>
-          </a:prstGeom>
-          <a:solidFill>
-            <a:srgbClr val="11182E"/>
-          </a:solidFill>
-          <a:ln w="19050">
-            <a:solidFill>
-              <a:srgbClr val="FF6B00"/>
-            </a:solidFill>
-          </a:ln>
-        </p:spPr>
-        <p:style>
-          <a:lnRef idx="1">
-            <a:schemeClr val="accent1"/>
-          </a:lnRef>
-          <a:fillRef idx="3">
-            <a:schemeClr val="accent1"/>
-          </a:fillRef>
-          <a:effectRef idx="2">
-            <a:schemeClr val="accent1"/>
-          </a:effectRef>
-          <a:fontRef idx="minor">
-            <a:schemeClr val="lt1"/>
-          </a:fontRef>
-        </p:style>
-        <p:txBody>
-          <a:bodyPr rtlCol="0" anchor="ctr"/>
-          <a:lstStyle/>
-          <a:p>
-            <a:pPr algn="ctr">
-              <a:defRPr sz="2000"/>
-            </a:pPr>
-            <a:r>
-              <a:t>⚙️</a:t>
-            </a:r>
-          </a:p>
-          <a:p>
-            <a:pPr algn="ctr">
-              <a:defRPr sz="1200" b="1">
-                <a:solidFill>
-                  <a:srgbClr val="FF6B00"/>
-                </a:solidFill>
-              </a:defRPr>
-            </a:pPr>
-            <a:r>
-              <a:t>Rule Engine</a:t>
-            </a:r>
-          </a:p>
-          <a:p>
-            <a:pPr algn="ctr">
-              <a:defRPr sz="900">
-                <a:solidFill>
-                  <a:srgbClr val="CCCCDD"/>
-                </a:solidFill>
-              </a:defRPr>
-            </a:pPr>
-            <a:r>
-              <a:t>20+ Checker Rules</a:t>
-            </a:r>
-          </a:p>
-        </p:txBody>
-      </p:sp>
-      <p:sp>
-        <p:nvSpPr>
-          <p:cNvPr id="45" name="TextBox 44"/>
+              <a:rPr sz="1125" b="0">
+                <a:solidFill>
+                  <a:srgbClr val="F9FBFC"/>
+                </a:solidFill>
+                <a:latin typeface="DejaVu Sans"/>
+              </a:rPr>
+              <a:t>One Controlled Flow</a:t>
+            </a:r>
+          </a:p>
+        </p:txBody>
+      </p:sp>
+      <p:sp>
+        <p:nvSpPr>
+          <p:cNvPr id="28" name="TextBox 27"/>
           <p:cNvSpPr txBox="1"/>
           <p:nvPr/>
         </p:nvSpPr>
         <p:spPr>
           <a:xfrm>
-            <a:off x="9326880" y="2468880"/>
-            <a:ext cx="2743200" cy="228600"/>
+            <a:off x="6496049" y="3884414"/>
+            <a:ext cx="1809749" cy="314325"/>
           </a:xfrm>
           <a:prstGeom prst="rect">
             <a:avLst/>
@@ -4973,152 +4188,41 @@
           <a:noFill/>
         </p:spPr>
         <p:txBody>
-          <a:bodyPr wrap="square" anchor="t">
+          <a:bodyPr wrap="none" anchor="t" lIns="0" rIns="0" tIns="0" bIns="0">
             <a:spAutoFit/>
           </a:bodyPr>
           <a:lstStyle/>
           <a:p>
-            <a:pPr algn="ctr">
-              <a:defRPr sz="900" b="0">
-                <a:solidFill>
-                  <a:srgbClr val="CCCCDD"/>
-                </a:solidFill>
-                <a:latin typeface="Calibri"/>
-              </a:defRPr>
+            <a:pPr algn="l">
+              <a:spcBef>
+                <a:spcPts val="0"/>
+              </a:spcBef>
+              <a:spcAft>
+                <a:spcPts val="0"/>
+              </a:spcAft>
             </a:pPr>
             <a:r>
-              <a:t>Processing Stage 2</a:t>
-            </a:r>
-          </a:p>
-        </p:txBody>
-      </p:sp>
-      <p:sp>
-        <p:nvSpPr>
-          <p:cNvPr id="46" name="Left Arrow 45"/>
-          <p:cNvSpPr/>
-          <p:nvPr/>
-        </p:nvSpPr>
-        <p:spPr>
-          <a:xfrm>
-            <a:off x="9692640" y="3794760"/>
-            <a:ext cx="457200" cy="274320"/>
-          </a:xfrm>
-          <a:prstGeom prst="leftArrow">
-            <a:avLst/>
-          </a:prstGeom>
-          <a:solidFill>
-            <a:srgbClr val="FF6B00"/>
-          </a:solidFill>
-          <a:ln>
-            <a:noFill/>
-          </a:ln>
-        </p:spPr>
-        <p:style>
-          <a:lnRef idx="1">
-            <a:schemeClr val="accent1"/>
-          </a:lnRef>
-          <a:fillRef idx="3">
-            <a:schemeClr val="accent1"/>
-          </a:fillRef>
-          <a:effectRef idx="2">
-            <a:schemeClr val="accent1"/>
-          </a:effectRef>
-          <a:fontRef idx="minor">
-            <a:schemeClr val="lt1"/>
-          </a:fontRef>
-        </p:style>
-        <p:txBody>
-          <a:bodyPr rtlCol="0" anchor="ctr"/>
-          <a:lstStyle/>
-          <a:p>
-            <a:pPr algn="ctr"/>
-          </a:p>
-        </p:txBody>
-      </p:sp>
-      <p:sp>
-        <p:nvSpPr>
-          <p:cNvPr id="47" name="Rounded Rectangle 46"/>
-          <p:cNvSpPr/>
-          <p:nvPr/>
-        </p:nvSpPr>
-        <p:spPr>
-          <a:xfrm>
-            <a:off x="7772400" y="4023360"/>
-            <a:ext cx="2011680" cy="1097280"/>
-          </a:xfrm>
-          <a:prstGeom prst="roundRect">
-            <a:avLst/>
-          </a:prstGeom>
-          <a:solidFill>
-            <a:srgbClr val="11182E"/>
-          </a:solidFill>
-          <a:ln w="19050">
-            <a:solidFill>
-              <a:srgbClr val="FF9933"/>
-            </a:solidFill>
-          </a:ln>
-        </p:spPr>
-        <p:style>
-          <a:lnRef idx="1">
-            <a:schemeClr val="accent1"/>
-          </a:lnRef>
-          <a:fillRef idx="3">
-            <a:schemeClr val="accent1"/>
-          </a:fillRef>
-          <a:effectRef idx="2">
-            <a:schemeClr val="accent1"/>
-          </a:effectRef>
-          <a:fontRef idx="minor">
-            <a:schemeClr val="lt1"/>
-          </a:fontRef>
-        </p:style>
-        <p:txBody>
-          <a:bodyPr rtlCol="0" anchor="ctr"/>
-          <a:lstStyle/>
-          <a:p>
-            <a:pPr algn="ctr">
-              <a:defRPr sz="2000"/>
-            </a:pPr>
-            <a:r>
-              <a:t>🧠</a:t>
-            </a:r>
-          </a:p>
-          <a:p>
-            <a:pPr algn="ctr">
-              <a:defRPr sz="1100" b="1">
-                <a:solidFill>
-                  <a:srgbClr val="FF9933"/>
-                </a:solidFill>
-              </a:defRPr>
-            </a:pPr>
-            <a:r>
-              <a:t>AI-Optimized</a:t>
-            </a:r>
-          </a:p>
-          <a:p>
-            <a:pPr algn="ctr">
-              <a:defRPr sz="1100">
-                <a:solidFill>
-                  <a:srgbClr val="FF9933"/>
-                </a:solidFill>
-              </a:defRPr>
-            </a:pPr>
-            <a:r>
-              <a:t>Analysis</a:t>
-            </a:r>
-          </a:p>
-        </p:txBody>
-      </p:sp>
-      <p:sp>
-        <p:nvSpPr>
-          <p:cNvPr id="48" name="TextBox 47"/>
+              <a:rPr sz="1125" b="0">
+                <a:solidFill>
+                  <a:srgbClr val="F9FBFC"/>
+                </a:solidFill>
+                <a:latin typeface="DejaVu Sans"/>
+              </a:rPr>
+              <a:t>Higher Quality</a:t>
+            </a:r>
+          </a:p>
+        </p:txBody>
+      </p:sp>
+      <p:sp>
+        <p:nvSpPr>
+          <p:cNvPr id="29" name="TextBox 28"/>
           <p:cNvSpPr txBox="1"/>
           <p:nvPr/>
         </p:nvSpPr>
         <p:spPr>
           <a:xfrm>
-            <a:off x="7498079" y="3749039"/>
-            <a:ext cx="2560320" cy="228600"/>
+            <a:off x="3673078" y="4393406"/>
+            <a:ext cx="4693443" cy="589359"/>
           </a:xfrm>
           <a:prstGeom prst="rect">
             <a:avLst/>
@@ -5126,152 +4230,41 @@
           <a:noFill/>
         </p:spPr>
         <p:txBody>
-          <a:bodyPr wrap="square" anchor="t">
+          <a:bodyPr wrap="none" anchor="t" lIns="0" rIns="0" tIns="0" bIns="0">
             <a:spAutoFit/>
           </a:bodyPr>
           <a:lstStyle/>
           <a:p>
             <a:pPr algn="ctr">
-              <a:defRPr sz="900" b="0">
-                <a:solidFill>
-                  <a:srgbClr val="CCCCDD"/>
-                </a:solidFill>
-                <a:latin typeface="Calibri"/>
-              </a:defRPr>
+              <a:spcBef>
+                <a:spcPts val="0"/>
+              </a:spcBef>
+              <a:spcAft>
+                <a:spcPts val="0"/>
+              </a:spcAft>
             </a:pPr>
             <a:r>
-              <a:t>Processing Stage 3</a:t>
-            </a:r>
-          </a:p>
-        </p:txBody>
-      </p:sp>
-      <p:sp>
-        <p:nvSpPr>
-          <p:cNvPr id="49" name="Right Arrow 48"/>
-          <p:cNvSpPr/>
-          <p:nvPr/>
-        </p:nvSpPr>
-        <p:spPr>
-          <a:xfrm>
-            <a:off x="9738360" y="4434840"/>
-            <a:ext cx="548640" cy="274320"/>
-          </a:xfrm>
-          <a:prstGeom prst="rightArrow">
-            <a:avLst/>
-          </a:prstGeom>
-          <a:solidFill>
-            <a:srgbClr val="FF6B00"/>
-          </a:solidFill>
-          <a:ln>
-            <a:noFill/>
-          </a:ln>
-        </p:spPr>
-        <p:style>
-          <a:lnRef idx="1">
-            <a:schemeClr val="accent1"/>
-          </a:lnRef>
-          <a:fillRef idx="3">
-            <a:schemeClr val="accent1"/>
-          </a:fillRef>
-          <a:effectRef idx="2">
-            <a:schemeClr val="accent1"/>
-          </a:effectRef>
-          <a:fontRef idx="minor">
-            <a:schemeClr val="lt1"/>
-          </a:fontRef>
-        </p:style>
-        <p:txBody>
-          <a:bodyPr rtlCol="0" anchor="ctr"/>
-          <a:lstStyle/>
-          <a:p>
-            <a:pPr algn="ctr"/>
-          </a:p>
-        </p:txBody>
-      </p:sp>
-      <p:sp>
-        <p:nvSpPr>
-          <p:cNvPr id="50" name="Rounded Rectangle 49"/>
-          <p:cNvSpPr/>
-          <p:nvPr/>
-        </p:nvSpPr>
-        <p:spPr>
-          <a:xfrm>
-            <a:off x="10241280" y="4023360"/>
-            <a:ext cx="1645920" cy="1097280"/>
-          </a:xfrm>
-          <a:prstGeom prst="roundRect">
-            <a:avLst/>
-          </a:prstGeom>
-          <a:solidFill>
-            <a:srgbClr val="11182E"/>
-          </a:solidFill>
-          <a:ln w="19050">
-            <a:solidFill>
-              <a:srgbClr val="00CC66"/>
-            </a:solidFill>
-          </a:ln>
-        </p:spPr>
-        <p:style>
-          <a:lnRef idx="1">
-            <a:schemeClr val="accent1"/>
-          </a:lnRef>
-          <a:fillRef idx="3">
-            <a:schemeClr val="accent1"/>
-          </a:fillRef>
-          <a:effectRef idx="2">
-            <a:schemeClr val="accent1"/>
-          </a:effectRef>
-          <a:fontRef idx="minor">
-            <a:schemeClr val="lt1"/>
-          </a:fontRef>
-        </p:style>
-        <p:txBody>
-          <a:bodyPr rtlCol="0" anchor="ctr"/>
-          <a:lstStyle/>
-          <a:p>
-            <a:pPr algn="ctr">
-              <a:defRPr sz="2200"/>
-            </a:pPr>
-            <a:r>
-              <a:t>✅</a:t>
-            </a:r>
-          </a:p>
-          <a:p>
-            <a:pPr algn="ctr">
-              <a:defRPr sz="1100" b="1">
-                <a:solidFill>
-                  <a:srgbClr val="00CC66"/>
-                </a:solidFill>
-              </a:defRPr>
-            </a:pPr>
-            <a:r>
-              <a:t>Smart</a:t>
-            </a:r>
-          </a:p>
-          <a:p>
-            <a:pPr algn="ctr">
-              <a:defRPr sz="1100">
-                <a:solidFill>
-                  <a:srgbClr val="00CC66"/>
-                </a:solidFill>
-              </a:defRPr>
-            </a:pPr>
-            <a:r>
-              <a:t>Dispositions</a:t>
-            </a:r>
-          </a:p>
-        </p:txBody>
-      </p:sp>
-      <p:sp>
-        <p:nvSpPr>
-          <p:cNvPr id="51" name="TextBox 50"/>
+              <a:rPr sz="2109" b="1">
+                <a:solidFill>
+                  <a:srgbClr val="F6962D"/>
+                </a:solidFill>
+                <a:latin typeface="DejaVu Sans"/>
+              </a:rPr>
+              <a:t>~90% Time Reduction</a:t>
+            </a:r>
+          </a:p>
+        </p:txBody>
+      </p:sp>
+      <p:sp>
+        <p:nvSpPr>
+          <p:cNvPr id="30" name="TextBox 29"/>
           <p:cNvSpPr txBox="1"/>
           <p:nvPr/>
         </p:nvSpPr>
         <p:spPr>
           <a:xfrm>
-            <a:off x="7040879" y="5440680"/>
-            <a:ext cx="5029200" cy="274320"/>
+            <a:off x="11010900" y="1991320"/>
+            <a:ext cx="1943100" cy="314325"/>
           </a:xfrm>
           <a:prstGeom prst="rect">
             <a:avLst/>
@@ -5279,35 +4272,41 @@
           <a:noFill/>
         </p:spPr>
         <p:txBody>
-          <a:bodyPr wrap="square" anchor="t">
+          <a:bodyPr wrap="none" anchor="t" lIns="0" rIns="0" tIns="0" bIns="0">
             <a:spAutoFit/>
           </a:bodyPr>
           <a:lstStyle/>
           <a:p>
             <a:pPr algn="l">
-              <a:defRPr sz="1300" b="1">
-                <a:solidFill>
-                  <a:srgbClr val="CCCCDD"/>
-                </a:solidFill>
-                <a:latin typeface="Calibri"/>
-              </a:defRPr>
+              <a:spcBef>
+                <a:spcPts val="0"/>
+              </a:spcBef>
+              <a:spcAft>
+                <a:spcPts val="0"/>
+              </a:spcAft>
             </a:pPr>
             <a:r>
-              <a:t>AI used to DEVELOP, analysis is RULE-BASED</a:t>
-            </a:r>
-          </a:p>
-        </p:txBody>
-      </p:sp>
-      <p:sp>
-        <p:nvSpPr>
-          <p:cNvPr id="52" name="TextBox 51"/>
+              <a:rPr sz="1125" b="0">
+                <a:solidFill>
+                  <a:srgbClr val="F9FBFC"/>
+                </a:solidFill>
+                <a:latin typeface="DejaVu Sans"/>
+              </a:rPr>
+              <a:t>* AI used to DEVELOP,</a:t>
+            </a:r>
+          </a:p>
+        </p:txBody>
+      </p:sp>
+      <p:sp>
+        <p:nvSpPr>
+          <p:cNvPr id="31" name="TextBox 30"/>
           <p:cNvSpPr txBox="1"/>
           <p:nvPr/>
         </p:nvSpPr>
         <p:spPr>
           <a:xfrm>
-            <a:off x="274320" y="6400800"/>
-            <a:ext cx="11430000" cy="201168"/>
+            <a:off x="11010900" y="2143125"/>
+            <a:ext cx="1943100" cy="314325"/>
           </a:xfrm>
           <a:prstGeom prst="rect">
             <a:avLst/>
@@ -5315,35 +4314,41 @@
           <a:noFill/>
         </p:spPr>
         <p:txBody>
-          <a:bodyPr wrap="square" anchor="t">
+          <a:bodyPr wrap="none" anchor="t" lIns="0" rIns="0" tIns="0" bIns="0">
             <a:spAutoFit/>
           </a:bodyPr>
           <a:lstStyle/>
           <a:p>
-            <a:pPr algn="ctr">
-              <a:defRPr sz="900" b="0">
-                <a:solidFill>
-                  <a:srgbClr val="8888AA"/>
-                </a:solidFill>
-                <a:latin typeface="Calibri"/>
-              </a:defRPr>
+            <a:pPr algn="l">
+              <a:spcBef>
+                <a:spcPts val="0"/>
+              </a:spcBef>
+              <a:spcAft>
+                <a:spcPts val="0"/>
+              </a:spcAft>
             </a:pPr>
             <a:r>
-              <a:t>Rakesh Boya  |  Tool Owner &amp; Developer  |  Honeywell Aerospace  |  CNS AI Day 2026</a:t>
-            </a:r>
-          </a:p>
-        </p:txBody>
-      </p:sp>
-      <p:sp>
-        <p:nvSpPr>
-          <p:cNvPr id="53" name="TextBox 52"/>
+              <a:rPr sz="1125" b="0">
+                <a:solidFill>
+                  <a:srgbClr val="F9FBFC"/>
+                </a:solidFill>
+                <a:latin typeface="DejaVu Sans"/>
+              </a:rPr>
+              <a:t>analysis is RULE-BASED</a:t>
+            </a:r>
+          </a:p>
+        </p:txBody>
+      </p:sp>
+      <p:sp>
+        <p:nvSpPr>
+          <p:cNvPr id="32" name="TextBox 31"/>
           <p:cNvSpPr txBox="1"/>
           <p:nvPr/>
         </p:nvSpPr>
         <p:spPr>
           <a:xfrm>
-            <a:off x="274320" y="6583680"/>
-            <a:ext cx="11430000" cy="201168"/>
+            <a:off x="8029575" y="3429000"/>
+            <a:ext cx="2286000" cy="314325"/>
           </a:xfrm>
           <a:prstGeom prst="rect">
             <a:avLst/>
@@ -5351,21 +4356,591 @@
           <a:noFill/>
         </p:spPr>
         <p:txBody>
-          <a:bodyPr wrap="square" anchor="t">
+          <a:bodyPr wrap="none" anchor="t" lIns="0" rIns="0" tIns="0" bIns="0">
             <a:spAutoFit/>
           </a:bodyPr>
           <a:lstStyle/>
           <a:p>
             <a:pPr algn="ctr">
-              <a:defRPr sz="900" b="1">
-                <a:solidFill>
-                  <a:srgbClr val="8888AA"/>
-                </a:solidFill>
-                <a:latin typeface="Calibri"/>
-              </a:defRPr>
+              <a:spcBef>
+                <a:spcPts val="0"/>
+              </a:spcBef>
+              <a:spcAft>
+                <a:spcPts val="0"/>
+              </a:spcAft>
             </a:pPr>
             <a:r>
-              <a:t>Confidential</a:t>
+              <a:rPr sz="1125" b="1">
+                <a:solidFill>
+                  <a:srgbClr val="F9FBFC"/>
+                </a:solidFill>
+                <a:latin typeface="DejaVu Sans"/>
+              </a:rPr>
+              <a:t>HTML/Excel</a:t>
+            </a:r>
+          </a:p>
+        </p:txBody>
+      </p:sp>
+      <p:sp>
+        <p:nvSpPr>
+          <p:cNvPr id="33" name="TextBox 32"/>
+          <p:cNvSpPr txBox="1"/>
+          <p:nvPr/>
+        </p:nvSpPr>
+        <p:spPr>
+          <a:xfrm>
+            <a:off x="7991474" y="3714750"/>
+            <a:ext cx="2286000" cy="294679"/>
+          </a:xfrm>
+          <a:prstGeom prst="rect">
+            <a:avLst/>
+          </a:prstGeom>
+          <a:noFill/>
+        </p:spPr>
+        <p:txBody>
+          <a:bodyPr wrap="none" anchor="t" lIns="0" rIns="0" tIns="0" bIns="0">
+            <a:spAutoFit/>
+          </a:bodyPr>
+          <a:lstStyle/>
+          <a:p>
+            <a:pPr algn="ctr">
+              <a:spcBef>
+                <a:spcPts val="0"/>
+              </a:spcBef>
+              <a:spcAft>
+                <a:spcPts val="0"/>
+              </a:spcAft>
+            </a:pPr>
+            <a:r>
+              <a:rPr sz="1054" b="1">
+                <a:solidFill>
+                  <a:srgbClr val="F9FBFC"/>
+                </a:solidFill>
+                <a:latin typeface="DejaVu Sans"/>
+              </a:rPr>
+              <a:t>Reports</a:t>
+            </a:r>
+          </a:p>
+        </p:txBody>
+      </p:sp>
+      <p:sp>
+        <p:nvSpPr>
+          <p:cNvPr id="34" name="TextBox 33"/>
+          <p:cNvSpPr txBox="1"/>
+          <p:nvPr/>
+        </p:nvSpPr>
+        <p:spPr>
+          <a:xfrm>
+            <a:off x="9391649" y="4446984"/>
+            <a:ext cx="2286000" cy="333970"/>
+          </a:xfrm>
+          <a:prstGeom prst="rect">
+            <a:avLst/>
+          </a:prstGeom>
+          <a:noFill/>
+        </p:spPr>
+        <p:txBody>
+          <a:bodyPr wrap="none" anchor="t" lIns="0" rIns="0" tIns="0" bIns="0">
+            <a:spAutoFit/>
+          </a:bodyPr>
+          <a:lstStyle/>
+          <a:p>
+            <a:pPr algn="ctr">
+              <a:spcBef>
+                <a:spcPts val="0"/>
+              </a:spcBef>
+              <a:spcAft>
+                <a:spcPts val="0"/>
+              </a:spcAft>
+            </a:pPr>
+            <a:r>
+              <a:rPr sz="1195" b="1">
+                <a:solidFill>
+                  <a:srgbClr val="F9FBFC"/>
+                </a:solidFill>
+                <a:latin typeface="DejaVu Sans"/>
+              </a:rPr>
+              <a:t>Rules Engine</a:t>
+            </a:r>
+          </a:p>
+        </p:txBody>
+      </p:sp>
+      <p:sp>
+        <p:nvSpPr>
+          <p:cNvPr id="35" name="TextBox 34"/>
+          <p:cNvSpPr txBox="1"/>
+          <p:nvPr/>
+        </p:nvSpPr>
+        <p:spPr>
+          <a:xfrm>
+            <a:off x="9401175" y="4723804"/>
+            <a:ext cx="2286000" cy="294679"/>
+          </a:xfrm>
+          <a:prstGeom prst="rect">
+            <a:avLst/>
+          </a:prstGeom>
+          <a:noFill/>
+        </p:spPr>
+        <p:txBody>
+          <a:bodyPr wrap="none" anchor="t" lIns="0" rIns="0" tIns="0" bIns="0">
+            <a:spAutoFit/>
+          </a:bodyPr>
+          <a:lstStyle/>
+          <a:p>
+            <a:pPr algn="ctr">
+              <a:spcBef>
+                <a:spcPts val="0"/>
+              </a:spcBef>
+              <a:spcAft>
+                <a:spcPts val="0"/>
+              </a:spcAft>
+            </a:pPr>
+            <a:r>
+              <a:rPr sz="1054" b="1">
+                <a:solidFill>
+                  <a:srgbClr val="F9FBFC"/>
+                </a:solidFill>
+                <a:latin typeface="DejaVu Sans"/>
+              </a:rPr>
+              <a:t>AI Developed</a:t>
+            </a:r>
+          </a:p>
+        </p:txBody>
+      </p:sp>
+      <p:sp>
+        <p:nvSpPr>
+          <p:cNvPr id="36" name="TextBox 35"/>
+          <p:cNvSpPr txBox="1"/>
+          <p:nvPr/>
+        </p:nvSpPr>
+        <p:spPr>
+          <a:xfrm>
+            <a:off x="9482137" y="4947046"/>
+            <a:ext cx="2286000" cy="294679"/>
+          </a:xfrm>
+          <a:prstGeom prst="rect">
+            <a:avLst/>
+          </a:prstGeom>
+          <a:noFill/>
+        </p:spPr>
+        <p:txBody>
+          <a:bodyPr wrap="none" anchor="t" lIns="0" rIns="0" tIns="0" bIns="0">
+            <a:spAutoFit/>
+          </a:bodyPr>
+          <a:lstStyle/>
+          <a:p>
+            <a:pPr algn="ctr">
+              <a:spcBef>
+                <a:spcPts val="0"/>
+              </a:spcBef>
+              <a:spcAft>
+                <a:spcPts val="0"/>
+              </a:spcAft>
+            </a:pPr>
+            <a:r>
+              <a:rPr sz="1054" b="0">
+                <a:solidFill>
+                  <a:srgbClr val="F9FBFC"/>
+                </a:solidFill>
+                <a:latin typeface="DejaVu Sans"/>
+              </a:rPr>
+              <a:t>20+ Checker Rules</a:t>
+            </a:r>
+          </a:p>
+        </p:txBody>
+      </p:sp>
+      <p:sp>
+        <p:nvSpPr>
+          <p:cNvPr id="37" name="TextBox 36"/>
+          <p:cNvSpPr txBox="1"/>
+          <p:nvPr/>
+        </p:nvSpPr>
+        <p:spPr>
+          <a:xfrm>
+            <a:off x="11087100" y="5313164"/>
+            <a:ext cx="1838324" cy="392906"/>
+          </a:xfrm>
+          <a:prstGeom prst="rect">
+            <a:avLst/>
+          </a:prstGeom>
+          <a:noFill/>
+        </p:spPr>
+        <p:txBody>
+          <a:bodyPr wrap="none" anchor="t" lIns="0" rIns="0" tIns="0" bIns="0">
+            <a:spAutoFit/>
+          </a:bodyPr>
+          <a:lstStyle/>
+          <a:p>
+            <a:pPr algn="l">
+              <a:spcBef>
+                <a:spcPts val="0"/>
+              </a:spcBef>
+              <a:spcAft>
+                <a:spcPts val="0"/>
+              </a:spcAft>
+            </a:pPr>
+            <a:r>
+              <a:rPr sz="1406" b="1">
+                <a:solidFill>
+                  <a:srgbClr val="F9FBFC"/>
+                </a:solidFill>
+                <a:latin typeface="DejaVu Sans"/>
+              </a:rPr>
+              <a:t>Smart</a:t>
+            </a:r>
+          </a:p>
+        </p:txBody>
+      </p:sp>
+      <p:sp>
+        <p:nvSpPr>
+          <p:cNvPr id="38" name="TextBox 37"/>
+          <p:cNvSpPr txBox="1"/>
+          <p:nvPr/>
+        </p:nvSpPr>
+        <p:spPr>
+          <a:xfrm>
+            <a:off x="11220449" y="5643562"/>
+            <a:ext cx="1733550" cy="392906"/>
+          </a:xfrm>
+          <a:prstGeom prst="rect">
+            <a:avLst/>
+          </a:prstGeom>
+          <a:noFill/>
+        </p:spPr>
+        <p:txBody>
+          <a:bodyPr wrap="none" anchor="t" lIns="0" rIns="0" tIns="0" bIns="0">
+            <a:spAutoFit/>
+          </a:bodyPr>
+          <a:lstStyle/>
+          <a:p>
+            <a:pPr algn="l">
+              <a:spcBef>
+                <a:spcPts val="0"/>
+              </a:spcBef>
+              <a:spcAft>
+                <a:spcPts val="0"/>
+              </a:spcAft>
+            </a:pPr>
+            <a:r>
+              <a:rPr sz="1406" b="1">
+                <a:solidFill>
+                  <a:srgbClr val="F9FBFC"/>
+                </a:solidFill>
+                <a:latin typeface="DejaVu Sans"/>
+              </a:rPr>
+              <a:t>Dispositions</a:t>
+            </a:r>
+          </a:p>
+        </p:txBody>
+      </p:sp>
+      <p:sp>
+        <p:nvSpPr>
+          <p:cNvPr id="39" name="TextBox 38"/>
+          <p:cNvSpPr txBox="1"/>
+          <p:nvPr/>
+        </p:nvSpPr>
+        <p:spPr>
+          <a:xfrm>
+            <a:off x="9477374" y="5572125"/>
+            <a:ext cx="2476499" cy="353615"/>
+          </a:xfrm>
+          <a:prstGeom prst="rect">
+            <a:avLst/>
+          </a:prstGeom>
+          <a:noFill/>
+        </p:spPr>
+        <p:txBody>
+          <a:bodyPr wrap="none" anchor="t" lIns="0" rIns="0" tIns="0" bIns="0">
+            <a:spAutoFit/>
+          </a:bodyPr>
+          <a:lstStyle/>
+          <a:p>
+            <a:pPr algn="l">
+              <a:spcBef>
+                <a:spcPts val="0"/>
+              </a:spcBef>
+              <a:spcAft>
+                <a:spcPts val="0"/>
+              </a:spcAft>
+            </a:pPr>
+            <a:r>
+              <a:rPr sz="1265" b="0">
+                <a:solidFill>
+                  <a:srgbClr val="F9FBFC"/>
+                </a:solidFill>
+                <a:latin typeface="DejaVu Sans"/>
+              </a:rPr>
+              <a:t>AI used to DEVELOP,</a:t>
+            </a:r>
+          </a:p>
+        </p:txBody>
+      </p:sp>
+      <p:sp>
+        <p:nvSpPr>
+          <p:cNvPr id="40" name="TextBox 39"/>
+          <p:cNvSpPr txBox="1"/>
+          <p:nvPr/>
+        </p:nvSpPr>
+        <p:spPr>
+          <a:xfrm>
+            <a:off x="9458325" y="5786437"/>
+            <a:ext cx="2543175" cy="314325"/>
+          </a:xfrm>
+          <a:prstGeom prst="rect">
+            <a:avLst/>
+          </a:prstGeom>
+          <a:noFill/>
+        </p:spPr>
+        <p:txBody>
+          <a:bodyPr wrap="none" anchor="t" lIns="0" rIns="0" tIns="0" bIns="0">
+            <a:spAutoFit/>
+          </a:bodyPr>
+          <a:lstStyle/>
+          <a:p>
+            <a:pPr algn="l">
+              <a:spcBef>
+                <a:spcPts val="0"/>
+              </a:spcBef>
+              <a:spcAft>
+                <a:spcPts val="0"/>
+              </a:spcAft>
+            </a:pPr>
+            <a:r>
+              <a:rPr sz="1125" b="0">
+                <a:solidFill>
+                  <a:srgbClr val="F9FBFC"/>
+                </a:solidFill>
+                <a:latin typeface="DejaVu Sans"/>
+              </a:rPr>
+              <a:t>analysis is RULE-BASED</a:t>
+            </a:r>
+          </a:p>
+        </p:txBody>
+      </p:sp>
+      <p:sp>
+        <p:nvSpPr>
+          <p:cNvPr id="41" name="TextBox 40"/>
+          <p:cNvSpPr txBox="1"/>
+          <p:nvPr/>
+        </p:nvSpPr>
+        <p:spPr>
+          <a:xfrm>
+            <a:off x="885825" y="5054203"/>
+            <a:ext cx="5114925" cy="530423"/>
+          </a:xfrm>
+          <a:prstGeom prst="rect">
+            <a:avLst/>
+          </a:prstGeom>
+          <a:noFill/>
+        </p:spPr>
+        <p:txBody>
+          <a:bodyPr wrap="none" anchor="t" lIns="0" rIns="0" tIns="0" bIns="0">
+            <a:spAutoFit/>
+          </a:bodyPr>
+          <a:lstStyle/>
+          <a:p>
+            <a:pPr algn="l">
+              <a:spcBef>
+                <a:spcPts val="0"/>
+              </a:spcBef>
+              <a:spcAft>
+                <a:spcPts val="0"/>
+              </a:spcAft>
+            </a:pPr>
+            <a:r>
+              <a:rPr sz="1898" b="1">
+                <a:solidFill>
+                  <a:srgbClr val="EE6E1E"/>
+                </a:solidFill>
+                <a:latin typeface="DejaVu Sans"/>
+              </a:rPr>
+              <a:t>COST SAVINGS PER PROGRAM</a:t>
+            </a:r>
+          </a:p>
+        </p:txBody>
+      </p:sp>
+      <p:sp>
+        <p:nvSpPr>
+          <p:cNvPr id="42" name="TextBox 41"/>
+          <p:cNvSpPr txBox="1"/>
+          <p:nvPr/>
+        </p:nvSpPr>
+        <p:spPr>
+          <a:xfrm>
+            <a:off x="790574" y="5464968"/>
+            <a:ext cx="6991350" cy="451842"/>
+          </a:xfrm>
+          <a:prstGeom prst="rect">
+            <a:avLst/>
+          </a:prstGeom>
+          <a:noFill/>
+        </p:spPr>
+        <p:txBody>
+          <a:bodyPr wrap="none" anchor="t" lIns="0" rIns="0" tIns="0" bIns="0">
+            <a:spAutoFit/>
+          </a:bodyPr>
+          <a:lstStyle/>
+          <a:p>
+            <a:pPr algn="l">
+              <a:spcBef>
+                <a:spcPts val="0"/>
+              </a:spcBef>
+              <a:spcAft>
+                <a:spcPts val="0"/>
+              </a:spcAft>
+            </a:pPr>
+            <a:r>
+              <a:rPr sz="1617" b="0">
+                <a:solidFill>
+                  <a:srgbClr val="F9FBFC"/>
+                </a:solidFill>
+                <a:latin typeface="DejaVu Sans"/>
+              </a:rPr>
+              <a:t>RL1 (1,000 defects): 250 hrs → 33 hrs = </a:t>
+            </a:r>
+            <a:r>
+              <a:rPr sz="1617" b="1">
+                <a:solidFill>
+                  <a:srgbClr val="F6962D"/>
+                </a:solidFill>
+                <a:latin typeface="DejaVu Sans"/>
+              </a:rPr>
+              <a:t>217 hrs SAVED</a:t>
+            </a:r>
+          </a:p>
+        </p:txBody>
+      </p:sp>
+      <p:sp>
+        <p:nvSpPr>
+          <p:cNvPr id="43" name="TextBox 42"/>
+          <p:cNvSpPr txBox="1"/>
+          <p:nvPr/>
+        </p:nvSpPr>
+        <p:spPr>
+          <a:xfrm>
+            <a:off x="790574" y="5786437"/>
+            <a:ext cx="7781924" cy="451842"/>
+          </a:xfrm>
+          <a:prstGeom prst="rect">
+            <a:avLst/>
+          </a:prstGeom>
+          <a:noFill/>
+        </p:spPr>
+        <p:txBody>
+          <a:bodyPr wrap="none" anchor="t" lIns="0" rIns="0" tIns="0" bIns="0">
+            <a:spAutoFit/>
+          </a:bodyPr>
+          <a:lstStyle/>
+          <a:p>
+            <a:pPr algn="l">
+              <a:spcBef>
+                <a:spcPts val="0"/>
+              </a:spcBef>
+              <a:spcAft>
+                <a:spcPts val="0"/>
+              </a:spcAft>
+            </a:pPr>
+            <a:r>
+              <a:rPr sz="1617" b="0">
+                <a:solidFill>
+                  <a:srgbClr val="F9FBFC"/>
+                </a:solidFill>
+                <a:latin typeface="DejaVu Sans"/>
+              </a:rPr>
+              <a:t>Program (4,000 defects): 1000 hrs → 133 hrs = </a:t>
+            </a:r>
+            <a:r>
+              <a:rPr sz="1617" b="1">
+                <a:solidFill>
+                  <a:srgbClr val="F6962D"/>
+                </a:solidFill>
+                <a:latin typeface="DejaVu Sans"/>
+              </a:rPr>
+              <a:t>867 hrs SAVED</a:t>
+            </a:r>
+          </a:p>
+        </p:txBody>
+      </p:sp>
+      <p:sp>
+        <p:nvSpPr>
+          <p:cNvPr id="44" name="TextBox 43"/>
+          <p:cNvSpPr txBox="1"/>
+          <p:nvPr/>
+        </p:nvSpPr>
+        <p:spPr>
+          <a:xfrm>
+            <a:off x="790574" y="6098976"/>
+            <a:ext cx="5781674" cy="451842"/>
+          </a:xfrm>
+          <a:prstGeom prst="rect">
+            <a:avLst/>
+          </a:prstGeom>
+          <a:noFill/>
+        </p:spPr>
+        <p:txBody>
+          <a:bodyPr wrap="none" anchor="t" lIns="0" rIns="0" tIns="0" bIns="0">
+            <a:spAutoFit/>
+          </a:bodyPr>
+          <a:lstStyle/>
+          <a:p>
+            <a:pPr algn="l">
+              <a:spcBef>
+                <a:spcPts val="0"/>
+              </a:spcBef>
+              <a:spcAft>
+                <a:spcPts val="0"/>
+              </a:spcAft>
+            </a:pPr>
+            <a:r>
+              <a:rPr sz="1617" b="0">
+                <a:solidFill>
+                  <a:srgbClr val="F9FBFC"/>
+                </a:solidFill>
+                <a:latin typeface="DejaVu Sans"/>
+              </a:rPr>
+              <a:t>Cost: $7,595 - $30,345 per release (at $30/hr)</a:t>
+            </a:r>
+          </a:p>
+        </p:txBody>
+      </p:sp>
+      <p:sp>
+        <p:nvSpPr>
+          <p:cNvPr id="45" name="TextBox 44"/>
+          <p:cNvSpPr txBox="1"/>
+          <p:nvPr/>
+        </p:nvSpPr>
+        <p:spPr>
+          <a:xfrm>
+            <a:off x="1760458" y="6607968"/>
+            <a:ext cx="9528333" cy="294679"/>
+          </a:xfrm>
+          <a:prstGeom prst="rect">
+            <a:avLst/>
+          </a:prstGeom>
+          <a:noFill/>
+        </p:spPr>
+        <p:txBody>
+          <a:bodyPr wrap="none" anchor="t" lIns="0" rIns="0" tIns="0" bIns="0">
+            <a:spAutoFit/>
+          </a:bodyPr>
+          <a:lstStyle/>
+          <a:p>
+            <a:pPr algn="ctr">
+              <a:spcBef>
+                <a:spcPts val="0"/>
+              </a:spcBef>
+              <a:spcAft>
+                <a:spcPts val="0"/>
+              </a:spcAft>
+            </a:pPr>
+            <a:r>
+              <a:rPr sz="1054" b="0">
+                <a:solidFill>
+                  <a:srgbClr val="F9FBFC"/>
+                </a:solidFill>
+                <a:latin typeface="DejaVu Sans"/>
+              </a:rPr>
+              <a:t>Rakesh Boya | Tool Owner &amp; Developer | Honeywell Aerospace | CNS AI Day 2026 | Confidential</a:t>
             </a:r>
           </a:p>
         </p:txBody>

--- a/Coverity_Final_Slide_Updated.pptx
+++ b/Coverity_Final_Slide_Updated.pptx
@@ -3120,8 +3120,8 @@
         </p:nvSpPr>
         <p:spPr>
           <a:xfrm>
-            <a:off x="400050" y="151804"/>
-            <a:ext cx="3867149" cy="550068"/>
+            <a:off x="372130" y="160734"/>
+            <a:ext cx="3659280" cy="649837"/>
           </a:xfrm>
           <a:prstGeom prst="rect">
             <a:avLst/>
@@ -3135,6 +3135,9 @@
           <a:lstStyle/>
           <a:p>
             <a:pPr algn="l">
+              <a:lnSpc>
+                <a:spcPct val="100000"/>
+              </a:lnSpc>
               <a:spcBef>
                 <a:spcPts val="0"/>
               </a:spcBef>
@@ -3143,20 +3146,20 @@
               </a:spcAft>
             </a:pPr>
             <a:r>
-              <a:rPr sz="1968" b="1">
+              <a:rPr sz="2132" b="1">
                 <a:solidFill>
                   <a:srgbClr val="F9FBFC"/>
                 </a:solidFill>
-                <a:latin typeface="DejaVu Sans"/>
+                <a:latin typeface="Arial"/>
               </a:rPr>
               <a:t>Honeywell </a:t>
             </a:r>
             <a:r>
-              <a:rPr sz="1968" b="0">
+              <a:rPr sz="2132" b="0">
                 <a:solidFill>
                   <a:srgbClr val="F9FBFC"/>
                 </a:solidFill>
-                <a:latin typeface="DejaVu Sans"/>
+                <a:latin typeface="Arial"/>
               </a:rPr>
               <a:t>Aerospace</a:t>
             </a:r>
@@ -3171,8 +3174,8 @@
         </p:nvSpPr>
         <p:spPr>
           <a:xfrm>
-            <a:off x="10715625" y="205382"/>
-            <a:ext cx="2352675" cy="392906"/>
+            <a:off x="9976634" y="178593"/>
+            <a:ext cx="2631492" cy="519288"/>
           </a:xfrm>
           <a:prstGeom prst="rect">
             <a:avLst/>
@@ -3186,6 +3189,9 @@
           <a:lstStyle/>
           <a:p>
             <a:pPr algn="l">
+              <a:lnSpc>
+                <a:spcPct val="100000"/>
+              </a:lnSpc>
               <a:spcBef>
                 <a:spcPts val="0"/>
               </a:spcBef>
@@ -3194,11 +3200,11 @@
               </a:spcAft>
             </a:pPr>
             <a:r>
-              <a:rPr sz="1406" b="1">
+              <a:rPr sz="1703" b="1">
                 <a:solidFill>
                   <a:srgbClr val="EE6E1E"/>
                 </a:solidFill>
-                <a:latin typeface="DejaVu Sans"/>
+                <a:latin typeface="Arial"/>
               </a:rPr>
               <a:t>CNS AI Day 2026</a:t>
             </a:r>
@@ -3213,8 +3219,8 @@
         </p:nvSpPr>
         <p:spPr>
           <a:xfrm>
-            <a:off x="1229439" y="705445"/>
-            <a:ext cx="11457146" cy="982265"/>
+            <a:off x="547120" y="696515"/>
+            <a:ext cx="11841715" cy="1196373"/>
           </a:xfrm>
           <a:prstGeom prst="rect">
             <a:avLst/>
@@ -3228,6 +3234,9 @@
           <a:lstStyle/>
           <a:p>
             <a:pPr algn="ctr">
+              <a:lnSpc>
+                <a:spcPct val="100000"/>
+              </a:lnSpc>
               <a:spcBef>
                 <a:spcPts val="0"/>
               </a:spcBef>
@@ -3236,11 +3245,11 @@
               </a:spcAft>
             </a:pPr>
             <a:r>
-              <a:rPr sz="3515" b="1">
+              <a:rPr sz="3925" b="1">
                 <a:solidFill>
                   <a:srgbClr val="F9FBFC"/>
                 </a:solidFill>
-                <a:latin typeface="DejaVu Sans"/>
+                <a:latin typeface="Arial"/>
               </a:rPr>
               <a:t>COVERITY FINDINGS ANALYZER</a:t>
             </a:r>
@@ -3255,8 +3264,8 @@
         </p:nvSpPr>
         <p:spPr>
           <a:xfrm>
-            <a:off x="1470898" y="1321593"/>
-            <a:ext cx="10145553" cy="550068"/>
+            <a:off x="843938" y="1312664"/>
+            <a:ext cx="10486098" cy="605761"/>
           </a:xfrm>
           <a:prstGeom prst="rect">
             <a:avLst/>
@@ -3270,6 +3279,9 @@
           <a:lstStyle/>
           <a:p>
             <a:pPr algn="ctr">
+              <a:lnSpc>
+                <a:spcPct val="100000"/>
+              </a:lnSpc>
               <a:spcBef>
                 <a:spcPts val="0"/>
               </a:spcBef>
@@ -3278,11 +3290,11 @@
               </a:spcAft>
             </a:pPr>
             <a:r>
-              <a:rPr sz="1968" b="0">
+              <a:rPr sz="1987" b="0">
                 <a:solidFill>
                   <a:srgbClr val="F9FBFC"/>
                 </a:solidFill>
-                <a:latin typeface="DejaVu Sans"/>
+                <a:latin typeface="Arial"/>
               </a:rPr>
               <a:t>AI-Developed, Rule-Based Static Analysis for Aerospace</a:t>
             </a:r>
@@ -3297,8 +3309,8 @@
         </p:nvSpPr>
         <p:spPr>
           <a:xfrm>
-            <a:off x="838200" y="1973460"/>
-            <a:ext cx="3067050" cy="510778"/>
+            <a:off x="779701" y="1946671"/>
+            <a:ext cx="2994762" cy="629920"/>
           </a:xfrm>
           <a:prstGeom prst="rect">
             <a:avLst/>
@@ -3312,6 +3324,9 @@
           <a:lstStyle/>
           <a:p>
             <a:pPr algn="l">
+              <a:lnSpc>
+                <a:spcPct val="100000"/>
+              </a:lnSpc>
               <a:spcBef>
                 <a:spcPts val="0"/>
               </a:spcBef>
@@ -3320,11 +3335,11 @@
               </a:spcAft>
             </a:pPr>
             <a:r>
-              <a:rPr sz="1828" b="1">
+              <a:rPr sz="2066" b="1">
                 <a:solidFill>
                   <a:srgbClr val="EE6E1E"/>
                 </a:solidFill>
-                <a:latin typeface="DejaVu Sans"/>
+                <a:latin typeface="Arial"/>
               </a:rPr>
               <a:t>CORE FEATURES</a:t>
             </a:r>
@@ -3339,8 +3354,8 @@
         </p:nvSpPr>
         <p:spPr>
           <a:xfrm>
-            <a:off x="742950" y="2375296"/>
-            <a:ext cx="3200400" cy="392906"/>
+            <a:off x="691099" y="2366367"/>
+            <a:ext cx="3065644" cy="478704"/>
           </a:xfrm>
           <a:prstGeom prst="rect">
             <a:avLst/>
@@ -3354,6 +3369,9 @@
           <a:lstStyle/>
           <a:p>
             <a:pPr algn="l">
+              <a:lnSpc>
+                <a:spcPct val="100000"/>
+              </a:lnSpc>
               <a:spcBef>
                 <a:spcPts val="0"/>
               </a:spcBef>
@@ -3362,11 +3380,11 @@
               </a:spcAft>
             </a:pPr>
             <a:r>
-              <a:rPr sz="1406" b="1">
+              <a:rPr sz="1570" b="1">
                 <a:solidFill>
                   <a:srgbClr val="F9FBFC"/>
                 </a:solidFill>
-                <a:latin typeface="DejaVu Sans"/>
+                <a:latin typeface="Arial"/>
               </a:rPr>
               <a:t>Aerospace Compliance</a:t>
             </a:r>
@@ -3381,8 +3399,8 @@
         </p:nvSpPr>
         <p:spPr>
           <a:xfrm>
-            <a:off x="752475" y="2598539"/>
-            <a:ext cx="3181350" cy="412551"/>
+            <a:off x="699959" y="2687835"/>
+            <a:ext cx="3047923" cy="442395"/>
           </a:xfrm>
           <a:prstGeom prst="rect">
             <a:avLst/>
@@ -3396,6 +3414,9 @@
           <a:lstStyle/>
           <a:p>
             <a:pPr algn="l">
+              <a:lnSpc>
+                <a:spcPct val="100000"/>
+              </a:lnSpc>
               <a:spcBef>
                 <a:spcPts val="0"/>
               </a:spcBef>
@@ -3404,11 +3425,11 @@
               </a:spcAft>
             </a:pPr>
             <a:r>
-              <a:rPr sz="1476" b="0">
+              <a:rPr sz="1451" b="0">
                 <a:solidFill>
                   <a:srgbClr val="F9FBFC"/>
                 </a:solidFill>
-                <a:latin typeface="DejaVu Sans"/>
+                <a:latin typeface="Arial"/>
               </a:rPr>
               <a:t>- DO-178C, MISRA, CERT</a:t>
             </a:r>
@@ -3423,8 +3444,8 @@
         </p:nvSpPr>
         <p:spPr>
           <a:xfrm>
-            <a:off x="761999" y="2991445"/>
-            <a:ext cx="3086100" cy="373260"/>
+            <a:off x="708819" y="2991445"/>
+            <a:ext cx="2950461" cy="458615"/>
           </a:xfrm>
           <a:prstGeom prst="rect">
             <a:avLst/>
@@ -3438,6 +3459,9 @@
           <a:lstStyle/>
           <a:p>
             <a:pPr algn="l">
+              <a:lnSpc>
+                <a:spcPct val="100000"/>
+              </a:lnSpc>
               <a:spcBef>
                 <a:spcPts val="0"/>
               </a:spcBef>
@@ -3446,11 +3470,11 @@
               </a:spcAft>
             </a:pPr>
             <a:r>
-              <a:rPr sz="1335" b="1">
+              <a:rPr sz="1504" b="1">
                 <a:solidFill>
                   <a:srgbClr val="F9FBFC"/>
                 </a:solidFill>
-                <a:latin typeface="DejaVu Sans"/>
+                <a:latin typeface="Arial"/>
               </a:rPr>
               <a:t>100% Secure &amp; Offline</a:t>
             </a:r>
@@ -3465,8 +3489,8 @@
         </p:nvSpPr>
         <p:spPr>
           <a:xfrm>
-            <a:off x="752475" y="3250406"/>
-            <a:ext cx="3581400" cy="373260"/>
+            <a:off x="699959" y="3232546"/>
+            <a:ext cx="3420054" cy="412909"/>
           </a:xfrm>
           <a:prstGeom prst="rect">
             <a:avLst/>
@@ -3480,6 +3504,9 @@
           <a:lstStyle/>
           <a:p>
             <a:pPr algn="l">
+              <a:lnSpc>
+                <a:spcPct val="100000"/>
+              </a:lnSpc>
               <a:spcBef>
                 <a:spcPts val="0"/>
               </a:spcBef>
@@ -3488,11 +3515,11 @@
               </a:spcAft>
             </a:pPr>
             <a:r>
-              <a:rPr sz="1335" b="0">
+              <a:rPr sz="1354" b="0">
                 <a:solidFill>
                   <a:srgbClr val="F9FBFC"/>
                 </a:solidFill>
-                <a:latin typeface="DejaVu Sans"/>
+                <a:latin typeface="Arial"/>
               </a:rPr>
               <a:t>- Source never leaves machine</a:t>
             </a:r>
@@ -3507,8 +3534,8 @@
         </p:nvSpPr>
         <p:spPr>
           <a:xfrm>
-            <a:off x="761999" y="3580804"/>
-            <a:ext cx="3133724" cy="373260"/>
+            <a:off x="708819" y="3580804"/>
+            <a:ext cx="3003622" cy="474345"/>
           </a:xfrm>
           <a:prstGeom prst="rect">
             <a:avLst/>
@@ -3522,6 +3549,9 @@
           <a:lstStyle/>
           <a:p>
             <a:pPr algn="l">
+              <a:lnSpc>
+                <a:spcPct val="100000"/>
+              </a:lnSpc>
               <a:spcBef>
                 <a:spcPts val="0"/>
               </a:spcBef>
@@ -3530,11 +3560,11 @@
               </a:spcAft>
             </a:pPr>
             <a:r>
-              <a:rPr sz="1335" b="1">
+              <a:rPr sz="1556" b="1">
                 <a:solidFill>
                   <a:srgbClr val="F9FBFC"/>
                 </a:solidFill>
-                <a:latin typeface="DejaVu Sans"/>
+                <a:latin typeface="Arial"/>
               </a:rPr>
               <a:t>No AI Tokens Required</a:t>
             </a:r>
@@ -3549,8 +3579,8 @@
         </p:nvSpPr>
         <p:spPr>
           <a:xfrm>
-            <a:off x="752475" y="3848695"/>
-            <a:ext cx="2581275" cy="373260"/>
+            <a:off x="699959" y="3839765"/>
+            <a:ext cx="2489728" cy="418825"/>
           </a:xfrm>
           <a:prstGeom prst="rect">
             <a:avLst/>
@@ -3564,6 +3594,9 @@
           <a:lstStyle/>
           <a:p>
             <a:pPr algn="l">
+              <a:lnSpc>
+                <a:spcPct val="100000"/>
+              </a:lnSpc>
               <a:spcBef>
                 <a:spcPts val="0"/>
               </a:spcBef>
@@ -3572,11 +3605,11 @@
               </a:spcAft>
             </a:pPr>
             <a:r>
-              <a:rPr sz="1335" b="0">
+              <a:rPr sz="1374" b="0">
                 <a:solidFill>
                   <a:srgbClr val="F9FBFC"/>
                 </a:solidFill>
-                <a:latin typeface="DejaVu Sans"/>
+                <a:latin typeface="Arial"/>
               </a:rPr>
               <a:t>- Runs 100% offline</a:t>
             </a:r>
@@ -3591,8 +3624,8 @@
         </p:nvSpPr>
         <p:spPr>
           <a:xfrm>
-            <a:off x="761999" y="4179093"/>
-            <a:ext cx="3571875" cy="392906"/>
+            <a:off x="708819" y="4188023"/>
+            <a:ext cx="3411193" cy="477007"/>
           </a:xfrm>
           <a:prstGeom prst="rect">
             <a:avLst/>
@@ -3606,6 +3639,9 @@
           <a:lstStyle/>
           <a:p>
             <a:pPr algn="l">
+              <a:lnSpc>
+                <a:spcPct val="100000"/>
+              </a:lnSpc>
               <a:spcBef>
                 <a:spcPts val="0"/>
               </a:spcBef>
@@ -3614,11 +3650,11 @@
               </a:spcAft>
             </a:pPr>
             <a:r>
-              <a:rPr sz="1406" b="1">
+              <a:rPr sz="1564" b="1">
                 <a:solidFill>
                   <a:srgbClr val="F9FBFC"/>
                 </a:solidFill>
-                <a:latin typeface="DejaVu Sans"/>
+                <a:latin typeface="Arial"/>
               </a:rPr>
               <a:t>Reduces SME Dependency</a:t>
             </a:r>
@@ -3633,8 +3669,8 @@
         </p:nvSpPr>
         <p:spPr>
           <a:xfrm>
-            <a:off x="752475" y="4402335"/>
-            <a:ext cx="2600325" cy="471487"/>
+            <a:off x="699959" y="4446984"/>
+            <a:ext cx="2161899" cy="417237"/>
           </a:xfrm>
           <a:prstGeom prst="rect">
             <a:avLst/>
@@ -3648,6 +3684,9 @@
           <a:lstStyle/>
           <a:p>
             <a:pPr algn="l">
+              <a:lnSpc>
+                <a:spcPct val="100000"/>
+              </a:lnSpc>
               <a:spcBef>
                 <a:spcPts val="0"/>
               </a:spcBef>
@@ -3656,11 +3695,11 @@
               </a:spcAft>
             </a:pPr>
             <a:r>
-              <a:rPr sz="1687" b="0">
+              <a:rPr sz="1368" b="0">
                 <a:solidFill>
                   <a:srgbClr val="F9FBFC"/>
                 </a:solidFill>
-                <a:latin typeface="DejaVu Sans"/>
+                <a:latin typeface="Arial"/>
               </a:rPr>
               <a:t>- 80% reduction</a:t>
             </a:r>
@@ -3675,8 +3714,8 @@
         </p:nvSpPr>
         <p:spPr>
           <a:xfrm>
-            <a:off x="4333875" y="1955601"/>
-            <a:ext cx="4248150" cy="510778"/>
+            <a:off x="4040271" y="1946671"/>
+            <a:ext cx="4022550" cy="630381"/>
           </a:xfrm>
           <a:prstGeom prst="rect">
             <a:avLst/>
@@ -3690,6 +3729,9 @@
           <a:lstStyle/>
           <a:p>
             <a:pPr algn="l">
+              <a:lnSpc>
+                <a:spcPct val="100000"/>
+              </a:lnSpc>
               <a:spcBef>
                 <a:spcPts val="0"/>
               </a:spcBef>
@@ -3698,11 +3740,11 @@
               </a:spcAft>
             </a:pPr>
             <a:r>
-              <a:rPr sz="1828" b="1">
+              <a:rPr sz="2068" b="1">
                 <a:solidFill>
                   <a:srgbClr val="EE6E1E"/>
                 </a:solidFill>
-                <a:latin typeface="DejaVu Sans"/>
+                <a:latin typeface="Arial"/>
               </a:rPr>
               <a:t>MANUAL vs AUTOMATED</a:t>
             </a:r>
@@ -3717,8 +3759,8 @@
         </p:nvSpPr>
         <p:spPr>
           <a:xfrm>
-            <a:off x="4124324" y="2419945"/>
-            <a:ext cx="2286000" cy="353615"/>
+            <a:off x="3845345" y="2411015"/>
+            <a:ext cx="2206200" cy="367145"/>
           </a:xfrm>
           <a:prstGeom prst="rect">
             <a:avLst/>
@@ -3732,6 +3774,9 @@
           <a:lstStyle/>
           <a:p>
             <a:pPr algn="l">
+              <a:lnSpc>
+                <a:spcPct val="100000"/>
+              </a:lnSpc>
               <a:spcBef>
                 <a:spcPts val="0"/>
               </a:spcBef>
@@ -3740,11 +3785,11 @@
               </a:spcAft>
             </a:pPr>
             <a:r>
-              <a:rPr sz="1265" b="1">
+              <a:rPr sz="1204" b="1">
                 <a:solidFill>
                   <a:srgbClr val="F9FBFC"/>
                 </a:solidFill>
-                <a:latin typeface="DejaVu Sans"/>
+                <a:latin typeface="Arial"/>
               </a:rPr>
               <a:t>MANUAL PROCESS</a:t>
             </a:r>
@@ -3759,8 +3804,8 @@
         </p:nvSpPr>
         <p:spPr>
           <a:xfrm>
-            <a:off x="6448425" y="2509242"/>
-            <a:ext cx="2609850" cy="353615"/>
+            <a:off x="5998384" y="2411015"/>
+            <a:ext cx="2516309" cy="361658"/>
           </a:xfrm>
           <a:prstGeom prst="rect">
             <a:avLst/>
@@ -3774,6 +3819,9 @@
           <a:lstStyle/>
           <a:p>
             <a:pPr algn="l">
+              <a:lnSpc>
+                <a:spcPct val="100000"/>
+              </a:lnSpc>
               <a:spcBef>
                 <a:spcPts val="0"/>
               </a:spcBef>
@@ -3782,11 +3830,11 @@
               </a:spcAft>
             </a:pPr>
             <a:r>
-              <a:rPr sz="1265" b="1">
+              <a:rPr sz="1186" b="1">
                 <a:solidFill>
                   <a:srgbClr val="F9FBFC"/>
                 </a:solidFill>
-                <a:latin typeface="DejaVu Sans"/>
+                <a:latin typeface="Arial"/>
               </a:rPr>
               <a:t>AUTOMATED PROCESS</a:t>
             </a:r>
@@ -3801,8 +3849,8 @@
         </p:nvSpPr>
         <p:spPr>
           <a:xfrm>
-            <a:off x="4086225" y="2759273"/>
-            <a:ext cx="2581275" cy="314325"/>
+            <a:off x="3801044" y="2759273"/>
+            <a:ext cx="2489728" cy="323426"/>
           </a:xfrm>
           <a:prstGeom prst="rect">
             <a:avLst/>
@@ -3816,6 +3864,9 @@
           <a:lstStyle/>
           <a:p>
             <a:pPr algn="l">
+              <a:lnSpc>
+                <a:spcPct val="100000"/>
+              </a:lnSpc>
               <a:spcBef>
                 <a:spcPts val="0"/>
               </a:spcBef>
@@ -3824,11 +3875,11 @@
               </a:spcAft>
             </a:pPr>
             <a:r>
-              <a:rPr sz="1125" b="0">
+              <a:rPr sz="1061" b="0">
                 <a:solidFill>
                   <a:srgbClr val="F9FBFC"/>
                 </a:solidFill>
-                <a:latin typeface="DejaVu Sans"/>
+                <a:latin typeface="Arial"/>
               </a:rPr>
               <a:t>10-15 minutes per defect</a:t>
             </a:r>
@@ -3843,8 +3894,8 @@
         </p:nvSpPr>
         <p:spPr>
           <a:xfrm>
-            <a:off x="4076699" y="3053953"/>
-            <a:ext cx="1714500" cy="314325"/>
+            <a:off x="3792184" y="3062882"/>
+            <a:ext cx="1674586" cy="339047"/>
           </a:xfrm>
           <a:prstGeom prst="rect">
             <a:avLst/>
@@ -3858,6 +3909,9 @@
           <a:lstStyle/>
           <a:p>
             <a:pPr algn="l">
+              <a:lnSpc>
+                <a:spcPct val="100000"/>
+              </a:lnSpc>
               <a:spcBef>
                 <a:spcPts val="0"/>
               </a:spcBef>
@@ -3866,11 +3920,11 @@
               </a:spcAft>
             </a:pPr>
             <a:r>
-              <a:rPr sz="1125" b="0">
+              <a:rPr sz="1112" b="0">
                 <a:solidFill>
                   <a:srgbClr val="F9FBFC"/>
                 </a:solidFill>
-                <a:latin typeface="DejaVu Sans"/>
+                <a:latin typeface="Arial"/>
               </a:rPr>
               <a:t>Source Code</a:t>
             </a:r>
@@ -3885,8 +3939,8 @@
         </p:nvSpPr>
         <p:spPr>
           <a:xfrm>
-            <a:off x="4086225" y="3250406"/>
-            <a:ext cx="2381250" cy="314325"/>
+            <a:off x="3801044" y="3250406"/>
+            <a:ext cx="2303663" cy="323850"/>
           </a:xfrm>
           <a:prstGeom prst="rect">
             <a:avLst/>
@@ -3900,6 +3954,9 @@
           <a:lstStyle/>
           <a:p>
             <a:pPr algn="l">
+              <a:lnSpc>
+                <a:spcPct val="100000"/>
+              </a:lnSpc>
               <a:spcBef>
                 <a:spcPts val="0"/>
               </a:spcBef>
@@ -3908,11 +3965,11 @@
               </a:spcAft>
             </a:pPr>
             <a:r>
-              <a:rPr sz="1125" b="0">
+              <a:rPr sz="1062" b="0">
                 <a:solidFill>
                   <a:srgbClr val="F9FBFC"/>
                 </a:solidFill>
-                <a:latin typeface="DejaVu Sans"/>
+                <a:latin typeface="Arial"/>
               </a:rPr>
               <a:t>Investigation Required</a:t>
             </a:r>
@@ -3927,8 +3984,8 @@
         </p:nvSpPr>
         <p:spPr>
           <a:xfrm>
-            <a:off x="4086225" y="3607593"/>
-            <a:ext cx="2628900" cy="314325"/>
+            <a:off x="3792184" y="3545085"/>
+            <a:ext cx="2587191" cy="328371"/>
           </a:xfrm>
           <a:prstGeom prst="rect">
             <a:avLst/>
@@ -3942,6 +3999,9 @@
           <a:lstStyle/>
           <a:p>
             <a:pPr algn="l">
+              <a:lnSpc>
+                <a:spcPct val="100000"/>
+              </a:lnSpc>
               <a:spcBef>
                 <a:spcPts val="0"/>
               </a:spcBef>
@@ -3950,11 +4010,11 @@
               </a:spcAft>
             </a:pPr>
             <a:r>
-              <a:rPr sz="1125" b="0">
+              <a:rPr sz="1077" b="0">
                 <a:solidFill>
                   <a:srgbClr val="F9FBFC"/>
                 </a:solidFill>
-                <a:latin typeface="DejaVu Sans"/>
+                <a:latin typeface="Arial"/>
               </a:rPr>
               <a:t>Context Analysis Required</a:t>
             </a:r>
@@ -3969,8 +4029,8 @@
         </p:nvSpPr>
         <p:spPr>
           <a:xfrm>
-            <a:off x="4076699" y="3857625"/>
-            <a:ext cx="1876424" cy="314325"/>
+            <a:off x="3792184" y="3830835"/>
+            <a:ext cx="1887231" cy="403122"/>
           </a:xfrm>
           <a:prstGeom prst="rect">
             <a:avLst/>
@@ -3984,6 +4044,9 @@
           <a:lstStyle/>
           <a:p>
             <a:pPr algn="l">
+              <a:lnSpc>
+                <a:spcPct val="100000"/>
+              </a:lnSpc>
               <a:spcBef>
                 <a:spcPts val="0"/>
               </a:spcBef>
@@ -3992,11 +4055,11 @@
               </a:spcAft>
             </a:pPr>
             <a:r>
-              <a:rPr sz="1125" b="0">
+              <a:rPr sz="1322" b="0">
                 <a:solidFill>
                   <a:srgbClr val="F9FBFC"/>
                 </a:solidFill>
-                <a:latin typeface="DejaVu Sans"/>
+                <a:latin typeface="Arial"/>
               </a:rPr>
               <a:t>Disposition &amp;</a:t>
             </a:r>
@@ -4011,8 +4074,8 @@
         </p:nvSpPr>
         <p:spPr>
           <a:xfrm>
-            <a:off x="4076699" y="4071937"/>
-            <a:ext cx="2571750" cy="314325"/>
+            <a:off x="3792184" y="4054078"/>
+            <a:ext cx="2480868" cy="328113"/>
           </a:xfrm>
           <a:prstGeom prst="rect">
             <a:avLst/>
@@ -4026,6 +4089,9 @@
           <a:lstStyle/>
           <a:p>
             <a:pPr algn="l">
+              <a:lnSpc>
+                <a:spcPct val="100000"/>
+              </a:lnSpc>
               <a:spcBef>
                 <a:spcPts val="0"/>
               </a:spcBef>
@@ -4034,11 +4100,11 @@
               </a:spcAft>
             </a:pPr>
             <a:r>
-              <a:rPr sz="1125" b="0">
+              <a:rPr sz="1076" b="0">
                 <a:solidFill>
                   <a:srgbClr val="F9FBFC"/>
                 </a:solidFill>
-                <a:latin typeface="DejaVu Sans"/>
+                <a:latin typeface="Arial"/>
               </a:rPr>
               <a:t>Documentation Required</a:t>
             </a:r>
@@ -4053,8 +4119,8 @@
         </p:nvSpPr>
         <p:spPr>
           <a:xfrm>
-            <a:off x="6505575" y="2857500"/>
-            <a:ext cx="2419349" cy="314325"/>
+            <a:off x="6051546" y="2768203"/>
+            <a:ext cx="2330244" cy="326504"/>
           </a:xfrm>
           <a:prstGeom prst="rect">
             <a:avLst/>
@@ -4068,6 +4134,9 @@
           <a:lstStyle/>
           <a:p>
             <a:pPr algn="l">
+              <a:lnSpc>
+                <a:spcPct val="100000"/>
+              </a:lnSpc>
               <a:spcBef>
                 <a:spcPts val="0"/>
               </a:spcBef>
@@ -4076,11 +4145,11 @@
               </a:spcAft>
             </a:pPr>
             <a:r>
-              <a:rPr sz="1125" b="0">
+              <a:rPr sz="1071" b="0">
                 <a:solidFill>
                   <a:srgbClr val="F9FBFC"/>
                 </a:solidFill>
-                <a:latin typeface="DejaVu Sans"/>
+                <a:latin typeface="Arial"/>
               </a:rPr>
               <a:t>1-2 minutes per defect</a:t>
             </a:r>
@@ -4095,8 +4164,8 @@
         </p:nvSpPr>
         <p:spPr>
           <a:xfrm>
-            <a:off x="6486525" y="3152179"/>
-            <a:ext cx="2228850" cy="314325"/>
+            <a:off x="6033825" y="3143250"/>
+            <a:ext cx="2161899" cy="329397"/>
           </a:xfrm>
           <a:prstGeom prst="rect">
             <a:avLst/>
@@ -4110,6 +4179,9 @@
           <a:lstStyle/>
           <a:p>
             <a:pPr algn="l">
+              <a:lnSpc>
+                <a:spcPct val="100000"/>
+              </a:lnSpc>
               <a:spcBef>
                 <a:spcPts val="0"/>
               </a:spcBef>
@@ -4118,11 +4190,11 @@
               </a:spcAft>
             </a:pPr>
             <a:r>
-              <a:rPr sz="1125" b="0">
+              <a:rPr sz="1080" b="0">
                 <a:solidFill>
                   <a:srgbClr val="F9FBFC"/>
                 </a:solidFill>
-                <a:latin typeface="DejaVu Sans"/>
+                <a:latin typeface="Arial"/>
               </a:rPr>
               <a:t>Automated Analysis</a:t>
             </a:r>
@@ -4137,8 +4209,8 @@
         </p:nvSpPr>
         <p:spPr>
           <a:xfrm>
-            <a:off x="6496049" y="3509367"/>
-            <a:ext cx="2276474" cy="314325"/>
+            <a:off x="6042686" y="3518296"/>
+            <a:ext cx="2206200" cy="336550"/>
           </a:xfrm>
           <a:prstGeom prst="rect">
             <a:avLst/>
@@ -4152,6 +4224,9 @@
           <a:lstStyle/>
           <a:p>
             <a:pPr algn="l">
+              <a:lnSpc>
+                <a:spcPct val="100000"/>
+              </a:lnSpc>
               <a:spcBef>
                 <a:spcPts val="0"/>
               </a:spcBef>
@@ -4160,11 +4235,11 @@
               </a:spcAft>
             </a:pPr>
             <a:r>
-              <a:rPr sz="1125" b="0">
+              <a:rPr sz="1104" b="0">
                 <a:solidFill>
                   <a:srgbClr val="F9FBFC"/>
                 </a:solidFill>
-                <a:latin typeface="DejaVu Sans"/>
+                <a:latin typeface="Arial"/>
               </a:rPr>
               <a:t>One Controlled Flow</a:t>
             </a:r>
@@ -4179,8 +4254,8 @@
         </p:nvSpPr>
         <p:spPr>
           <a:xfrm>
-            <a:off x="6496049" y="3884414"/>
-            <a:ext cx="1809749" cy="314325"/>
+            <a:off x="6042686" y="3884414"/>
+            <a:ext cx="1772048" cy="327102"/>
           </a:xfrm>
           <a:prstGeom prst="rect">
             <a:avLst/>
@@ -4194,6 +4269,9 @@
           <a:lstStyle/>
           <a:p>
             <a:pPr algn="l">
+              <a:lnSpc>
+                <a:spcPct val="100000"/>
+              </a:lnSpc>
               <a:spcBef>
                 <a:spcPts val="0"/>
               </a:spcBef>
@@ -4202,11 +4280,11 @@
               </a:spcAft>
             </a:pPr>
             <a:r>
-              <a:rPr sz="1125" b="0">
+              <a:rPr sz="1073" b="0">
                 <a:solidFill>
                   <a:srgbClr val="F9FBFC"/>
                 </a:solidFill>
-                <a:latin typeface="DejaVu Sans"/>
+                <a:latin typeface="Arial"/>
               </a:rPr>
               <a:t>Higher Quality</a:t>
             </a:r>
@@ -4221,8 +4299,8 @@
         </p:nvSpPr>
         <p:spPr>
           <a:xfrm>
-            <a:off x="3673078" y="4393406"/>
-            <a:ext cx="4693443" cy="589359"/>
+            <a:off x="3174182" y="4393406"/>
+            <a:ext cx="4850983" cy="701905"/>
           </a:xfrm>
           <a:prstGeom prst="rect">
             <a:avLst/>
@@ -4236,6 +4314,9 @@
           <a:lstStyle/>
           <a:p>
             <a:pPr algn="ctr">
+              <a:lnSpc>
+                <a:spcPct val="100000"/>
+              </a:lnSpc>
               <a:spcBef>
                 <a:spcPts val="0"/>
               </a:spcBef>
@@ -4244,11 +4325,11 @@
               </a:spcAft>
             </a:pPr>
             <a:r>
-              <a:rPr sz="2109" b="1">
+              <a:rPr sz="2302" b="1">
                 <a:solidFill>
                   <a:srgbClr val="F6962D"/>
                 </a:solidFill>
-                <a:latin typeface="DejaVu Sans"/>
+                <a:latin typeface="Arial"/>
               </a:rPr>
               <a:t>~90% Time Reduction</a:t>
             </a:r>
@@ -4263,8 +4344,8 @@
         </p:nvSpPr>
         <p:spPr>
           <a:xfrm>
-            <a:off x="11010900" y="1991320"/>
-            <a:ext cx="1943100" cy="314325"/>
+            <a:off x="10251301" y="1964531"/>
+            <a:ext cx="2215060" cy="310624"/>
           </a:xfrm>
           <a:prstGeom prst="rect">
             <a:avLst/>
@@ -4278,6 +4359,9 @@
           <a:lstStyle/>
           <a:p>
             <a:pPr algn="l">
+              <a:lnSpc>
+                <a:spcPct val="100000"/>
+              </a:lnSpc>
               <a:spcBef>
                 <a:spcPts val="0"/>
               </a:spcBef>
@@ -4286,11 +4370,11 @@
               </a:spcAft>
             </a:pPr>
             <a:r>
-              <a:rPr sz="1125" b="0">
+              <a:rPr sz="1019" b="0">
                 <a:solidFill>
                   <a:srgbClr val="F9FBFC"/>
                 </a:solidFill>
-                <a:latin typeface="DejaVu Sans"/>
+                <a:latin typeface="Arial"/>
               </a:rPr>
               <a:t>* AI used to DEVELOP,</a:t>
             </a:r>
@@ -4305,8 +4389,8 @@
         </p:nvSpPr>
         <p:spPr>
           <a:xfrm>
-            <a:off x="11010900" y="2143125"/>
-            <a:ext cx="1943100" cy="314325"/>
+            <a:off x="10251301" y="2134195"/>
+            <a:ext cx="2356824" cy="317424"/>
           </a:xfrm>
           <a:prstGeom prst="rect">
             <a:avLst/>
@@ -4320,6 +4404,9 @@
           <a:lstStyle/>
           <a:p>
             <a:pPr algn="l">
+              <a:lnSpc>
+                <a:spcPct val="100000"/>
+              </a:lnSpc>
               <a:spcBef>
                 <a:spcPts val="0"/>
               </a:spcBef>
@@ -4328,11 +4415,11 @@
               </a:spcAft>
             </a:pPr>
             <a:r>
-              <a:rPr sz="1125" b="0">
+              <a:rPr sz="1041" b="0">
                 <a:solidFill>
                   <a:srgbClr val="F9FBFC"/>
                 </a:solidFill>
-                <a:latin typeface="DejaVu Sans"/>
+                <a:latin typeface="Arial"/>
               </a:rPr>
               <a:t>analysis is RULE-BASED</a:t>
             </a:r>
@@ -4347,8 +4434,8 @@
         </p:nvSpPr>
         <p:spPr>
           <a:xfrm>
-            <a:off x="8029575" y="3429000"/>
-            <a:ext cx="2286000" cy="314325"/>
+            <a:off x="7380582" y="3429000"/>
+            <a:ext cx="2303663" cy="382419"/>
           </a:xfrm>
           <a:prstGeom prst="rect">
             <a:avLst/>
@@ -4362,6 +4449,9 @@
           <a:lstStyle/>
           <a:p>
             <a:pPr algn="ctr">
+              <a:lnSpc>
+                <a:spcPct val="100000"/>
+              </a:lnSpc>
               <a:spcBef>
                 <a:spcPts val="0"/>
               </a:spcBef>
@@ -4370,11 +4460,11 @@
               </a:spcAft>
             </a:pPr>
             <a:r>
-              <a:rPr sz="1125" b="1">
+              <a:rPr sz="1254" b="1">
                 <a:solidFill>
                   <a:srgbClr val="F9FBFC"/>
                 </a:solidFill>
-                <a:latin typeface="DejaVu Sans"/>
+                <a:latin typeface="Arial"/>
               </a:rPr>
               <a:t>HTML/Excel</a:t>
             </a:r>
@@ -4389,8 +4479,8 @@
         </p:nvSpPr>
         <p:spPr>
           <a:xfrm>
-            <a:off x="7991474" y="3714750"/>
-            <a:ext cx="2286000" cy="294679"/>
+            <a:off x="7376152" y="3625453"/>
+            <a:ext cx="2303663" cy="381712"/>
           </a:xfrm>
           <a:prstGeom prst="rect">
             <a:avLst/>
@@ -4404,6 +4494,9 @@
           <a:lstStyle/>
           <a:p>
             <a:pPr algn="ctr">
+              <a:lnSpc>
+                <a:spcPct val="100000"/>
+              </a:lnSpc>
               <a:spcBef>
                 <a:spcPts val="0"/>
               </a:spcBef>
@@ -4412,11 +4505,11 @@
               </a:spcAft>
             </a:pPr>
             <a:r>
-              <a:rPr sz="1054" b="1">
+              <a:rPr sz="1252" b="1">
                 <a:solidFill>
                   <a:srgbClr val="F9FBFC"/>
                 </a:solidFill>
-                <a:latin typeface="DejaVu Sans"/>
+                <a:latin typeface="Arial"/>
               </a:rPr>
               <a:t>Reports</a:t>
             </a:r>
@@ -4431,8 +4524,8 @@
         </p:nvSpPr>
         <p:spPr>
           <a:xfrm>
-            <a:off x="9391649" y="4446984"/>
-            <a:ext cx="2286000" cy="333970"/>
+            <a:off x="8731770" y="4429125"/>
+            <a:ext cx="2303663" cy="417443"/>
           </a:xfrm>
           <a:prstGeom prst="rect">
             <a:avLst/>
@@ -4446,6 +4539,9 @@
           <a:lstStyle/>
           <a:p>
             <a:pPr algn="ctr">
+              <a:lnSpc>
+                <a:spcPct val="100000"/>
+              </a:lnSpc>
               <a:spcBef>
                 <a:spcPts val="0"/>
               </a:spcBef>
@@ -4454,11 +4550,11 @@
               </a:spcAft>
             </a:pPr>
             <a:r>
-              <a:rPr sz="1195" b="1">
+              <a:rPr sz="1369" b="1">
                 <a:solidFill>
                   <a:srgbClr val="F9FBFC"/>
                 </a:solidFill>
-                <a:latin typeface="DejaVu Sans"/>
+                <a:latin typeface="Arial"/>
               </a:rPr>
               <a:t>Rules Engine</a:t>
             </a:r>
@@ -4473,8 +4569,8 @@
         </p:nvSpPr>
         <p:spPr>
           <a:xfrm>
-            <a:off x="9401175" y="4723804"/>
-            <a:ext cx="2286000" cy="294679"/>
+            <a:off x="8700759" y="4670226"/>
+            <a:ext cx="2303663" cy="382621"/>
           </a:xfrm>
           <a:prstGeom prst="rect">
             <a:avLst/>
@@ -4488,6 +4584,9 @@
           <a:lstStyle/>
           <a:p>
             <a:pPr algn="ctr">
+              <a:lnSpc>
+                <a:spcPct val="100000"/>
+              </a:lnSpc>
               <a:spcBef>
                 <a:spcPts val="0"/>
               </a:spcBef>
@@ -4496,11 +4595,11 @@
               </a:spcAft>
             </a:pPr>
             <a:r>
-              <a:rPr sz="1054" b="1">
+              <a:rPr sz="1255" b="1">
                 <a:solidFill>
                   <a:srgbClr val="F9FBFC"/>
                 </a:solidFill>
-                <a:latin typeface="DejaVu Sans"/>
+                <a:latin typeface="Arial"/>
               </a:rPr>
               <a:t>AI Developed</a:t>
             </a:r>
@@ -4515,8 +4614,8 @@
         </p:nvSpPr>
         <p:spPr>
           <a:xfrm>
-            <a:off x="9482137" y="4947046"/>
-            <a:ext cx="2286000" cy="294679"/>
+            <a:off x="8736200" y="4857750"/>
+            <a:ext cx="2303663" cy="324970"/>
           </a:xfrm>
           <a:prstGeom prst="rect">
             <a:avLst/>
@@ -4530,6 +4629,9 @@
           <a:lstStyle/>
           <a:p>
             <a:pPr algn="ctr">
+              <a:lnSpc>
+                <a:spcPct val="100000"/>
+              </a:lnSpc>
               <a:spcBef>
                 <a:spcPts val="0"/>
               </a:spcBef>
@@ -4538,11 +4640,11 @@
               </a:spcAft>
             </a:pPr>
             <a:r>
-              <a:rPr sz="1054" b="0">
+              <a:rPr sz="1066" b="0">
                 <a:solidFill>
                   <a:srgbClr val="F9FBFC"/>
                 </a:solidFill>
-                <a:latin typeface="DejaVu Sans"/>
+                <a:latin typeface="Arial"/>
               </a:rPr>
               <a:t>20+ Checker Rules</a:t>
             </a:r>
@@ -4557,8 +4659,8 @@
         </p:nvSpPr>
         <p:spPr>
           <a:xfrm>
-            <a:off x="11087100" y="5313164"/>
-            <a:ext cx="1838324" cy="392906"/>
+            <a:off x="11057584" y="5482828"/>
+            <a:ext cx="1293595" cy="406400"/>
           </a:xfrm>
           <a:prstGeom prst="rect">
             <a:avLst/>
@@ -4572,6 +4674,9 @@
           <a:lstStyle/>
           <a:p>
             <a:pPr algn="l">
+              <a:lnSpc>
+                <a:spcPct val="100000"/>
+              </a:lnSpc>
               <a:spcBef>
                 <a:spcPts val="0"/>
               </a:spcBef>
@@ -4580,11 +4685,11 @@
               </a:spcAft>
             </a:pPr>
             <a:r>
-              <a:rPr sz="1406" b="1">
+              <a:rPr sz="1333" b="1">
                 <a:solidFill>
                   <a:srgbClr val="F9FBFC"/>
                 </a:solidFill>
-                <a:latin typeface="DejaVu Sans"/>
+                <a:latin typeface="Arial"/>
               </a:rPr>
               <a:t>Smart</a:t>
             </a:r>
@@ -4599,8 +4704,8 @@
         </p:nvSpPr>
         <p:spPr>
           <a:xfrm>
-            <a:off x="11220449" y="5643562"/>
-            <a:ext cx="1733550" cy="392906"/>
+            <a:off x="10774056" y="5715000"/>
+            <a:ext cx="1860651" cy="430305"/>
           </a:xfrm>
           <a:prstGeom prst="rect">
             <a:avLst/>
@@ -4614,6 +4719,9 @@
           <a:lstStyle/>
           <a:p>
             <a:pPr algn="l">
+              <a:lnSpc>
+                <a:spcPct val="100000"/>
+              </a:lnSpc>
               <a:spcBef>
                 <a:spcPts val="0"/>
               </a:spcBef>
@@ -4622,11 +4730,11 @@
               </a:spcAft>
             </a:pPr>
             <a:r>
-              <a:rPr sz="1406" b="1">
+              <a:rPr sz="1411" b="1">
                 <a:solidFill>
                   <a:srgbClr val="F9FBFC"/>
                 </a:solidFill>
-                <a:latin typeface="DejaVu Sans"/>
+                <a:latin typeface="Arial"/>
               </a:rPr>
               <a:t>Dispositions</a:t>
             </a:r>
@@ -4641,8 +4749,8 @@
         </p:nvSpPr>
         <p:spPr>
           <a:xfrm>
-            <a:off x="9477374" y="5572125"/>
-            <a:ext cx="2476499" cy="353615"/>
+            <a:off x="8824802" y="5598914"/>
+            <a:ext cx="2374545" cy="371605"/>
           </a:xfrm>
           <a:prstGeom prst="rect">
             <a:avLst/>
@@ -4656,6 +4764,9 @@
           <a:lstStyle/>
           <a:p>
             <a:pPr algn="l">
+              <a:lnSpc>
+                <a:spcPct val="100000"/>
+              </a:lnSpc>
               <a:spcBef>
                 <a:spcPts val="0"/>
               </a:spcBef>
@@ -4664,11 +4775,11 @@
               </a:spcAft>
             </a:pPr>
             <a:r>
-              <a:rPr sz="1265" b="0">
+              <a:rPr sz="1219" b="0">
                 <a:solidFill>
                   <a:srgbClr val="F9FBFC"/>
                 </a:solidFill>
-                <a:latin typeface="DejaVu Sans"/>
+                <a:latin typeface="Arial"/>
               </a:rPr>
               <a:t>AI used to DEVELOP,</a:t>
             </a:r>
@@ -4683,8 +4794,8 @@
         </p:nvSpPr>
         <p:spPr>
           <a:xfrm>
-            <a:off x="9458325" y="5786437"/>
-            <a:ext cx="2543175" cy="314325"/>
+            <a:off x="8824802" y="5777507"/>
+            <a:ext cx="2383405" cy="322835"/>
           </a:xfrm>
           <a:prstGeom prst="rect">
             <a:avLst/>
@@ -4698,6 +4809,9 @@
           <a:lstStyle/>
           <a:p>
             <a:pPr algn="l">
+              <a:lnSpc>
+                <a:spcPct val="100000"/>
+              </a:lnSpc>
               <a:spcBef>
                 <a:spcPts val="0"/>
               </a:spcBef>
@@ -4706,11 +4820,11 @@
               </a:spcAft>
             </a:pPr>
             <a:r>
-              <a:rPr sz="1125" b="0">
+              <a:rPr sz="1059" b="0">
                 <a:solidFill>
                   <a:srgbClr val="F9FBFC"/>
                 </a:solidFill>
-                <a:latin typeface="DejaVu Sans"/>
+                <a:latin typeface="Arial"/>
               </a:rPr>
               <a:t>analysis is RULE-BASED</a:t>
             </a:r>
@@ -4725,8 +4839,8 @@
         </p:nvSpPr>
         <p:spPr>
           <a:xfrm>
-            <a:off x="885825" y="5054203"/>
-            <a:ext cx="5114925" cy="530423"/>
+            <a:off x="832862" y="5054203"/>
+            <a:ext cx="4837693" cy="637563"/>
           </a:xfrm>
           <a:prstGeom prst="rect">
             <a:avLst/>
@@ -4740,6 +4854,9 @@
           <a:lstStyle/>
           <a:p>
             <a:pPr algn="l">
+              <a:lnSpc>
+                <a:spcPct val="100000"/>
+              </a:lnSpc>
               <a:spcBef>
                 <a:spcPts val="0"/>
               </a:spcBef>
@@ -4748,11 +4865,11 @@
               </a:spcAft>
             </a:pPr>
             <a:r>
-              <a:rPr sz="1898" b="1">
+              <a:rPr sz="2091" b="1">
                 <a:solidFill>
                   <a:srgbClr val="EE6E1E"/>
                 </a:solidFill>
-                <a:latin typeface="DejaVu Sans"/>
+                <a:latin typeface="Arial"/>
               </a:rPr>
               <a:t>COST SAVINGS PER PROGRAM</a:t>
             </a:r>
@@ -4767,8 +4884,8 @@
         </p:nvSpPr>
         <p:spPr>
           <a:xfrm>
-            <a:off x="790574" y="5464968"/>
-            <a:ext cx="6991350" cy="451842"/>
+            <a:off x="735400" y="5464968"/>
+            <a:ext cx="6592021" cy="500223"/>
           </a:xfrm>
           <a:prstGeom prst="rect">
             <a:avLst/>
@@ -4782,6 +4899,9 @@
           <a:lstStyle/>
           <a:p>
             <a:pPr algn="l">
+              <a:lnSpc>
+                <a:spcPct val="100000"/>
+              </a:lnSpc>
               <a:spcBef>
                 <a:spcPts val="0"/>
               </a:spcBef>
@@ -4790,20 +4910,20 @@
               </a:spcAft>
             </a:pPr>
             <a:r>
-              <a:rPr sz="1617" b="0">
+              <a:rPr sz="1641" b="0">
                 <a:solidFill>
                   <a:srgbClr val="F9FBFC"/>
                 </a:solidFill>
-                <a:latin typeface="DejaVu Sans"/>
+                <a:latin typeface="Arial"/>
               </a:rPr>
               <a:t>RL1 (1,000 defects): 250 hrs → 33 hrs = </a:t>
             </a:r>
             <a:r>
-              <a:rPr sz="1617" b="1">
+              <a:rPr sz="1641" b="1">
                 <a:solidFill>
                   <a:srgbClr val="F6962D"/>
                 </a:solidFill>
-                <a:latin typeface="DejaVu Sans"/>
+                <a:latin typeface="Arial"/>
               </a:rPr>
               <a:t>217 hrs SAVED</a:t>
             </a:r>
@@ -4818,8 +4938,8 @@
         </p:nvSpPr>
         <p:spPr>
           <a:xfrm>
-            <a:off x="790574" y="5786437"/>
-            <a:ext cx="7781924" cy="451842"/>
+            <a:off x="735400" y="5768578"/>
+            <a:ext cx="7318561" cy="498517"/>
           </a:xfrm>
           <a:prstGeom prst="rect">
             <a:avLst/>
@@ -4833,6 +4953,9 @@
           <a:lstStyle/>
           <a:p>
             <a:pPr algn="l">
+              <a:lnSpc>
+                <a:spcPct val="100000"/>
+              </a:lnSpc>
               <a:spcBef>
                 <a:spcPts val="0"/>
               </a:spcBef>
@@ -4841,20 +4964,20 @@
               </a:spcAft>
             </a:pPr>
             <a:r>
-              <a:rPr sz="1617" b="0">
+              <a:rPr sz="1635" b="0">
                 <a:solidFill>
                   <a:srgbClr val="F9FBFC"/>
                 </a:solidFill>
-                <a:latin typeface="DejaVu Sans"/>
+                <a:latin typeface="Arial"/>
               </a:rPr>
               <a:t>Program (4,000 defects): 1000 hrs → 133 hrs = </a:t>
             </a:r>
             <a:r>
-              <a:rPr sz="1617" b="1">
+              <a:rPr sz="1635" b="1">
                 <a:solidFill>
                   <a:srgbClr val="F6962D"/>
                 </a:solidFill>
-                <a:latin typeface="DejaVu Sans"/>
+                <a:latin typeface="Arial"/>
               </a:rPr>
               <a:t>867 hrs SAVED</a:t>
             </a:r>
@@ -4869,8 +4992,8 @@
         </p:nvSpPr>
         <p:spPr>
           <a:xfrm>
-            <a:off x="790574" y="6098976"/>
-            <a:ext cx="5781674" cy="451842"/>
+            <a:off x="735400" y="6098976"/>
+            <a:ext cx="5484490" cy="488603"/>
           </a:xfrm>
           <a:prstGeom prst="rect">
             <a:avLst/>
@@ -4884,6 +5007,9 @@
           <a:lstStyle/>
           <a:p>
             <a:pPr algn="l">
+              <a:lnSpc>
+                <a:spcPct val="100000"/>
+              </a:lnSpc>
               <a:spcBef>
                 <a:spcPts val="0"/>
               </a:spcBef>
@@ -4892,11 +5018,11 @@
               </a:spcAft>
             </a:pPr>
             <a:r>
-              <a:rPr sz="1617" b="0">
+              <a:rPr sz="1603" b="0">
                 <a:solidFill>
                   <a:srgbClr val="F9FBFC"/>
                 </a:solidFill>
-                <a:latin typeface="DejaVu Sans"/>
+                <a:latin typeface="Arial"/>
               </a:rPr>
               <a:t>Cost: $7,595 - $30,345 per release (at $30/hr)</a:t>
             </a:r>
@@ -4911,8 +5037,8 @@
         </p:nvSpPr>
         <p:spPr>
           <a:xfrm>
-            <a:off x="1760458" y="6607968"/>
-            <a:ext cx="9528333" cy="294679"/>
+            <a:off x="1173982" y="6607968"/>
+            <a:ext cx="9834870" cy="338921"/>
           </a:xfrm>
           <a:prstGeom prst="rect">
             <a:avLst/>
@@ -4926,6 +5052,9 @@
           <a:lstStyle/>
           <a:p>
             <a:pPr algn="ctr">
+              <a:lnSpc>
+                <a:spcPct val="100000"/>
+              </a:lnSpc>
               <a:spcBef>
                 <a:spcPts val="0"/>
               </a:spcBef>
@@ -4934,11 +5063,11 @@
               </a:spcAft>
             </a:pPr>
             <a:r>
-              <a:rPr sz="1054" b="0">
+              <a:rPr sz="1111" b="0">
                 <a:solidFill>
                   <a:srgbClr val="F9FBFC"/>
                 </a:solidFill>
-                <a:latin typeface="DejaVu Sans"/>
+                <a:latin typeface="Arial"/>
               </a:rPr>
               <a:t>Rakesh Boya | Tool Owner &amp; Developer | Honeywell Aerospace | CNS AI Day 2026 | Confidential</a:t>
             </a:r>

--- a/Coverity_Final_Slide_Updated.pptx
+++ b/Coverity_Final_Slide_Updated.pptx
@@ -7,7 +7,7 @@
   <p:sldIdLst>
     <p:sldId id="256" r:id="rId7"/>
   </p:sldIdLst>
-  <p:sldSz cx="12191695" cy="6858000" type="screen4x3"/>
+  <p:sldSz cx="12192000" cy="6858000" type="screen4x3"/>
   <p:notesSz cx="6858000" cy="9144000"/>
   <p:defaultTextStyle>
     <a:defPPr>
@@ -3105,7 +3105,7 @@
         <p:spPr>
           <a:xfrm>
             <a:off x="0" y="0"/>
-            <a:ext cx="12191695" cy="6858000"/>
+            <a:ext cx="12192000" cy="6858000"/>
           </a:xfrm>
           <a:prstGeom prst="rect">
             <a:avLst/>
@@ -3120,8 +3120,8 @@
         </p:nvSpPr>
         <p:spPr>
           <a:xfrm>
-            <a:off x="372130" y="160734"/>
-            <a:ext cx="3659280" cy="649837"/>
+            <a:off x="372139" y="107156"/>
+            <a:ext cx="3384697" cy="583620"/>
           </a:xfrm>
           <a:prstGeom prst="rect">
             <a:avLst/>
@@ -3130,36 +3130,40 @@
         </p:spPr>
         <p:txBody>
           <a:bodyPr wrap="none" anchor="t" lIns="0" rIns="0" tIns="0" bIns="0">
-            <a:spAutoFit/>
+            <a:noAutofit/>
           </a:bodyPr>
           <a:lstStyle/>
           <a:p>
-            <a:pPr algn="l">
-              <a:lnSpc>
-                <a:spcPct val="100000"/>
-              </a:lnSpc>
-              <a:spcBef>
-                <a:spcPts val="0"/>
-              </a:spcBef>
-              <a:spcAft>
-                <a:spcPts val="0"/>
-              </a:spcAft>
-            </a:pPr>
-            <a:r>
-              <a:rPr sz="2132" b="1">
+            <a:pPr algn="l"/>
+            <a:r>
+              <a:rPr sz="2456" b="1">
                 <a:solidFill>
                   <a:srgbClr val="F9FBFC"/>
                 </a:solidFill>
-                <a:latin typeface="Arial"/>
+                <a:latin typeface="Segoe UI"/>
+                <a:effectLst>
+                  <a:outerShdw blurRad="50800" dist="25400" dir="5400000" algn="bl" rotWithShape="0">
+                    <a:srgbClr val="000000">
+                      <a:alpha val="55000"/>
+                    </a:srgbClr>
+                  </a:outerShdw>
+                </a:effectLst>
               </a:rPr>
               <a:t>Honeywell </a:t>
             </a:r>
             <a:r>
-              <a:rPr sz="2132" b="0">
+              <a:rPr sz="2456" b="0">
                 <a:solidFill>
                   <a:srgbClr val="F9FBFC"/>
                 </a:solidFill>
-                <a:latin typeface="Arial"/>
+                <a:latin typeface="Segoe UI"/>
+                <a:effectLst>
+                  <a:outerShdw blurRad="50800" dist="25400" dir="5400000" algn="bl" rotWithShape="0">
+                    <a:srgbClr val="000000">
+                      <a:alpha val="55000"/>
+                    </a:srgbClr>
+                  </a:outerShdw>
+                </a:effectLst>
               </a:rPr>
               <a:t>Aerospace</a:t>
             </a:r>
@@ -3174,8 +3178,8 @@
         </p:nvSpPr>
         <p:spPr>
           <a:xfrm>
-            <a:off x="9976634" y="178593"/>
-            <a:ext cx="2631492" cy="519288"/>
+            <a:off x="9976883" y="133945"/>
+            <a:ext cx="2356883" cy="462718"/>
           </a:xfrm>
           <a:prstGeom prst="rect">
             <a:avLst/>
@@ -3184,27 +3188,24 @@
         </p:spPr>
         <p:txBody>
           <a:bodyPr wrap="none" anchor="t" lIns="0" rIns="0" tIns="0" bIns="0">
-            <a:spAutoFit/>
+            <a:noAutofit/>
           </a:bodyPr>
           <a:lstStyle/>
           <a:p>
-            <a:pPr algn="l">
-              <a:lnSpc>
-                <a:spcPct val="100000"/>
-              </a:lnSpc>
-              <a:spcBef>
-                <a:spcPts val="0"/>
-              </a:spcBef>
-              <a:spcAft>
-                <a:spcPts val="0"/>
-              </a:spcAft>
-            </a:pPr>
-            <a:r>
-              <a:rPr sz="1703" b="1">
+            <a:pPr algn="l"/>
+            <a:r>
+              <a:rPr sz="1947" b="1">
                 <a:solidFill>
                   <a:srgbClr val="EE6E1E"/>
                 </a:solidFill>
-                <a:latin typeface="Arial"/>
+                <a:latin typeface="Segoe UI"/>
+                <a:effectLst>
+                  <a:outerShdw blurRad="50800" dist="25400" dir="5400000" algn="bl" rotWithShape="0">
+                    <a:srgbClr val="000000">
+                      <a:alpha val="55000"/>
+                    </a:srgbClr>
+                  </a:outerShdw>
+                </a:effectLst>
               </a:rPr>
               <a:t>CNS AI Day 2026</a:t>
             </a:r>
@@ -3219,8 +3220,8 @@
         </p:nvSpPr>
         <p:spPr>
           <a:xfrm>
-            <a:off x="547120" y="696515"/>
-            <a:ext cx="11841715" cy="1196373"/>
+            <a:off x="125984" y="607218"/>
+            <a:ext cx="12701476" cy="1045708"/>
           </a:xfrm>
           <a:prstGeom prst="rect">
             <a:avLst/>
@@ -3229,27 +3230,29 @@
         </p:spPr>
         <p:txBody>
           <a:bodyPr wrap="none" anchor="t" lIns="0" rIns="0" tIns="0" bIns="0">
-            <a:spAutoFit/>
+            <a:noAutofit/>
           </a:bodyPr>
           <a:lstStyle/>
           <a:p>
-            <a:pPr algn="ctr">
-              <a:lnSpc>
-                <a:spcPct val="100000"/>
-              </a:lnSpc>
-              <a:spcBef>
-                <a:spcPts val="0"/>
-              </a:spcBef>
-              <a:spcAft>
-                <a:spcPts val="0"/>
-              </a:spcAft>
-            </a:pPr>
-            <a:r>
-              <a:rPr sz="3925" b="1">
+            <a:pPr algn="ctr"/>
+            <a:r>
+              <a:rPr sz="4402" b="1">
                 <a:solidFill>
                   <a:srgbClr val="F9FBFC"/>
                 </a:solidFill>
-                <a:latin typeface="Arial"/>
+                <a:latin typeface="Segoe UI"/>
+                <a:effectLst>
+                  <a:glow rad="101600">
+                    <a:srgbClr val="EE7622">
+                      <a:alpha val="60000"/>
+                    </a:srgbClr>
+                  </a:glow>
+                  <a:outerShdw blurRad="50800" dist="25400" dir="5400000" algn="bl" rotWithShape="0">
+                    <a:srgbClr val="000000">
+                      <a:alpha val="55000"/>
+                    </a:srgbClr>
+                  </a:outerShdw>
+                </a:effectLst>
               </a:rPr>
               <a:t>COVERITY FINDINGS ANALYZER</a:t>
             </a:r>
@@ -3264,8 +3267,8 @@
         </p:nvSpPr>
         <p:spPr>
           <a:xfrm>
-            <a:off x="843938" y="1312664"/>
-            <a:ext cx="10486098" cy="605761"/>
+            <a:off x="505974" y="1276945"/>
+            <a:ext cx="11171052" cy="576328"/>
           </a:xfrm>
           <a:prstGeom prst="rect">
             <a:avLst/>
@@ -3274,27 +3277,24 @@
         </p:spPr>
         <p:txBody>
           <a:bodyPr wrap="none" anchor="t" lIns="0" rIns="0" tIns="0" bIns="0">
-            <a:spAutoFit/>
+            <a:noAutofit/>
           </a:bodyPr>
           <a:lstStyle/>
           <a:p>
-            <a:pPr algn="ctr">
-              <a:lnSpc>
-                <a:spcPct val="100000"/>
-              </a:lnSpc>
-              <a:spcBef>
-                <a:spcPts val="0"/>
-              </a:spcBef>
-              <a:spcAft>
-                <a:spcPts val="0"/>
-              </a:spcAft>
-            </a:pPr>
-            <a:r>
-              <a:rPr sz="1987" b="0">
+            <a:pPr algn="ctr"/>
+            <a:r>
+              <a:rPr sz="2426" b="0">
                 <a:solidFill>
                   <a:srgbClr val="F9FBFC"/>
                 </a:solidFill>
-                <a:latin typeface="Arial"/>
+                <a:latin typeface="Segoe UI"/>
+                <a:effectLst>
+                  <a:outerShdw blurRad="50800" dist="25400" dir="5400000" algn="bl" rotWithShape="0">
+                    <a:srgbClr val="000000">
+                      <a:alpha val="55000"/>
+                    </a:srgbClr>
+                  </a:outerShdw>
+                </a:effectLst>
               </a:rPr>
               <a:t>AI-Developed, Rule-Based Static Analysis for Aerospace</a:t>
             </a:r>
@@ -3309,8 +3309,8 @@
         </p:nvSpPr>
         <p:spPr>
           <a:xfrm>
-            <a:off x="779701" y="1946671"/>
-            <a:ext cx="2994762" cy="629920"/>
+            <a:off x="779720" y="1893093"/>
+            <a:ext cx="2711025" cy="578313"/>
           </a:xfrm>
           <a:prstGeom prst="rect">
             <a:avLst/>
@@ -3319,27 +3319,24 @@
         </p:spPr>
         <p:txBody>
           <a:bodyPr wrap="none" anchor="t" lIns="0" rIns="0" tIns="0" bIns="0">
-            <a:spAutoFit/>
+            <a:noAutofit/>
           </a:bodyPr>
           <a:lstStyle/>
           <a:p>
-            <a:pPr algn="l">
-              <a:lnSpc>
-                <a:spcPct val="100000"/>
-              </a:lnSpc>
-              <a:spcBef>
-                <a:spcPts val="0"/>
-              </a:spcBef>
-              <a:spcAft>
-                <a:spcPts val="0"/>
-              </a:spcAft>
-            </a:pPr>
-            <a:r>
-              <a:rPr sz="2066" b="1">
+            <a:pPr algn="l"/>
+            <a:r>
+              <a:rPr sz="2434" b="1">
                 <a:solidFill>
                   <a:srgbClr val="EE6E1E"/>
                 </a:solidFill>
-                <a:latin typeface="Arial"/>
+                <a:latin typeface="Segoe UI"/>
+                <a:effectLst>
+                  <a:outerShdw blurRad="50800" dist="25400" dir="5400000" algn="bl" rotWithShape="0">
+                    <a:srgbClr val="000000">
+                      <a:alpha val="55000"/>
+                    </a:srgbClr>
+                  </a:outerShdw>
+                </a:effectLst>
               </a:rPr>
               <a:t>CORE FEATURES</a:t>
             </a:r>
@@ -3354,8 +3351,8 @@
         </p:nvSpPr>
         <p:spPr>
           <a:xfrm>
-            <a:off x="691099" y="2366367"/>
-            <a:ext cx="3065644" cy="478704"/>
+            <a:off x="691116" y="2339578"/>
+            <a:ext cx="2835348" cy="428247"/>
           </a:xfrm>
           <a:prstGeom prst="rect">
             <a:avLst/>
@@ -3364,27 +3361,24 @@
         </p:spPr>
         <p:txBody>
           <a:bodyPr wrap="none" anchor="t" lIns="0" rIns="0" tIns="0" bIns="0">
-            <a:spAutoFit/>
+            <a:noAutofit/>
           </a:bodyPr>
           <a:lstStyle/>
           <a:p>
-            <a:pPr algn="l">
-              <a:lnSpc>
-                <a:spcPct val="100000"/>
-              </a:lnSpc>
-              <a:spcBef>
-                <a:spcPts val="0"/>
-              </a:spcBef>
-              <a:spcAft>
-                <a:spcPts val="0"/>
-              </a:spcAft>
-            </a:pPr>
-            <a:r>
-              <a:rPr sz="1570" b="1">
+            <a:pPr algn="l"/>
+            <a:r>
+              <a:rPr sz="1802" b="1">
                 <a:solidFill>
                   <a:srgbClr val="F9FBFC"/>
                 </a:solidFill>
-                <a:latin typeface="Arial"/>
+                <a:latin typeface="Segoe UI"/>
+                <a:effectLst>
+                  <a:outerShdw blurRad="50800" dist="25400" dir="5400000" algn="bl" rotWithShape="0">
+                    <a:srgbClr val="000000">
+                      <a:alpha val="55000"/>
+                    </a:srgbClr>
+                  </a:outerShdw>
+                </a:effectLst>
               </a:rPr>
               <a:t>Aerospace Compliance</a:t>
             </a:r>
@@ -3399,8 +3393,8 @@
         </p:nvSpPr>
         <p:spPr>
           <a:xfrm>
-            <a:off x="699959" y="2687835"/>
-            <a:ext cx="3047923" cy="442395"/>
+            <a:off x="699976" y="2518171"/>
+            <a:ext cx="2737883" cy="413638"/>
           </a:xfrm>
           <a:prstGeom prst="rect">
             <a:avLst/>
@@ -3409,27 +3403,24 @@
         </p:spPr>
         <p:txBody>
           <a:bodyPr wrap="none" anchor="t" lIns="0" rIns="0" tIns="0" bIns="0">
-            <a:spAutoFit/>
+            <a:noAutofit/>
           </a:bodyPr>
           <a:lstStyle/>
           <a:p>
-            <a:pPr algn="l">
-              <a:lnSpc>
-                <a:spcPct val="100000"/>
-              </a:lnSpc>
-              <a:spcBef>
-                <a:spcPts val="0"/>
-              </a:spcBef>
-              <a:spcAft>
-                <a:spcPts val="0"/>
-              </a:spcAft>
-            </a:pPr>
-            <a:r>
-              <a:rPr sz="1451" b="0">
+            <a:pPr algn="l"/>
+            <a:r>
+              <a:rPr sz="1741" b="0">
                 <a:solidFill>
                   <a:srgbClr val="F9FBFC"/>
                 </a:solidFill>
-                <a:latin typeface="Arial"/>
+                <a:latin typeface="Segoe UI"/>
+                <a:effectLst>
+                  <a:outerShdw blurRad="50800" dist="25400" dir="5400000" algn="bl" rotWithShape="0">
+                    <a:srgbClr val="000000">
+                      <a:alpha val="55000"/>
+                    </a:srgbClr>
+                  </a:outerShdw>
+                </a:effectLst>
               </a:rPr>
               <a:t>- DO-178C, MISRA, CERT</a:t>
             </a:r>
@@ -3444,8 +3435,8 @@
         </p:nvSpPr>
         <p:spPr>
           <a:xfrm>
-            <a:off x="708819" y="2991445"/>
-            <a:ext cx="2950461" cy="458615"/>
+            <a:off x="708837" y="2946796"/>
+            <a:ext cx="2684720" cy="406119"/>
           </a:xfrm>
           <a:prstGeom prst="rect">
             <a:avLst/>
@@ -3454,27 +3445,24 @@
         </p:spPr>
         <p:txBody>
           <a:bodyPr wrap="none" anchor="t" lIns="0" rIns="0" tIns="0" bIns="0">
-            <a:spAutoFit/>
+            <a:noAutofit/>
           </a:bodyPr>
           <a:lstStyle/>
           <a:p>
-            <a:pPr algn="l">
-              <a:lnSpc>
-                <a:spcPct val="100000"/>
-              </a:lnSpc>
-              <a:spcBef>
-                <a:spcPts val="0"/>
-              </a:spcBef>
-              <a:spcAft>
-                <a:spcPts val="0"/>
-              </a:spcAft>
-            </a:pPr>
-            <a:r>
-              <a:rPr sz="1504" b="1">
+            <a:pPr algn="l"/>
+            <a:r>
+              <a:rPr sz="1709" b="1">
                 <a:solidFill>
                   <a:srgbClr val="F9FBFC"/>
                 </a:solidFill>
-                <a:latin typeface="Arial"/>
+                <a:latin typeface="Segoe UI"/>
+                <a:effectLst>
+                  <a:outerShdw blurRad="50800" dist="25400" dir="5400000" algn="bl" rotWithShape="0">
+                    <a:srgbClr val="000000">
+                      <a:alpha val="55000"/>
+                    </a:srgbClr>
+                  </a:outerShdw>
+                </a:effectLst>
               </a:rPr>
               <a:t>100% Secure &amp; Offline</a:t>
             </a:r>
@@ -3489,8 +3477,8 @@
         </p:nvSpPr>
         <p:spPr>
           <a:xfrm>
-            <a:off x="699959" y="3232546"/>
-            <a:ext cx="3420054" cy="412909"/>
+            <a:off x="699976" y="3214687"/>
+            <a:ext cx="3154325" cy="394720"/>
           </a:xfrm>
           <a:prstGeom prst="rect">
             <a:avLst/>
@@ -3499,27 +3487,24 @@
         </p:spPr>
         <p:txBody>
           <a:bodyPr wrap="none" anchor="t" lIns="0" rIns="0" tIns="0" bIns="0">
-            <a:spAutoFit/>
+            <a:noAutofit/>
           </a:bodyPr>
           <a:lstStyle/>
           <a:p>
-            <a:pPr algn="l">
-              <a:lnSpc>
-                <a:spcPct val="100000"/>
-              </a:lnSpc>
-              <a:spcBef>
-                <a:spcPts val="0"/>
-              </a:spcBef>
-              <a:spcAft>
-                <a:spcPts val="0"/>
-              </a:spcAft>
-            </a:pPr>
-            <a:r>
-              <a:rPr sz="1354" b="0">
+            <a:pPr algn="l"/>
+            <a:r>
+              <a:rPr sz="1661" b="0">
                 <a:solidFill>
                   <a:srgbClr val="F9FBFC"/>
                 </a:solidFill>
-                <a:latin typeface="Arial"/>
+                <a:latin typeface="Segoe UI"/>
+                <a:effectLst>
+                  <a:outerShdw blurRad="50800" dist="25400" dir="5400000" algn="bl" rotWithShape="0">
+                    <a:srgbClr val="000000">
+                      <a:alpha val="55000"/>
+                    </a:srgbClr>
+                  </a:outerShdw>
+                </a:effectLst>
               </a:rPr>
               <a:t>- Source never leaves machine</a:t>
             </a:r>
@@ -3534,8 +3519,8 @@
         </p:nvSpPr>
         <p:spPr>
           <a:xfrm>
-            <a:off x="708819" y="3580804"/>
-            <a:ext cx="3003622" cy="474345"/>
+            <a:off x="708837" y="3545085"/>
+            <a:ext cx="2710886" cy="408107"/>
           </a:xfrm>
           <a:prstGeom prst="rect">
             <a:avLst/>
@@ -3544,27 +3529,24 @@
         </p:spPr>
         <p:txBody>
           <a:bodyPr wrap="none" anchor="t" lIns="0" rIns="0" tIns="0" bIns="0">
-            <a:spAutoFit/>
+            <a:noAutofit/>
           </a:bodyPr>
           <a:lstStyle/>
           <a:p>
-            <a:pPr algn="l">
-              <a:lnSpc>
-                <a:spcPct val="100000"/>
-              </a:lnSpc>
-              <a:spcBef>
-                <a:spcPts val="0"/>
-              </a:spcBef>
-              <a:spcAft>
-                <a:spcPts val="0"/>
-              </a:spcAft>
-            </a:pPr>
-            <a:r>
-              <a:rPr sz="1556" b="1">
+            <a:pPr algn="l"/>
+            <a:r>
+              <a:rPr sz="1718" b="1">
                 <a:solidFill>
                   <a:srgbClr val="F9FBFC"/>
                 </a:solidFill>
-                <a:latin typeface="Arial"/>
+                <a:latin typeface="Segoe UI"/>
+                <a:effectLst>
+                  <a:outerShdw blurRad="50800" dist="25400" dir="5400000" algn="bl" rotWithShape="0">
+                    <a:srgbClr val="000000">
+                      <a:alpha val="55000"/>
+                    </a:srgbClr>
+                  </a:outerShdw>
+                </a:effectLst>
               </a:rPr>
               <a:t>No AI Tokens Required</a:t>
             </a:r>
@@ -3579,8 +3561,8 @@
         </p:nvSpPr>
         <p:spPr>
           <a:xfrm>
-            <a:off x="699959" y="3839765"/>
-            <a:ext cx="2489728" cy="418825"/>
+            <a:off x="699976" y="3812976"/>
+            <a:ext cx="2197395" cy="396136"/>
           </a:xfrm>
           <a:prstGeom prst="rect">
             <a:avLst/>
@@ -3589,27 +3571,24 @@
         </p:spPr>
         <p:txBody>
           <a:bodyPr wrap="none" anchor="t" lIns="0" rIns="0" tIns="0" bIns="0">
-            <a:spAutoFit/>
+            <a:noAutofit/>
           </a:bodyPr>
           <a:lstStyle/>
           <a:p>
-            <a:pPr algn="l">
-              <a:lnSpc>
-                <a:spcPct val="100000"/>
-              </a:lnSpc>
-              <a:spcBef>
-                <a:spcPts val="0"/>
-              </a:spcBef>
-              <a:spcAft>
-                <a:spcPts val="0"/>
-              </a:spcAft>
-            </a:pPr>
-            <a:r>
-              <a:rPr sz="1374" b="0">
+            <a:pPr algn="l"/>
+            <a:r>
+              <a:rPr sz="1667" b="0">
                 <a:solidFill>
                   <a:srgbClr val="F9FBFC"/>
                 </a:solidFill>
-                <a:latin typeface="Arial"/>
+                <a:latin typeface="Segoe UI"/>
+                <a:effectLst>
+                  <a:outerShdw blurRad="50800" dist="25400" dir="5400000" algn="bl" rotWithShape="0">
+                    <a:srgbClr val="000000">
+                      <a:alpha val="55000"/>
+                    </a:srgbClr>
+                  </a:outerShdw>
+                </a:effectLst>
               </a:rPr>
               <a:t>- Runs 100% offline</a:t>
             </a:r>
@@ -3624,8 +3603,8 @@
         </p:nvSpPr>
         <p:spPr>
           <a:xfrm>
-            <a:off x="708819" y="4188023"/>
-            <a:ext cx="3411193" cy="477007"/>
+            <a:off x="708837" y="4152304"/>
+            <a:ext cx="3189628" cy="425903"/>
           </a:xfrm>
           <a:prstGeom prst="rect">
             <a:avLst/>
@@ -3634,27 +3613,24 @@
         </p:spPr>
         <p:txBody>
           <a:bodyPr wrap="none" anchor="t" lIns="0" rIns="0" tIns="0" bIns="0">
-            <a:spAutoFit/>
+            <a:noAutofit/>
           </a:bodyPr>
           <a:lstStyle/>
           <a:p>
-            <a:pPr algn="l">
-              <a:lnSpc>
-                <a:spcPct val="100000"/>
-              </a:lnSpc>
-              <a:spcBef>
-                <a:spcPts val="0"/>
-              </a:spcBef>
-              <a:spcAft>
-                <a:spcPts val="0"/>
-              </a:spcAft>
-            </a:pPr>
-            <a:r>
-              <a:rPr sz="1564" b="1">
+            <a:pPr algn="l"/>
+            <a:r>
+              <a:rPr sz="1792" b="1">
                 <a:solidFill>
                   <a:srgbClr val="F9FBFC"/>
                 </a:solidFill>
-                <a:latin typeface="Arial"/>
+                <a:latin typeface="Segoe UI"/>
+                <a:effectLst>
+                  <a:outerShdw blurRad="50800" dist="25400" dir="5400000" algn="bl" rotWithShape="0">
+                    <a:srgbClr val="000000">
+                      <a:alpha val="55000"/>
+                    </a:srgbClr>
+                  </a:outerShdw>
+                </a:effectLst>
               </a:rPr>
               <a:t>Reduces SME Dependency</a:t>
             </a:r>
@@ -3669,8 +3645,8 @@
         </p:nvSpPr>
         <p:spPr>
           <a:xfrm>
-            <a:off x="699959" y="4446984"/>
-            <a:ext cx="2161899" cy="417237"/>
+            <a:off x="699976" y="4420195"/>
+            <a:ext cx="1905000" cy="388066"/>
           </a:xfrm>
           <a:prstGeom prst="rect">
             <a:avLst/>
@@ -3679,27 +3655,24 @@
         </p:spPr>
         <p:txBody>
           <a:bodyPr wrap="none" anchor="t" lIns="0" rIns="0" tIns="0" bIns="0">
-            <a:spAutoFit/>
+            <a:noAutofit/>
           </a:bodyPr>
           <a:lstStyle/>
           <a:p>
-            <a:pPr algn="l">
-              <a:lnSpc>
-                <a:spcPct val="100000"/>
-              </a:lnSpc>
-              <a:spcBef>
-                <a:spcPts val="0"/>
-              </a:spcBef>
-              <a:spcAft>
-                <a:spcPts val="0"/>
-              </a:spcAft>
-            </a:pPr>
-            <a:r>
-              <a:rPr sz="1368" b="0">
+            <a:pPr algn="l"/>
+            <a:r>
+              <a:rPr sz="1633" b="0">
                 <a:solidFill>
                   <a:srgbClr val="F9FBFC"/>
                 </a:solidFill>
-                <a:latin typeface="Arial"/>
+                <a:latin typeface="Segoe UI"/>
+                <a:effectLst>
+                  <a:outerShdw blurRad="50800" dist="25400" dir="5400000" algn="bl" rotWithShape="0">
+                    <a:srgbClr val="000000">
+                      <a:alpha val="55000"/>
+                    </a:srgbClr>
+                  </a:outerShdw>
+                </a:effectLst>
               </a:rPr>
               <a:t>- 80% reduction</a:t>
             </a:r>
@@ -3714,8 +3687,8 @@
         </p:nvSpPr>
         <p:spPr>
           <a:xfrm>
-            <a:off x="4040271" y="1946671"/>
-            <a:ext cx="4022550" cy="630381"/>
+            <a:off x="4031511" y="1902023"/>
+            <a:ext cx="3782726" cy="534035"/>
           </a:xfrm>
           <a:prstGeom prst="rect">
             <a:avLst/>
@@ -3724,27 +3697,24 @@
         </p:spPr>
         <p:txBody>
           <a:bodyPr wrap="none" anchor="t" lIns="0" rIns="0" tIns="0" bIns="0">
-            <a:spAutoFit/>
+            <a:noAutofit/>
           </a:bodyPr>
           <a:lstStyle/>
           <a:p>
-            <a:pPr algn="l">
-              <a:lnSpc>
-                <a:spcPct val="100000"/>
-              </a:lnSpc>
-              <a:spcBef>
-                <a:spcPts val="0"/>
-              </a:spcBef>
-              <a:spcAft>
-                <a:spcPts val="0"/>
-              </a:spcAft>
-            </a:pPr>
-            <a:r>
-              <a:rPr sz="2068" b="1">
+            <a:pPr algn="l"/>
+            <a:r>
+              <a:rPr sz="2248" b="1">
                 <a:solidFill>
                   <a:srgbClr val="EE6E1E"/>
                 </a:solidFill>
-                <a:latin typeface="Arial"/>
+                <a:latin typeface="Segoe UI"/>
+                <a:effectLst>
+                  <a:outerShdw blurRad="50800" dist="25400" dir="5400000" algn="bl" rotWithShape="0">
+                    <a:srgbClr val="000000">
+                      <a:alpha val="55000"/>
+                    </a:srgbClr>
+                  </a:outerShdw>
+                </a:effectLst>
               </a:rPr>
               <a:t>MANUAL vs AUTOMATED</a:t>
             </a:r>
@@ -3759,8 +3729,8 @@
         </p:nvSpPr>
         <p:spPr>
           <a:xfrm>
-            <a:off x="3845345" y="2411015"/>
-            <a:ext cx="2206200" cy="367145"/>
+            <a:off x="3845441" y="2393156"/>
+            <a:ext cx="1967023" cy="316503"/>
           </a:xfrm>
           <a:prstGeom prst="rect">
             <a:avLst/>
@@ -3769,27 +3739,24 @@
         </p:spPr>
         <p:txBody>
           <a:bodyPr wrap="none" anchor="t" lIns="0" rIns="0" tIns="0" bIns="0">
-            <a:spAutoFit/>
+            <a:noAutofit/>
           </a:bodyPr>
           <a:lstStyle/>
           <a:p>
-            <a:pPr algn="l">
-              <a:lnSpc>
-                <a:spcPct val="100000"/>
-              </a:lnSpc>
-              <a:spcBef>
-                <a:spcPts val="0"/>
-              </a:spcBef>
-              <a:spcAft>
-                <a:spcPts val="0"/>
-              </a:spcAft>
-            </a:pPr>
-            <a:r>
-              <a:rPr sz="1204" b="1">
+            <a:pPr algn="l"/>
+            <a:r>
+              <a:rPr sz="1332" b="1">
                 <a:solidFill>
                   <a:srgbClr val="F9FBFC"/>
                 </a:solidFill>
-                <a:latin typeface="Arial"/>
+                <a:latin typeface="Segoe UI"/>
+                <a:effectLst>
+                  <a:outerShdw blurRad="50800" dist="25400" dir="5400000" algn="bl" rotWithShape="0">
+                    <a:srgbClr val="000000">
+                      <a:alpha val="55000"/>
+                    </a:srgbClr>
+                  </a:outerShdw>
+                </a:effectLst>
               </a:rPr>
               <a:t>MANUAL PROCESS</a:t>
             </a:r>
@@ -3804,8 +3771,8 @@
         </p:nvSpPr>
         <p:spPr>
           <a:xfrm>
-            <a:off x="5998384" y="2411015"/>
-            <a:ext cx="2516309" cy="361658"/>
+            <a:off x="5998534" y="2393156"/>
+            <a:ext cx="2285861" cy="318255"/>
           </a:xfrm>
           <a:prstGeom prst="rect">
             <a:avLst/>
@@ -3814,27 +3781,24 @@
         </p:spPr>
         <p:txBody>
           <a:bodyPr wrap="none" anchor="t" lIns="0" rIns="0" tIns="0" bIns="0">
-            <a:spAutoFit/>
+            <a:noAutofit/>
           </a:bodyPr>
           <a:lstStyle/>
           <a:p>
-            <a:pPr algn="l">
-              <a:lnSpc>
-                <a:spcPct val="100000"/>
-              </a:lnSpc>
-              <a:spcBef>
-                <a:spcPts val="0"/>
-              </a:spcBef>
-              <a:spcAft>
-                <a:spcPts val="0"/>
-              </a:spcAft>
-            </a:pPr>
-            <a:r>
-              <a:rPr sz="1186" b="1">
+            <a:pPr algn="l"/>
+            <a:r>
+              <a:rPr sz="1339" b="1">
                 <a:solidFill>
                   <a:srgbClr val="F9FBFC"/>
                 </a:solidFill>
-                <a:latin typeface="Arial"/>
+                <a:latin typeface="Segoe UI"/>
+                <a:effectLst>
+                  <a:outerShdw blurRad="50800" dist="25400" dir="5400000" algn="bl" rotWithShape="0">
+                    <a:srgbClr val="000000">
+                      <a:alpha val="55000"/>
+                    </a:srgbClr>
+                  </a:outerShdw>
+                </a:effectLst>
               </a:rPr>
               <a:t>AUTOMATED PROCESS</a:t>
             </a:r>
@@ -3849,8 +3813,8 @@
         </p:nvSpPr>
         <p:spPr>
           <a:xfrm>
-            <a:off x="3801044" y="2759273"/>
-            <a:ext cx="2489728" cy="323426"/>
+            <a:off x="3801139" y="2741414"/>
+            <a:ext cx="2223976" cy="306836"/>
           </a:xfrm>
           <a:prstGeom prst="rect">
             <a:avLst/>
@@ -3859,27 +3823,24 @@
         </p:spPr>
         <p:txBody>
           <a:bodyPr wrap="none" anchor="t" lIns="0" rIns="0" tIns="0" bIns="0">
-            <a:spAutoFit/>
+            <a:noAutofit/>
           </a:bodyPr>
           <a:lstStyle/>
           <a:p>
-            <a:pPr algn="l">
-              <a:lnSpc>
-                <a:spcPct val="100000"/>
-              </a:lnSpc>
-              <a:spcBef>
-                <a:spcPts val="0"/>
-              </a:spcBef>
-              <a:spcAft>
-                <a:spcPts val="0"/>
-              </a:spcAft>
-            </a:pPr>
-            <a:r>
-              <a:rPr sz="1061" b="0">
+            <a:pPr algn="l"/>
+            <a:r>
+              <a:rPr sz="1291" b="0">
                 <a:solidFill>
                   <a:srgbClr val="F9FBFC"/>
                 </a:solidFill>
-                <a:latin typeface="Arial"/>
+                <a:latin typeface="Segoe UI"/>
+                <a:effectLst>
+                  <a:outerShdw blurRad="50800" dist="25400" dir="5400000" algn="bl" rotWithShape="0">
+                    <a:srgbClr val="000000">
+                      <a:alpha val="55000"/>
+                    </a:srgbClr>
+                  </a:outerShdw>
+                </a:effectLst>
               </a:rPr>
               <a:t>10-15 minutes per defect</a:t>
             </a:r>
@@ -3894,8 +3855,8 @@
         </p:nvSpPr>
         <p:spPr>
           <a:xfrm>
-            <a:off x="3792184" y="3062882"/>
-            <a:ext cx="1674586" cy="339047"/>
+            <a:off x="3792279" y="3036093"/>
+            <a:ext cx="1426534" cy="314395"/>
           </a:xfrm>
           <a:prstGeom prst="rect">
             <a:avLst/>
@@ -3904,27 +3865,24 @@
         </p:spPr>
         <p:txBody>
           <a:bodyPr wrap="none" anchor="t" lIns="0" rIns="0" tIns="0" bIns="0">
-            <a:spAutoFit/>
+            <a:noAutofit/>
           </a:bodyPr>
           <a:lstStyle/>
           <a:p>
-            <a:pPr algn="l">
-              <a:lnSpc>
-                <a:spcPct val="100000"/>
-              </a:lnSpc>
-              <a:spcBef>
-                <a:spcPts val="0"/>
-              </a:spcBef>
-              <a:spcAft>
-                <a:spcPts val="0"/>
-              </a:spcAft>
-            </a:pPr>
-            <a:r>
-              <a:rPr sz="1112" b="0">
+            <a:pPr algn="l"/>
+            <a:r>
+              <a:rPr sz="1323" b="0">
                 <a:solidFill>
                   <a:srgbClr val="F9FBFC"/>
                 </a:solidFill>
-                <a:latin typeface="Arial"/>
+                <a:latin typeface="Segoe UI"/>
+                <a:effectLst>
+                  <a:outerShdw blurRad="50800" dist="25400" dir="5400000" algn="bl" rotWithShape="0">
+                    <a:srgbClr val="000000">
+                      <a:alpha val="55000"/>
+                    </a:srgbClr>
+                  </a:outerShdw>
+                </a:effectLst>
               </a:rPr>
               <a:t>Source Code</a:t>
             </a:r>
@@ -3939,8 +3897,8 @@
         </p:nvSpPr>
         <p:spPr>
           <a:xfrm>
-            <a:off x="3801044" y="3250406"/>
-            <a:ext cx="2303663" cy="323850"/>
+            <a:off x="3801139" y="3232546"/>
+            <a:ext cx="2046767" cy="305003"/>
           </a:xfrm>
           <a:prstGeom prst="rect">
             <a:avLst/>
@@ -3949,27 +3907,24 @@
         </p:spPr>
         <p:txBody>
           <a:bodyPr wrap="none" anchor="t" lIns="0" rIns="0" tIns="0" bIns="0">
-            <a:spAutoFit/>
+            <a:noAutofit/>
           </a:bodyPr>
           <a:lstStyle/>
           <a:p>
-            <a:pPr algn="l">
-              <a:lnSpc>
-                <a:spcPct val="100000"/>
-              </a:lnSpc>
-              <a:spcBef>
-                <a:spcPts val="0"/>
-              </a:spcBef>
-              <a:spcAft>
-                <a:spcPts val="0"/>
-              </a:spcAft>
-            </a:pPr>
-            <a:r>
-              <a:rPr sz="1062" b="0">
+            <a:pPr algn="l"/>
+            <a:r>
+              <a:rPr sz="1283" b="0">
                 <a:solidFill>
                   <a:srgbClr val="F9FBFC"/>
                 </a:solidFill>
-                <a:latin typeface="Arial"/>
+                <a:latin typeface="Segoe UI"/>
+                <a:effectLst>
+                  <a:outerShdw blurRad="50800" dist="25400" dir="5400000" algn="bl" rotWithShape="0">
+                    <a:srgbClr val="000000">
+                      <a:alpha val="55000"/>
+                    </a:srgbClr>
+                  </a:outerShdw>
+                </a:effectLst>
               </a:rPr>
               <a:t>Investigation Required</a:t>
             </a:r>
@@ -3984,8 +3939,8 @@
         </p:nvSpPr>
         <p:spPr>
           <a:xfrm>
-            <a:off x="3792184" y="3545085"/>
-            <a:ext cx="2587191" cy="328371"/>
+            <a:off x="3792279" y="3536156"/>
+            <a:ext cx="2356883" cy="313210"/>
           </a:xfrm>
           <a:prstGeom prst="rect">
             <a:avLst/>
@@ -3994,27 +3949,24 @@
         </p:spPr>
         <p:txBody>
           <a:bodyPr wrap="none" anchor="t" lIns="0" rIns="0" tIns="0" bIns="0">
-            <a:spAutoFit/>
+            <a:noAutofit/>
           </a:bodyPr>
           <a:lstStyle/>
           <a:p>
-            <a:pPr algn="l">
-              <a:lnSpc>
-                <a:spcPct val="100000"/>
-              </a:lnSpc>
-              <a:spcBef>
-                <a:spcPts val="0"/>
-              </a:spcBef>
-              <a:spcAft>
-                <a:spcPts val="0"/>
-              </a:spcAft>
-            </a:pPr>
-            <a:r>
-              <a:rPr sz="1077" b="0">
+            <a:pPr algn="l"/>
+            <a:r>
+              <a:rPr sz="1318" b="0">
                 <a:solidFill>
                   <a:srgbClr val="F9FBFC"/>
                 </a:solidFill>
-                <a:latin typeface="Arial"/>
+                <a:latin typeface="Segoe UI"/>
+                <a:effectLst>
+                  <a:outerShdw blurRad="50800" dist="25400" dir="5400000" algn="bl" rotWithShape="0">
+                    <a:srgbClr val="000000">
+                      <a:alpha val="55000"/>
+                    </a:srgbClr>
+                  </a:outerShdw>
+                </a:effectLst>
               </a:rPr>
               <a:t>Context Analysis Required</a:t>
             </a:r>
@@ -4029,8 +3981,8 @@
         </p:nvSpPr>
         <p:spPr>
           <a:xfrm>
-            <a:off x="3792184" y="3830835"/>
-            <a:ext cx="1887231" cy="403122"/>
+            <a:off x="3792279" y="3804046"/>
+            <a:ext cx="1594883" cy="364615"/>
           </a:xfrm>
           <a:prstGeom prst="rect">
             <a:avLst/>
@@ -4039,27 +3991,24 @@
         </p:spPr>
         <p:txBody>
           <a:bodyPr wrap="none" anchor="t" lIns="0" rIns="0" tIns="0" bIns="0">
-            <a:spAutoFit/>
+            <a:noAutofit/>
           </a:bodyPr>
           <a:lstStyle/>
           <a:p>
-            <a:pPr algn="l">
-              <a:lnSpc>
-                <a:spcPct val="100000"/>
-              </a:lnSpc>
-              <a:spcBef>
-                <a:spcPts val="0"/>
-              </a:spcBef>
-              <a:spcAft>
-                <a:spcPts val="0"/>
-              </a:spcAft>
-            </a:pPr>
-            <a:r>
-              <a:rPr sz="1322" b="0">
+            <a:pPr algn="l"/>
+            <a:r>
+              <a:rPr sz="1534" b="0">
                 <a:solidFill>
                   <a:srgbClr val="F9FBFC"/>
                 </a:solidFill>
-                <a:latin typeface="Arial"/>
+                <a:latin typeface="Segoe UI"/>
+                <a:effectLst>
+                  <a:outerShdw blurRad="50800" dist="25400" dir="5400000" algn="bl" rotWithShape="0">
+                    <a:srgbClr val="000000">
+                      <a:alpha val="55000"/>
+                    </a:srgbClr>
+                  </a:outerShdw>
+                </a:effectLst>
               </a:rPr>
               <a:t>Disposition &amp;</a:t>
             </a:r>
@@ -4074,8 +4023,8 @@
         </p:nvSpPr>
         <p:spPr>
           <a:xfrm>
-            <a:off x="3792184" y="4054078"/>
-            <a:ext cx="2480868" cy="328113"/>
+            <a:off x="3792279" y="4036218"/>
+            <a:ext cx="2232837" cy="304680"/>
           </a:xfrm>
           <a:prstGeom prst="rect">
             <a:avLst/>
@@ -4084,27 +4033,24 @@
         </p:spPr>
         <p:txBody>
           <a:bodyPr wrap="none" anchor="t" lIns="0" rIns="0" tIns="0" bIns="0">
-            <a:spAutoFit/>
+            <a:noAutofit/>
           </a:bodyPr>
           <a:lstStyle/>
           <a:p>
-            <a:pPr algn="l">
-              <a:lnSpc>
-                <a:spcPct val="100000"/>
-              </a:lnSpc>
-              <a:spcBef>
-                <a:spcPts val="0"/>
-              </a:spcBef>
-              <a:spcAft>
-                <a:spcPts val="0"/>
-              </a:spcAft>
-            </a:pPr>
-            <a:r>
-              <a:rPr sz="1076" b="0">
+            <a:pPr algn="l"/>
+            <a:r>
+              <a:rPr sz="1282" b="0">
                 <a:solidFill>
                   <a:srgbClr val="F9FBFC"/>
                 </a:solidFill>
-                <a:latin typeface="Arial"/>
+                <a:latin typeface="Segoe UI"/>
+                <a:effectLst>
+                  <a:outerShdw blurRad="50800" dist="25400" dir="5400000" algn="bl" rotWithShape="0">
+                    <a:srgbClr val="000000">
+                      <a:alpha val="55000"/>
+                    </a:srgbClr>
+                  </a:outerShdw>
+                </a:effectLst>
               </a:rPr>
               <a:t>Documentation Required</a:t>
             </a:r>
@@ -4119,8 +4065,8 @@
         </p:nvSpPr>
         <p:spPr>
           <a:xfrm>
-            <a:off x="6051546" y="2768203"/>
-            <a:ext cx="2330244" cy="326504"/>
+            <a:off x="6051697" y="2750343"/>
+            <a:ext cx="2064488" cy="307904"/>
           </a:xfrm>
           <a:prstGeom prst="rect">
             <a:avLst/>
@@ -4129,27 +4075,24 @@
         </p:spPr>
         <p:txBody>
           <a:bodyPr wrap="none" anchor="t" lIns="0" rIns="0" tIns="0" bIns="0">
-            <a:spAutoFit/>
+            <a:noAutofit/>
           </a:bodyPr>
           <a:lstStyle/>
           <a:p>
-            <a:pPr algn="l">
-              <a:lnSpc>
-                <a:spcPct val="100000"/>
-              </a:lnSpc>
-              <a:spcBef>
-                <a:spcPts val="0"/>
-              </a:spcBef>
-              <a:spcAft>
-                <a:spcPts val="0"/>
-              </a:spcAft>
-            </a:pPr>
-            <a:r>
-              <a:rPr sz="1071" b="0">
+            <a:pPr algn="l"/>
+            <a:r>
+              <a:rPr sz="1296" b="0">
                 <a:solidFill>
                   <a:srgbClr val="F9FBFC"/>
                 </a:solidFill>
-                <a:latin typeface="Arial"/>
+                <a:latin typeface="Segoe UI"/>
+                <a:effectLst>
+                  <a:outerShdw blurRad="50800" dist="25400" dir="5400000" algn="bl" rotWithShape="0">
+                    <a:srgbClr val="000000">
+                      <a:alpha val="55000"/>
+                    </a:srgbClr>
+                  </a:outerShdw>
+                </a:effectLst>
               </a:rPr>
               <a:t>1-2 minutes per defect</a:t>
             </a:r>
@@ -4164,8 +4107,8 @@
         </p:nvSpPr>
         <p:spPr>
           <a:xfrm>
-            <a:off x="6033825" y="3143250"/>
-            <a:ext cx="2161899" cy="329397"/>
+            <a:off x="6033976" y="3134320"/>
+            <a:ext cx="1940441" cy="312842"/>
           </a:xfrm>
           <a:prstGeom prst="rect">
             <a:avLst/>
@@ -4174,27 +4117,24 @@
         </p:spPr>
         <p:txBody>
           <a:bodyPr wrap="none" anchor="t" lIns="0" rIns="0" tIns="0" bIns="0">
-            <a:spAutoFit/>
+            <a:noAutofit/>
           </a:bodyPr>
           <a:lstStyle/>
           <a:p>
-            <a:pPr algn="l">
-              <a:lnSpc>
-                <a:spcPct val="100000"/>
-              </a:lnSpc>
-              <a:spcBef>
-                <a:spcPts val="0"/>
-              </a:spcBef>
-              <a:spcAft>
-                <a:spcPts val="0"/>
-              </a:spcAft>
-            </a:pPr>
-            <a:r>
-              <a:rPr sz="1080" b="0">
+            <a:pPr algn="l"/>
+            <a:r>
+              <a:rPr sz="1316" b="0">
                 <a:solidFill>
                   <a:srgbClr val="F9FBFC"/>
                 </a:solidFill>
-                <a:latin typeface="Arial"/>
+                <a:latin typeface="Segoe UI"/>
+                <a:effectLst>
+                  <a:outerShdw blurRad="50800" dist="25400" dir="5400000" algn="bl" rotWithShape="0">
+                    <a:srgbClr val="000000">
+                      <a:alpha val="55000"/>
+                    </a:srgbClr>
+                  </a:outerShdw>
+                </a:effectLst>
               </a:rPr>
               <a:t>Automated Analysis</a:t>
             </a:r>
@@ -4209,8 +4149,8 @@
         </p:nvSpPr>
         <p:spPr>
           <a:xfrm>
-            <a:off x="6042686" y="3518296"/>
-            <a:ext cx="2206200" cy="336550"/>
+            <a:off x="6042837" y="3500437"/>
+            <a:ext cx="1975883" cy="312316"/>
           </a:xfrm>
           <a:prstGeom prst="rect">
             <a:avLst/>
@@ -4219,27 +4159,24 @@
         </p:spPr>
         <p:txBody>
           <a:bodyPr wrap="none" anchor="t" lIns="0" rIns="0" tIns="0" bIns="0">
-            <a:spAutoFit/>
+            <a:noAutofit/>
           </a:bodyPr>
           <a:lstStyle/>
           <a:p>
-            <a:pPr algn="l">
-              <a:lnSpc>
-                <a:spcPct val="100000"/>
-              </a:lnSpc>
-              <a:spcBef>
-                <a:spcPts val="0"/>
-              </a:spcBef>
-              <a:spcAft>
-                <a:spcPts val="0"/>
-              </a:spcAft>
-            </a:pPr>
-            <a:r>
-              <a:rPr sz="1104" b="0">
+            <a:pPr algn="l"/>
+            <a:r>
+              <a:rPr sz="1314" b="0">
                 <a:solidFill>
                   <a:srgbClr val="F9FBFC"/>
                 </a:solidFill>
-                <a:latin typeface="Arial"/>
+                <a:latin typeface="Segoe UI"/>
+                <a:effectLst>
+                  <a:outerShdw blurRad="50800" dist="25400" dir="5400000" algn="bl" rotWithShape="0">
+                    <a:srgbClr val="000000">
+                      <a:alpha val="55000"/>
+                    </a:srgbClr>
+                  </a:outerShdw>
+                </a:effectLst>
               </a:rPr>
               <a:t>One Controlled Flow</a:t>
             </a:r>
@@ -4254,8 +4191,8 @@
         </p:nvSpPr>
         <p:spPr>
           <a:xfrm>
-            <a:off x="6042686" y="3884414"/>
-            <a:ext cx="1772048" cy="327102"/>
+            <a:off x="6042837" y="3866554"/>
+            <a:ext cx="1506279" cy="307168"/>
           </a:xfrm>
           <a:prstGeom prst="rect">
             <a:avLst/>
@@ -4264,27 +4201,24 @@
         </p:spPr>
         <p:txBody>
           <a:bodyPr wrap="none" anchor="t" lIns="0" rIns="0" tIns="0" bIns="0">
-            <a:spAutoFit/>
+            <a:noAutofit/>
           </a:bodyPr>
           <a:lstStyle/>
           <a:p>
-            <a:pPr algn="l">
-              <a:lnSpc>
-                <a:spcPct val="100000"/>
-              </a:lnSpc>
-              <a:spcBef>
-                <a:spcPts val="0"/>
-              </a:spcBef>
-              <a:spcAft>
-                <a:spcPts val="0"/>
-              </a:spcAft>
-            </a:pPr>
-            <a:r>
-              <a:rPr sz="1073" b="0">
+            <a:pPr algn="l"/>
+            <a:r>
+              <a:rPr sz="1293" b="0">
                 <a:solidFill>
                   <a:srgbClr val="F9FBFC"/>
                 </a:solidFill>
-                <a:latin typeface="Arial"/>
+                <a:latin typeface="Segoe UI"/>
+                <a:effectLst>
+                  <a:outerShdw blurRad="50800" dist="25400" dir="5400000" algn="bl" rotWithShape="0">
+                    <a:srgbClr val="000000">
+                      <a:alpha val="55000"/>
+                    </a:srgbClr>
+                  </a:outerShdw>
+                </a:effectLst>
               </a:rPr>
               <a:t>Higher Quality</a:t>
             </a:r>
@@ -4299,8 +4233,8 @@
         </p:nvSpPr>
         <p:spPr>
           <a:xfrm>
-            <a:off x="3174182" y="4393406"/>
-            <a:ext cx="4850983" cy="701905"/>
+            <a:off x="3017029" y="4348757"/>
+            <a:ext cx="5174290" cy="624064"/>
           </a:xfrm>
           <a:prstGeom prst="rect">
             <a:avLst/>
@@ -4309,27 +4243,24 @@
         </p:spPr>
         <p:txBody>
           <a:bodyPr wrap="none" anchor="t" lIns="0" rIns="0" tIns="0" bIns="0">
-            <a:spAutoFit/>
+            <a:noAutofit/>
           </a:bodyPr>
           <a:lstStyle/>
           <a:p>
-            <a:pPr algn="ctr">
-              <a:lnSpc>
-                <a:spcPct val="100000"/>
-              </a:lnSpc>
-              <a:spcBef>
-                <a:spcPts val="0"/>
-              </a:spcBef>
-              <a:spcAft>
-                <a:spcPts val="0"/>
-              </a:spcAft>
-            </a:pPr>
-            <a:r>
-              <a:rPr sz="2302" b="1">
+            <a:pPr algn="ctr"/>
+            <a:r>
+              <a:rPr sz="2627" b="1">
                 <a:solidFill>
                   <a:srgbClr val="F6962D"/>
                 </a:solidFill>
-                <a:latin typeface="Arial"/>
+                <a:latin typeface="Segoe UI"/>
+                <a:effectLst>
+                  <a:outerShdw blurRad="50800" dist="25400" dir="5400000" algn="bl" rotWithShape="0">
+                    <a:srgbClr val="000000">
+                      <a:alpha val="55000"/>
+                    </a:srgbClr>
+                  </a:outerShdw>
+                </a:effectLst>
               </a:rPr>
               <a:t>~90% Time Reduction</a:t>
             </a:r>
@@ -4344,8 +4275,8 @@
         </p:nvSpPr>
         <p:spPr>
           <a:xfrm>
-            <a:off x="10251301" y="1964531"/>
-            <a:ext cx="2215060" cy="310624"/>
+            <a:off x="10251558" y="1937742"/>
+            <a:ext cx="1887002" cy="291166"/>
           </a:xfrm>
           <a:prstGeom prst="rect">
             <a:avLst/>
@@ -4354,27 +4285,24 @@
         </p:spPr>
         <p:txBody>
           <a:bodyPr wrap="none" anchor="t" lIns="0" rIns="0" tIns="0" bIns="0">
-            <a:spAutoFit/>
+            <a:noAutofit/>
           </a:bodyPr>
           <a:lstStyle/>
           <a:p>
-            <a:pPr algn="l">
-              <a:lnSpc>
-                <a:spcPct val="100000"/>
-              </a:lnSpc>
-              <a:spcBef>
-                <a:spcPts val="0"/>
-              </a:spcBef>
-              <a:spcAft>
-                <a:spcPts val="0"/>
-              </a:spcAft>
-            </a:pPr>
-            <a:r>
-              <a:rPr sz="1019" b="0">
+            <a:pPr algn="l"/>
+            <a:r>
+              <a:rPr sz="1225" b="0">
                 <a:solidFill>
                   <a:srgbClr val="F9FBFC"/>
                 </a:solidFill>
-                <a:latin typeface="Arial"/>
+                <a:latin typeface="Segoe UI"/>
+                <a:effectLst>
+                  <a:outerShdw blurRad="50800" dist="25400" dir="5400000" algn="bl" rotWithShape="0">
+                    <a:srgbClr val="000000">
+                      <a:alpha val="55000"/>
+                    </a:srgbClr>
+                  </a:outerShdw>
+                </a:effectLst>
               </a:rPr>
               <a:t>* AI used to DEVELOP,</a:t>
             </a:r>
@@ -4389,8 +4317,8 @@
         </p:nvSpPr>
         <p:spPr>
           <a:xfrm>
-            <a:off x="10251301" y="2134195"/>
-            <a:ext cx="2356824" cy="317424"/>
+            <a:off x="10251558" y="2107406"/>
+            <a:ext cx="2091069" cy="306807"/>
           </a:xfrm>
           <a:prstGeom prst="rect">
             <a:avLst/>
@@ -4399,27 +4327,24 @@
         </p:spPr>
         <p:txBody>
           <a:bodyPr wrap="none" anchor="t" lIns="0" rIns="0" tIns="0" bIns="0">
-            <a:spAutoFit/>
+            <a:noAutofit/>
           </a:bodyPr>
           <a:lstStyle/>
           <a:p>
-            <a:pPr algn="l">
-              <a:lnSpc>
-                <a:spcPct val="100000"/>
-              </a:lnSpc>
-              <a:spcBef>
-                <a:spcPts val="0"/>
-              </a:spcBef>
-              <a:spcAft>
-                <a:spcPts val="0"/>
-              </a:spcAft>
-            </a:pPr>
-            <a:r>
-              <a:rPr sz="1041" b="0">
+            <a:pPr algn="l"/>
+            <a:r>
+              <a:rPr sz="1291" b="0">
                 <a:solidFill>
                   <a:srgbClr val="F9FBFC"/>
                 </a:solidFill>
-                <a:latin typeface="Arial"/>
+                <a:latin typeface="Segoe UI"/>
+                <a:effectLst>
+                  <a:outerShdw blurRad="50800" dist="25400" dir="5400000" algn="bl" rotWithShape="0">
+                    <a:srgbClr val="000000">
+                      <a:alpha val="55000"/>
+                    </a:srgbClr>
+                  </a:outerShdw>
+                </a:effectLst>
               </a:rPr>
               <a:t>analysis is RULE-BASED</a:t>
             </a:r>
@@ -4434,8 +4359,8 @@
         </p:nvSpPr>
         <p:spPr>
           <a:xfrm>
-            <a:off x="7380582" y="3429000"/>
-            <a:ext cx="2303663" cy="382419"/>
+            <a:off x="7207988" y="3402210"/>
+            <a:ext cx="2658139" cy="318476"/>
           </a:xfrm>
           <a:prstGeom prst="rect">
             <a:avLst/>
@@ -4444,27 +4369,24 @@
         </p:spPr>
         <p:txBody>
           <a:bodyPr wrap="none" anchor="t" lIns="0" rIns="0" tIns="0" bIns="0">
-            <a:spAutoFit/>
+            <a:noAutofit/>
           </a:bodyPr>
           <a:lstStyle/>
           <a:p>
-            <a:pPr algn="ctr">
-              <a:lnSpc>
-                <a:spcPct val="100000"/>
-              </a:lnSpc>
-              <a:spcBef>
-                <a:spcPts val="0"/>
-              </a:spcBef>
-              <a:spcAft>
-                <a:spcPts val="0"/>
-              </a:spcAft>
-            </a:pPr>
-            <a:r>
-              <a:rPr sz="1254" b="1">
+            <a:pPr algn="ctr"/>
+            <a:r>
+              <a:rPr sz="1340" b="1">
                 <a:solidFill>
                   <a:srgbClr val="F9FBFC"/>
                 </a:solidFill>
-                <a:latin typeface="Arial"/>
+                <a:latin typeface="Segoe UI"/>
+                <a:effectLst>
+                  <a:outerShdw blurRad="50800" dist="25400" dir="5400000" algn="bl" rotWithShape="0">
+                    <a:srgbClr val="000000">
+                      <a:alpha val="55000"/>
+                    </a:srgbClr>
+                  </a:outerShdw>
+                </a:effectLst>
               </a:rPr>
               <a:t>HTML/Excel</a:t>
             </a:r>
@@ -4479,8 +4401,8 @@
         </p:nvSpPr>
         <p:spPr>
           <a:xfrm>
-            <a:off x="7376152" y="3625453"/>
-            <a:ext cx="2303663" cy="381712"/>
+            <a:off x="7207988" y="3598664"/>
+            <a:ext cx="2658139" cy="327029"/>
           </a:xfrm>
           <a:prstGeom prst="rect">
             <a:avLst/>
@@ -4489,27 +4411,24 @@
         </p:spPr>
         <p:txBody>
           <a:bodyPr wrap="none" anchor="t" lIns="0" rIns="0" tIns="0" bIns="0">
-            <a:spAutoFit/>
+            <a:noAutofit/>
           </a:bodyPr>
           <a:lstStyle/>
           <a:p>
-            <a:pPr algn="ctr">
-              <a:lnSpc>
-                <a:spcPct val="100000"/>
-              </a:lnSpc>
-              <a:spcBef>
-                <a:spcPts val="0"/>
-              </a:spcBef>
-              <a:spcAft>
-                <a:spcPts val="0"/>
-              </a:spcAft>
-            </a:pPr>
-            <a:r>
-              <a:rPr sz="1252" b="1">
+            <a:pPr algn="ctr"/>
+            <a:r>
+              <a:rPr sz="1376" b="1">
                 <a:solidFill>
                   <a:srgbClr val="F9FBFC"/>
                 </a:solidFill>
-                <a:latin typeface="Arial"/>
+                <a:latin typeface="Segoe UI"/>
+                <a:effectLst>
+                  <a:outerShdw blurRad="50800" dist="25400" dir="5400000" algn="bl" rotWithShape="0">
+                    <a:srgbClr val="000000">
+                      <a:alpha val="55000"/>
+                    </a:srgbClr>
+                  </a:outerShdw>
+                </a:effectLst>
               </a:rPr>
               <a:t>Reports</a:t>
             </a:r>
@@ -4524,8 +4443,8 @@
         </p:nvSpPr>
         <p:spPr>
           <a:xfrm>
-            <a:off x="8731770" y="4429125"/>
-            <a:ext cx="2303663" cy="417443"/>
+            <a:off x="8568069" y="4402335"/>
+            <a:ext cx="2658139" cy="374755"/>
           </a:xfrm>
           <a:prstGeom prst="rect">
             <a:avLst/>
@@ -4534,27 +4453,24 @@
         </p:spPr>
         <p:txBody>
           <a:bodyPr wrap="none" anchor="t" lIns="0" rIns="0" tIns="0" bIns="0">
-            <a:spAutoFit/>
+            <a:noAutofit/>
           </a:bodyPr>
           <a:lstStyle/>
           <a:p>
-            <a:pPr algn="ctr">
-              <a:lnSpc>
-                <a:spcPct val="100000"/>
-              </a:lnSpc>
-              <a:spcBef>
-                <a:spcPts val="0"/>
-              </a:spcBef>
-              <a:spcAft>
-                <a:spcPts val="0"/>
-              </a:spcAft>
-            </a:pPr>
-            <a:r>
-              <a:rPr sz="1369" b="1">
+            <a:pPr algn="ctr"/>
+            <a:r>
+              <a:rPr sz="1577" b="1">
                 <a:solidFill>
                   <a:srgbClr val="F9FBFC"/>
                 </a:solidFill>
-                <a:latin typeface="Arial"/>
+                <a:latin typeface="Segoe UI"/>
+                <a:effectLst>
+                  <a:outerShdw blurRad="50800" dist="25400" dir="5400000" algn="bl" rotWithShape="0">
+                    <a:srgbClr val="000000">
+                      <a:alpha val="55000"/>
+                    </a:srgbClr>
+                  </a:outerShdw>
+                </a:effectLst>
               </a:rPr>
               <a:t>Rules Engine</a:t>
             </a:r>
@@ -4569,8 +4485,8 @@
         </p:nvSpPr>
         <p:spPr>
           <a:xfrm>
-            <a:off x="8700759" y="4670226"/>
-            <a:ext cx="2303663" cy="382621"/>
+            <a:off x="8541488" y="4634507"/>
+            <a:ext cx="2658139" cy="332110"/>
           </a:xfrm>
           <a:prstGeom prst="rect">
             <a:avLst/>
@@ -4579,27 +4495,24 @@
         </p:spPr>
         <p:txBody>
           <a:bodyPr wrap="none" anchor="t" lIns="0" rIns="0" tIns="0" bIns="0">
-            <a:spAutoFit/>
+            <a:noAutofit/>
           </a:bodyPr>
           <a:lstStyle/>
           <a:p>
-            <a:pPr algn="ctr">
-              <a:lnSpc>
-                <a:spcPct val="100000"/>
-              </a:lnSpc>
-              <a:spcBef>
-                <a:spcPts val="0"/>
-              </a:spcBef>
-              <a:spcAft>
-                <a:spcPts val="0"/>
-              </a:spcAft>
-            </a:pPr>
-            <a:r>
-              <a:rPr sz="1255" b="1">
+            <a:pPr algn="ctr"/>
+            <a:r>
+              <a:rPr sz="1398" b="1">
                 <a:solidFill>
                   <a:srgbClr val="F9FBFC"/>
                 </a:solidFill>
-                <a:latin typeface="Arial"/>
+                <a:latin typeface="Segoe UI"/>
+                <a:effectLst>
+                  <a:outerShdw blurRad="50800" dist="25400" dir="5400000" algn="bl" rotWithShape="0">
+                    <a:srgbClr val="000000">
+                      <a:alpha val="55000"/>
+                    </a:srgbClr>
+                  </a:outerShdw>
+                </a:effectLst>
               </a:rPr>
               <a:t>AI Developed</a:t>
             </a:r>
@@ -4614,8 +4527,8 @@
         </p:nvSpPr>
         <p:spPr>
           <a:xfrm>
-            <a:off x="8736200" y="4857750"/>
-            <a:ext cx="2303663" cy="324970"/>
+            <a:off x="8563639" y="4839890"/>
+            <a:ext cx="2658139" cy="315419"/>
           </a:xfrm>
           <a:prstGeom prst="rect">
             <a:avLst/>
@@ -4624,27 +4537,24 @@
         </p:spPr>
         <p:txBody>
           <a:bodyPr wrap="none" anchor="t" lIns="0" rIns="0" tIns="0" bIns="0">
-            <a:spAutoFit/>
+            <a:noAutofit/>
           </a:bodyPr>
           <a:lstStyle/>
           <a:p>
-            <a:pPr algn="ctr">
-              <a:lnSpc>
-                <a:spcPct val="100000"/>
-              </a:lnSpc>
-              <a:spcBef>
-                <a:spcPts val="0"/>
-              </a:spcBef>
-              <a:spcAft>
-                <a:spcPts val="0"/>
-              </a:spcAft>
-            </a:pPr>
-            <a:r>
-              <a:rPr sz="1066" b="0">
+            <a:pPr algn="ctr"/>
+            <a:r>
+              <a:rPr sz="1327" b="0">
                 <a:solidFill>
                   <a:srgbClr val="F9FBFC"/>
                 </a:solidFill>
-                <a:latin typeface="Arial"/>
+                <a:latin typeface="Segoe UI"/>
+                <a:effectLst>
+                  <a:outerShdw blurRad="50800" dist="25400" dir="5400000" algn="bl" rotWithShape="0">
+                    <a:srgbClr val="000000">
+                      <a:alpha val="55000"/>
+                    </a:srgbClr>
+                  </a:outerShdw>
+                </a:effectLst>
               </a:rPr>
               <a:t>20+ Checker Rules</a:t>
             </a:r>
@@ -4659,8 +4569,8 @@
         </p:nvSpPr>
         <p:spPr>
           <a:xfrm>
-            <a:off x="11057584" y="5482828"/>
-            <a:ext cx="1293595" cy="406400"/>
+            <a:off x="11057860" y="5447109"/>
+            <a:ext cx="1027813" cy="355047"/>
           </a:xfrm>
           <a:prstGeom prst="rect">
             <a:avLst/>
@@ -4669,27 +4579,24 @@
         </p:spPr>
         <p:txBody>
           <a:bodyPr wrap="none" anchor="t" lIns="0" rIns="0" tIns="0" bIns="0">
-            <a:spAutoFit/>
+            <a:noAutofit/>
           </a:bodyPr>
           <a:lstStyle/>
           <a:p>
-            <a:pPr algn="l">
-              <a:lnSpc>
-                <a:spcPct val="100000"/>
-              </a:lnSpc>
-              <a:spcBef>
-                <a:spcPts val="0"/>
-              </a:spcBef>
-              <a:spcAft>
-                <a:spcPts val="0"/>
-              </a:spcAft>
-            </a:pPr>
-            <a:r>
-              <a:rPr sz="1333" b="1">
+            <a:pPr algn="l"/>
+            <a:r>
+              <a:rPr sz="1494" b="1">
                 <a:solidFill>
                   <a:srgbClr val="F9FBFC"/>
                 </a:solidFill>
-                <a:latin typeface="Arial"/>
+                <a:latin typeface="Segoe UI"/>
+                <a:effectLst>
+                  <a:outerShdw blurRad="50800" dist="25400" dir="5400000" algn="bl" rotWithShape="0">
+                    <a:srgbClr val="000000">
+                      <a:alpha val="55000"/>
+                    </a:srgbClr>
+                  </a:outerShdw>
+                </a:effectLst>
               </a:rPr>
               <a:t>Smart</a:t>
             </a:r>
@@ -4704,8 +4611,8 @@
         </p:nvSpPr>
         <p:spPr>
           <a:xfrm>
-            <a:off x="10774056" y="5715000"/>
-            <a:ext cx="1860651" cy="430305"/>
+            <a:off x="10774325" y="5688210"/>
+            <a:ext cx="1594883" cy="372455"/>
           </a:xfrm>
           <a:prstGeom prst="rect">
             <a:avLst/>
@@ -4714,27 +4621,24 @@
         </p:spPr>
         <p:txBody>
           <a:bodyPr wrap="none" anchor="t" lIns="0" rIns="0" tIns="0" bIns="0">
-            <a:spAutoFit/>
+            <a:noAutofit/>
           </a:bodyPr>
           <a:lstStyle/>
           <a:p>
-            <a:pPr algn="l">
-              <a:lnSpc>
-                <a:spcPct val="100000"/>
-              </a:lnSpc>
-              <a:spcBef>
-                <a:spcPts val="0"/>
-              </a:spcBef>
-              <a:spcAft>
-                <a:spcPts val="0"/>
-              </a:spcAft>
-            </a:pPr>
-            <a:r>
-              <a:rPr sz="1411" b="1">
+            <a:pPr algn="l"/>
+            <a:r>
+              <a:rPr sz="1567" b="1">
                 <a:solidFill>
                   <a:srgbClr val="F9FBFC"/>
                 </a:solidFill>
-                <a:latin typeface="Arial"/>
+                <a:latin typeface="Segoe UI"/>
+                <a:effectLst>
+                  <a:outerShdw blurRad="50800" dist="25400" dir="5400000" algn="bl" rotWithShape="0">
+                    <a:srgbClr val="000000">
+                      <a:alpha val="55000"/>
+                    </a:srgbClr>
+                  </a:outerShdw>
+                </a:effectLst>
               </a:rPr>
               <a:t>Dispositions</a:t>
             </a:r>
@@ -4749,8 +4653,8 @@
         </p:nvSpPr>
         <p:spPr>
           <a:xfrm>
-            <a:off x="8824802" y="5598914"/>
-            <a:ext cx="2374545" cy="371605"/>
+            <a:off x="8825023" y="5572125"/>
+            <a:ext cx="2108375" cy="348484"/>
           </a:xfrm>
           <a:prstGeom prst="rect">
             <a:avLst/>
@@ -4759,27 +4663,24 @@
         </p:spPr>
         <p:txBody>
           <a:bodyPr wrap="none" anchor="t" lIns="0" rIns="0" tIns="0" bIns="0">
-            <a:spAutoFit/>
+            <a:noAutofit/>
           </a:bodyPr>
           <a:lstStyle/>
           <a:p>
-            <a:pPr algn="l">
-              <a:lnSpc>
-                <a:spcPct val="100000"/>
-              </a:lnSpc>
-              <a:spcBef>
-                <a:spcPts val="0"/>
-              </a:spcBef>
-              <a:spcAft>
-                <a:spcPts val="0"/>
-              </a:spcAft>
-            </a:pPr>
-            <a:r>
-              <a:rPr sz="1219" b="0">
+            <a:pPr algn="l"/>
+            <a:r>
+              <a:rPr sz="1467" b="0">
                 <a:solidFill>
                   <a:srgbClr val="F9FBFC"/>
                 </a:solidFill>
-                <a:latin typeface="Arial"/>
+                <a:latin typeface="Segoe UI"/>
+                <a:effectLst>
+                  <a:outerShdw blurRad="50800" dist="25400" dir="5400000" algn="bl" rotWithShape="0">
+                    <a:srgbClr val="000000">
+                      <a:alpha val="55000"/>
+                    </a:srgbClr>
+                  </a:outerShdw>
+                </a:effectLst>
               </a:rPr>
               <a:t>AI used to DEVELOP,</a:t>
             </a:r>
@@ -4794,8 +4695,8 @@
         </p:nvSpPr>
         <p:spPr>
           <a:xfrm>
-            <a:off x="8824802" y="5777507"/>
-            <a:ext cx="2383405" cy="322835"/>
+            <a:off x="8825023" y="5768578"/>
+            <a:ext cx="2161953" cy="312037"/>
           </a:xfrm>
           <a:prstGeom prst="rect">
             <a:avLst/>
@@ -4804,27 +4705,24 @@
         </p:spPr>
         <p:txBody>
           <a:bodyPr wrap="none" anchor="t" lIns="0" rIns="0" tIns="0" bIns="0">
-            <a:spAutoFit/>
+            <a:noAutofit/>
           </a:bodyPr>
           <a:lstStyle/>
           <a:p>
-            <a:pPr algn="l">
-              <a:lnSpc>
-                <a:spcPct val="100000"/>
-              </a:lnSpc>
-              <a:spcBef>
-                <a:spcPts val="0"/>
-              </a:spcBef>
-              <a:spcAft>
-                <a:spcPts val="0"/>
-              </a:spcAft>
-            </a:pPr>
-            <a:r>
-              <a:rPr sz="1059" b="0">
+            <a:pPr algn="l"/>
+            <a:r>
+              <a:rPr sz="1313" b="0">
                 <a:solidFill>
                   <a:srgbClr val="F9FBFC"/>
                 </a:solidFill>
-                <a:latin typeface="Arial"/>
+                <a:latin typeface="Segoe UI"/>
+                <a:effectLst>
+                  <a:outerShdw blurRad="50800" dist="25400" dir="5400000" algn="bl" rotWithShape="0">
+                    <a:srgbClr val="000000">
+                      <a:alpha val="55000"/>
+                    </a:srgbClr>
+                  </a:outerShdw>
+                </a:effectLst>
               </a:rPr>
               <a:t>analysis is RULE-BASED</a:t>
             </a:r>
@@ -4839,8 +4737,8 @@
         </p:nvSpPr>
         <p:spPr>
           <a:xfrm>
-            <a:off x="832862" y="5054203"/>
-            <a:ext cx="4837693" cy="637563"/>
+            <a:off x="824023" y="5009554"/>
+            <a:ext cx="4527420" cy="561117"/>
           </a:xfrm>
           <a:prstGeom prst="rect">
             <a:avLst/>
@@ -4849,27 +4747,24 @@
         </p:spPr>
         <p:txBody>
           <a:bodyPr wrap="none" anchor="t" lIns="0" rIns="0" tIns="0" bIns="0">
-            <a:spAutoFit/>
+            <a:noAutofit/>
           </a:bodyPr>
           <a:lstStyle/>
           <a:p>
-            <a:pPr algn="l">
-              <a:lnSpc>
-                <a:spcPct val="100000"/>
-              </a:lnSpc>
-              <a:spcBef>
-                <a:spcPts val="0"/>
-              </a:spcBef>
-              <a:spcAft>
-                <a:spcPts val="0"/>
-              </a:spcAft>
-            </a:pPr>
-            <a:r>
-              <a:rPr sz="2091" b="1">
+            <a:pPr algn="l"/>
+            <a:r>
+              <a:rPr sz="2362" b="1">
                 <a:solidFill>
                   <a:srgbClr val="EE6E1E"/>
                 </a:solidFill>
-                <a:latin typeface="Arial"/>
+                <a:latin typeface="Segoe UI"/>
+                <a:effectLst>
+                  <a:outerShdw blurRad="50800" dist="25400" dir="5400000" algn="bl" rotWithShape="0">
+                    <a:srgbClr val="000000">
+                      <a:alpha val="55000"/>
+                    </a:srgbClr>
+                  </a:outerShdw>
+                </a:effectLst>
               </a:rPr>
               <a:t>COST SAVINGS PER PROGRAM</a:t>
             </a:r>
@@ -4884,8 +4779,8 @@
         </p:nvSpPr>
         <p:spPr>
           <a:xfrm>
-            <a:off x="735400" y="5464968"/>
-            <a:ext cx="6592021" cy="500223"/>
+            <a:off x="735418" y="5411390"/>
+            <a:ext cx="6308512" cy="480270"/>
           </a:xfrm>
           <a:prstGeom prst="rect">
             <a:avLst/>
@@ -4894,36 +4789,40 @@
         </p:spPr>
         <p:txBody>
           <a:bodyPr wrap="none" anchor="t" lIns="0" rIns="0" tIns="0" bIns="0">
-            <a:spAutoFit/>
+            <a:noAutofit/>
           </a:bodyPr>
           <a:lstStyle/>
           <a:p>
-            <a:pPr algn="l">
-              <a:lnSpc>
-                <a:spcPct val="100000"/>
-              </a:lnSpc>
-              <a:spcBef>
-                <a:spcPts val="0"/>
-              </a:spcBef>
-              <a:spcAft>
-                <a:spcPts val="0"/>
-              </a:spcAft>
-            </a:pPr>
-            <a:r>
-              <a:rPr sz="1641" b="0">
+            <a:pPr algn="l"/>
+            <a:r>
+              <a:rPr sz="2021" b="0">
                 <a:solidFill>
                   <a:srgbClr val="F9FBFC"/>
                 </a:solidFill>
-                <a:latin typeface="Arial"/>
+                <a:latin typeface="Segoe UI"/>
+                <a:effectLst>
+                  <a:outerShdw blurRad="50800" dist="25400" dir="5400000" algn="bl" rotWithShape="0">
+                    <a:srgbClr val="000000">
+                      <a:alpha val="55000"/>
+                    </a:srgbClr>
+                  </a:outerShdw>
+                </a:effectLst>
               </a:rPr>
               <a:t>RL1 (1,000 defects): 250 hrs → 33 hrs = </a:t>
             </a:r>
             <a:r>
-              <a:rPr sz="1641" b="1">
+              <a:rPr sz="2021" b="1">
                 <a:solidFill>
                   <a:srgbClr val="F6962D"/>
                 </a:solidFill>
-                <a:latin typeface="Arial"/>
+                <a:latin typeface="Segoe UI"/>
+                <a:effectLst>
+                  <a:outerShdw blurRad="50800" dist="25400" dir="5400000" algn="bl" rotWithShape="0">
+                    <a:srgbClr val="000000">
+                      <a:alpha val="55000"/>
+                    </a:srgbClr>
+                  </a:outerShdw>
+                </a:effectLst>
               </a:rPr>
               <a:t>217 hrs SAVED</a:t>
             </a:r>
@@ -4938,8 +4837,8 @@
         </p:nvSpPr>
         <p:spPr>
           <a:xfrm>
-            <a:off x="735400" y="5768578"/>
-            <a:ext cx="7318561" cy="498517"/>
+            <a:off x="735418" y="5741789"/>
+            <a:ext cx="7088233" cy="476119"/>
           </a:xfrm>
           <a:prstGeom prst="rect">
             <a:avLst/>
@@ -4948,36 +4847,40 @@
         </p:spPr>
         <p:txBody>
           <a:bodyPr wrap="none" anchor="t" lIns="0" rIns="0" tIns="0" bIns="0">
-            <a:spAutoFit/>
+            <a:noAutofit/>
           </a:bodyPr>
           <a:lstStyle/>
           <a:p>
-            <a:pPr algn="l">
-              <a:lnSpc>
-                <a:spcPct val="100000"/>
-              </a:lnSpc>
-              <a:spcBef>
-                <a:spcPts val="0"/>
-              </a:spcBef>
-              <a:spcAft>
-                <a:spcPts val="0"/>
-              </a:spcAft>
-            </a:pPr>
-            <a:r>
-              <a:rPr sz="1635" b="0">
+            <a:pPr algn="l"/>
+            <a:r>
+              <a:rPr sz="2004" b="0">
                 <a:solidFill>
                   <a:srgbClr val="F9FBFC"/>
                 </a:solidFill>
-                <a:latin typeface="Arial"/>
+                <a:latin typeface="Segoe UI"/>
+                <a:effectLst>
+                  <a:outerShdw blurRad="50800" dist="25400" dir="5400000" algn="bl" rotWithShape="0">
+                    <a:srgbClr val="000000">
+                      <a:alpha val="55000"/>
+                    </a:srgbClr>
+                  </a:outerShdw>
+                </a:effectLst>
               </a:rPr>
               <a:t>Program (4,000 defects): 1000 hrs → 133 hrs = </a:t>
             </a:r>
             <a:r>
-              <a:rPr sz="1635" b="1">
+              <a:rPr sz="2004" b="1">
                 <a:solidFill>
                   <a:srgbClr val="F6962D"/>
                 </a:solidFill>
-                <a:latin typeface="Arial"/>
+                <a:latin typeface="Segoe UI"/>
+                <a:effectLst>
+                  <a:outerShdw blurRad="50800" dist="25400" dir="5400000" algn="bl" rotWithShape="0">
+                    <a:srgbClr val="000000">
+                      <a:alpha val="55000"/>
+                    </a:srgbClr>
+                  </a:outerShdw>
+                </a:effectLst>
               </a:rPr>
               <a:t>867 hrs SAVED</a:t>
             </a:r>
@@ -4992,8 +4895,8 @@
         </p:nvSpPr>
         <p:spPr>
           <a:xfrm>
-            <a:off x="735400" y="6098976"/>
-            <a:ext cx="5484490" cy="488603"/>
+            <a:off x="735418" y="6063257"/>
+            <a:ext cx="5289697" cy="476468"/>
           </a:xfrm>
           <a:prstGeom prst="rect">
             <a:avLst/>
@@ -5002,27 +4905,24 @@
         </p:spPr>
         <p:txBody>
           <a:bodyPr wrap="none" anchor="t" lIns="0" rIns="0" tIns="0" bIns="0">
-            <a:spAutoFit/>
+            <a:noAutofit/>
           </a:bodyPr>
           <a:lstStyle/>
           <a:p>
-            <a:pPr algn="l">
-              <a:lnSpc>
-                <a:spcPct val="100000"/>
-              </a:lnSpc>
-              <a:spcBef>
-                <a:spcPts val="0"/>
-              </a:spcBef>
-              <a:spcAft>
-                <a:spcPts val="0"/>
-              </a:spcAft>
-            </a:pPr>
-            <a:r>
-              <a:rPr sz="1603" b="0">
+            <a:pPr algn="l"/>
+            <a:r>
+              <a:rPr sz="2005" b="0">
                 <a:solidFill>
                   <a:srgbClr val="F9FBFC"/>
                 </a:solidFill>
-                <a:latin typeface="Arial"/>
+                <a:latin typeface="Segoe UI"/>
+                <a:effectLst>
+                  <a:outerShdw blurRad="50800" dist="25400" dir="5400000" algn="bl" rotWithShape="0">
+                    <a:srgbClr val="000000">
+                      <a:alpha val="55000"/>
+                    </a:srgbClr>
+                  </a:outerShdw>
+                </a:effectLst>
               </a:rPr>
               <a:t>Cost: $7,595 - $30,345 per release (at $30/hr)</a:t>
             </a:r>
@@ -5037,8 +4937,8 @@
         </p:nvSpPr>
         <p:spPr>
           <a:xfrm>
-            <a:off x="1173982" y="6607968"/>
-            <a:ext cx="9834870" cy="338921"/>
+            <a:off x="726599" y="6581179"/>
+            <a:ext cx="10703220" cy="314495"/>
           </a:xfrm>
           <a:prstGeom prst="rect">
             <a:avLst/>
@@ -5047,27 +4947,24 @@
         </p:spPr>
         <p:txBody>
           <a:bodyPr wrap="none" anchor="t" lIns="0" rIns="0" tIns="0" bIns="0">
-            <a:spAutoFit/>
+            <a:noAutofit/>
           </a:bodyPr>
           <a:lstStyle/>
           <a:p>
-            <a:pPr algn="ctr">
-              <a:lnSpc>
-                <a:spcPct val="100000"/>
-              </a:lnSpc>
-              <a:spcBef>
-                <a:spcPts val="0"/>
-              </a:spcBef>
-              <a:spcAft>
-                <a:spcPts val="0"/>
-              </a:spcAft>
-            </a:pPr>
-            <a:r>
-              <a:rPr sz="1111" b="0">
+            <a:pPr algn="ctr"/>
+            <a:r>
+              <a:rPr sz="1323" b="0">
                 <a:solidFill>
                   <a:srgbClr val="F9FBFC"/>
                 </a:solidFill>
-                <a:latin typeface="Arial"/>
+                <a:latin typeface="Segoe UI"/>
+                <a:effectLst>
+                  <a:outerShdw blurRad="50800" dist="25400" dir="5400000" algn="bl" rotWithShape="0">
+                    <a:srgbClr val="000000">
+                      <a:alpha val="55000"/>
+                    </a:srgbClr>
+                  </a:outerShdw>
+                </a:effectLst>
               </a:rPr>
               <a:t>Rakesh Boya | Tool Owner &amp; Developer | Honeywell Aerospace | CNS AI Day 2026 | Confidential</a:t>
             </a:r>
